--- a/workshop-liderazgo-intergeneracional/entregables/01_Deck_Liderar_entre_Generaciones_AMMX.pptx
+++ b/workshop-liderazgo-intergeneracional/entregables/01_Deck_Liderar_entre_Generaciones_AMMX.pptx
@@ -59,9 +59,11 @@
     <p:sldId id="307" r:id="rId53"/>
     <p:sldId id="308" r:id="rId54"/>
     <p:sldId id="309" r:id="rId55"/>
+    <p:sldId id="310" r:id="rId56"/>
+    <p:sldId id="311" r:id="rId57"/>
   </p:sldIdLst>
   <p:notesMasterIdLst>
-    <p:notesMasterId r:id="rId56"/>
+    <p:notesMasterId r:id="rId58"/>
   </p:notesMasterIdLst>
   <p:sldSz cx="12192000" cy="6858000"/>
   <p:notesSz cx="6858000" cy="12192000"/>
@@ -558,7 +560,7 @@
               <a:t>PROPÓSITO
 Recibir a la sala. La lámina está en pantalla mientras los participantes llegan; no se presenta.
 TIEMPO
-Previo al inicio.
+Previo al inicio y 0:00–0:02 (palabras de la CXO).
 GUION DEL FACILITADOR
 Sin guion. Los facilitadores saludan en la puerta y dirigen a cada persona a su mesa asignada (la CXO en una mesa sin reportes directos, D-13). Cada lugar tiene el workbook cerrado y el sobre del pre-work cerrado.
 PREGUNTA
@@ -669,6 +671,7 @@
 Acumulación de "Quiero crecer…", "Quiero retroalimentación…" y "Estoy dispuesto a cambiar de empresa…" en Millennials/Z; "Valoro la seguridad económica…" y "Me importa que mi experiencia…" en Boomers/X.
 TRANSICIÓN
 B, frente al muro con la sala en semicírculo: "¿Qué ven?"
+COLOCACIÓN EN DOS OLEADAS de 90 s (mesas 1–2, luego 3–4/5) para no amontonarse; superficie ≥ 6 m o dos paneles (G2-28). Tarjetas con adhesivo removible, sin número de mesa.
 LIDERA: B. A observa qué frases generan duda (personas que caminan entre dos zonas) para usarlas en el debrief.
 TARJETAS (D-14, en primera persona): 16 necesidades del Activity Pack. En 120 min, las primeras 12. En 90 min el Muro se elimina.
 NO FOTOGRAFIAR el muro armado (D-14).</a:t>
@@ -865,7 +868,7 @@
 TIEMPO
 0:55–0:57 (2 min).
 GUION DEL FACILITADOR
-B y A mueven, sin prisa, una tarjeta de cada frase al póster central. Una línea por tarjeta, nunca más: "Seguridad económica. La queremos todos, sobre todo cuando hay incertidumbre." "Crecer y saber mi siguiente paso. Así queríamos crecer nosotros a los 27." "Una herramienta nueva si no veo para qué sirve. Depende mucho de cómo presentamos el cambio." A cierra: "Lo que acabamos de hacer no es un error de esta sala. La pregunta es si queremos liderar con ese atajo. Veamos qué dicen los datos."
+B y A sacan las tarjetas de las zonas generacionales y las pegan en el póster central NECESIDADES HUMANAS. Una línea por tarjeta, nunca más: "Saber que mi trabajo tiene futuro. Lo queremos todos, sobre todo cuando hay incertidumbre." "Crecer y saber mi siguiente paso. Así queríamos crecer nosotros a los 27." "Adoptar una herramienta si veo para qué sirve. Depende mucho de cómo presentamos el cambio." "Que mi experiencia se tome en cuenta. Esa también es de todos." A cierra: "Lo que acabamos de hacer no es un error de esta sala. La pregunta es si queremos liderar con ese atajo. Veamos qué dicen los datos."
 PREGUNTA
 Opcional, si hay tiempo: "¿Qué decisiones de liderazgo tomamos en planta con base en la zona donde pusimos una tarjeta?"
 RESPUESTA ESPERADA
@@ -965,15 +968,17 @@
 TIEMPO
 0:57–0:58 (1 min de instrucción; el bloque completo dura 13 min).
 GUION DEL FACILITADOR
-A: "Seis afirmaciones que escuchamos en la industria. Tienen tres segundos para decidir. Cuando cuente tres, todos levantan su tarjeta al mismo tiempo. Nadie mira al vecino antes. Una advertencia: los datos no le dan la razón a nadie en todo. Tampoco a los jóvenes."
+A: "Cinco afirmaciones que escuchamos en la industria. Tienen tres segundos para decidir. Cuando cuente tres, todos levantan su tarjeta al mismo tiempo. Nadie mira al vecino antes. Una advertencia: los datos no le dan la razón a nadie en todo. Tampoco a los jóvenes."
 PREGUNTA
 —
 RESPUESTA ESPERADA
 Energía alta; competencia sana.
 TRANSICIÓN
 "Primera afirmación."
-LIDERA: A · B cuenta votos a ojo y los anota en rotafolio (C / F / D) para el plan de medición.
-RITMO: ≈1:40 por afirmación (lectura 10 s · voto 10 s · distribución 10 s · una voz disidente 30 s · revelación 30 s).
+LIDERA: A · B anuncia la distribución a ojo (no se registra: el dato no alimenta ninguna decisión, G3-13).
+RITMO: ≈2 min por afirmación (voto ≈60 s: lectura, voto, distribución y una voz disidente · revelación ≈40–60 s).
+REGLA DE CORTE (180): si a la 1:05 no ha iniciado la afirmación 4 (reconocimiento), A la resume en una frase y pasa a la 5, que es obligatoria por D-18.
+RESERVA: "La gente ya no quiere trabajar" queda como lámina oculta (comodín) en todas las versiones; su evidencia está en la guía para responder la objeción.
 La CXO vota como cualquier participante y no se le pregunta en plenaria (D-13).
 Versiones 120/90: afirmaciones 1, 2, 4 y 6.</a:t>
             </a:r>
@@ -1066,7 +1071,7 @@
               <a:t>PROPÓSITO
 Voto simultáneo sobre la afirmación 1.
 TIEMPO
-≈40 s (lectura, voto y distribución).
+≈60 s (lectura, voto, distribución y una voz disidente).
 GUION DEL FACILITADOR
 A lee en voz alta: "La Generación Z no tiene lealtad.". "Uno, dos, tres." B anuncia la distribución aproximada ("mayoría ___, unos ___"). A pregunta a una persona que votó distinto a la mayoría: "¿Qué viste tú?"
 PREGUNTA
@@ -1075,7 +1080,7 @@
 Mayoría CIERTO o DEPENDE. Voz disidente típica: "Los de antes también se iban."
 TRANSICIÓN
 "Veamos qué dice la evidencia."
-LIDERA: A · B cuenta y registra.</a:t>
+LIDERA: A · B anuncia la distribución.</a:t>
             </a:r>
             <a:endParaRPr lang="en-US" dirty="0"/>
           </a:p>
@@ -1166,13 +1171,13 @@
               <a:t>PROPÓSITO
 Revelar la evidencia sobre "La Generación Z no tiene lealtad." con prudencia, sin sobrecorregir.
 TIEMPO
-≈60 s.
+≈40–60 s (revelación + una frase de A).
 GUION DEL FACILITADOR
 A: "El dato de Estados Unidos, que es el que tiene series largas, muestra que las personas de 25 a 34 años llevan en promedio menos de tres años con su empleador… y que era prácticamente igual en el año 2000. Los que hoy tienen 55 a 64 llevan casi diez. Es la edad, no la generación. Y la lealtad, según la investigación sobre contrato psicológico, sigue a la reciprocidad."
 PREGUNTA
 —
 RESPUESTA ESPERADA
-Asentimientos; algún "depende del contexto". Validar: casi todo depende, y esa es la lección.
+Asentimientos de reconocimiento ("yo también me moví a los 25"). Alguien: "pero antes no se iban por 15 %". Validar y preguntar: "¿Qué más se ofrecía antes para quedarse?"
 TRANSICIÓN
 "Siguiente afirmación."
 LIDERA: A.
@@ -1268,7 +1273,7 @@
               <a:t>PROPÓSITO
 Voto simultáneo sobre la afirmación 2.
 TIEMPO
-≈40 s (lectura, voto y distribución).
+≈60 s (lectura, voto, distribución y una voz disidente).
 GUION DEL FACILITADOR
 A lee en voz alta: "Los Boomers se resisten a la tecnología.". "Uno, dos, tres." B anuncia la distribución aproximada ("mayoría ___, unos ___"). A pregunta a una persona que votó distinto a la mayoría: "¿Qué viste tú?"
 PREGUNTA
@@ -1277,7 +1282,7 @@
 Muchos votos DEPENDE; risas de reconocimiento entre directores mayores que usan tecnología intensivamente.
 TRANSICIÓN
 "Veamos qué dice la evidencia."
-LIDERA: A · B cuenta y registra.</a:t>
+LIDERA: A · B anuncia la distribución.</a:t>
             </a:r>
             <a:endParaRPr lang="en-US" dirty="0"/>
           </a:p>
@@ -1368,13 +1373,13 @@
               <a:t>PROPÓSITO
 Revelar la evidencia sobre "Los Boomers se resisten a la tecnología." con prudencia, sin sobrecorregir.
 TIEMPO
-≈60 s.
+≈40–60 s (revelación + una frase de A).
 GUION DEL FACILITADOR
 A: "Un meta-análisis con más de 200 mil personas revisó seis estereotipos sobre trabajadores mayores. Solo uno se sostiene: participan menos en capacitación. Y eso puede deberse a que se les ofrece menos. Resistencia al cambio: no se sostiene. Y un dato para planta: la edad se asocia con mejor desempeño en seguridad."
 PREGUNTA
 —
 RESPUESTA ESPERADA
-Asentimientos; algún "depende del contexto". Validar: casi todo depende, y esa es la lección.
+Directores mayores sonríen; alguien puede citar un caso de rechazo a SAP. Preguntar: "¿Se le explicó para qué le servía a él?"
 TRANSICIÓN
 "Siguiente afirmación."
 LIDERA: A.
@@ -1470,7 +1475,7 @@
               <a:t>PROPÓSITO
 Voto simultáneo sobre la afirmación 3.
 TIEMPO
-≈40 s (lectura, voto y distribución).
+≈60 s (lectura, voto, distribución y una voz disidente).
 GUION DEL FACILITADOR
 A lee en voz alta: "La gente ya no quiere trabajar.". "Uno, dos, tres." B anuncia la distribución aproximada ("mayoría ___, unos ___"). A pregunta a una persona que votó distinto a la mayoría: "¿Qué viste tú?"
 PREGUNTA
@@ -1479,7 +1484,8 @@
 Voto dividido. Un director puede decir "en planta cuesta mucho cubrir turnos": validar el dato local y separar disposición de condiciones.
 TRANSICIÓN
 "Veamos qué dice la evidencia."
-LIDERA: A · B cuenta y registra.</a:t>
+LIDERA: A · B anuncia la distribución.
+LÁMINA OCULTA (reserva): se usa solo si un participante plantea esta objeción y hay tiempo.</a:t>
             </a:r>
             <a:endParaRPr lang="en-US" dirty="0"/>
           </a:p>
@@ -1570,13 +1576,13 @@
               <a:t>PROPÓSITO
 Revelar la evidencia sobre "La gente ya no quiere trabajar." con prudencia, sin sobrecorregir.
 TIEMPO
-≈60 s.
+≈40–60 s (revelación + una frase de A).
 GUION DEL FACILITADOR
 A: "México es el país de la OCDE donde más horas se trabajan al año. En Estados Unidos, el empleo en edad productiva está en máximos de 25 años. Lo que sí está bajo, en todo el mundo y en todas las edades, es el compromiso: uno de cada cinco. Esa es una conversación de liderazgo."
 PREGUNTA
 —
 RESPUESTA ESPERADA
-Asentimientos; algún "depende del contexto". Validar: casi todo depende, y esa es la lección.
+Alguien: "en planta no cubrimos turnos". Separar disponibilidad para el trabajo de condiciones del trabajo.
 TRANSICIÓN
 "Siguiente afirmación."
 LIDERA: A.
@@ -1773,7 +1779,7 @@
               <a:t>PROPÓSITO
 Voto simultáneo sobre la afirmación 4.
 TIEMPO
-≈40 s (lectura, voto y distribución).
+≈60 s (lectura, voto, distribución y una voz disidente).
 GUION DEL FACILITADOR
 A lee en voz alta: "Los jóvenes no quieren ser jefes.". "Uno, dos, tres." B anuncia la distribución aproximada ("mayoría ___, unos ___"). A pregunta a una persona que votó distinto a la mayoría: "¿Qué viste tú?"
 PREGUNTA
@@ -1782,7 +1788,7 @@
 Mayoría CIERTO. La pregunta final suele producir silencio: es el momento más fuerte del bloque. No llenarlo.
 TRANSICIÓN
 "Veamos qué dice la evidencia."
-LIDERA: A · B cuenta y registra.</a:t>
+LIDERA: A · B anuncia la distribución.</a:t>
             </a:r>
             <a:endParaRPr lang="en-US" dirty="0"/>
           </a:p>
@@ -1873,13 +1879,13 @@
               <a:t>PROPÓSITO
 Revelar la evidencia sobre "Los jóvenes no quieren ser jefes." con prudencia, sin sobrecorregir.
 TIEMPO
-≈60 s.
+≈40–60 s (revelación + una frase de A).
 GUION DEL FACILITADOR
 A: "Depende de cómo se pregunte. Si la pregunta es si su meta principal hoy es ser jefe, solo 6 %. Si la pregunta es si les interesa llegar a liderazgo senior algún día, tres de cada cuatro. Lo que rechazan es el costo que ven. Y los datos dicen que los jefes de hoy sí estamos desgastados." Pausa. Leer la pregunta final.
 PREGUNTA
 ¿Qué ven cuando nos ven liderar?
 RESPUESTA ESPERADA
-Asentimientos; algún "depende del contexto". Validar: casi todo depende, y esa es la lección.
+Silencio. Algún director: "es que el puesto de jefe sí es pesado". Validar: "Exacto. Eso es lo que ven." No llenar la pausa.
 TRANSICIÓN
 "Siguiente afirmación."
 LIDERA: A.
@@ -1975,7 +1981,7 @@
               <a:t>PROPÓSITO
 Voto simultáneo sobre la afirmación 5.
 TIEMPO
-≈40 s (lectura, voto y distribución).
+≈60 s (lectura, voto, distribución y una voz disidente).
 GUION DEL FACILITADOR
 A lee en voz alta: "Los jóvenes necesitan reconocimiento constante.". "Uno, dos, tres." B anuncia la distribución aproximada ("mayoría ___, unos ___"). A pregunta a una persona que votó distinto a la mayoría: "¿Qué viste tú?"
 PREGUNTA
@@ -1984,7 +1990,7 @@
 Mayoría CIERTO. Aquí la sala acierta en parte: reconocerlo aumenta la credibilidad del bloque.
 TRANSICIÓN
 "Veamos qué dice la evidencia."
-LIDERA: A · B cuenta y registra.</a:t>
+LIDERA: A · B anuncia la distribución.</a:t>
             </a:r>
             <a:endParaRPr lang="en-US" dirty="0"/>
           </a:p>
@@ -2075,13 +2081,13 @@
               <a:t>PROPÓSITO
 Revelar la evidencia sobre "Los jóvenes necesitan reconocimiento constante." con prudencia, sin sobrecorregir.
 TIEMPO
-≈60 s.
+≈40–60 s (revelación + una frase de A).
 GUION DEL FACILITADOR
 A: "Aquí la sala tiene algo de razón. Los más jóvenes quieren reconocimiento con más frecuencia. Pero la mitad de Gen X y Boomers también lo quiere varias veces al mes. Y el efecto del reconocimiento aparece en todas las edades. Lo que cambia es cada cuánto y de qué forma."
 PREGUNTA
 —
 RESPUESTA ESPERADA
-Asentimientos; algún "depende del contexto". Validar: casi todo depende, y esa es la lección.
+La sala acierta en parte; decirlo en voz alta aumenta la credibilidad del bloque: "Aquí tenían razón a medias."
 TRANSICIÓN
 "Siguiente afirmación."
 LIDERA: A.
@@ -2177,7 +2183,7 @@
               <a:t>PROPÓSITO
 Voto simultáneo sobre la afirmación 6.
 TIEMPO
-≈40 s (lectura, voto y distribución).
+≈60 s (lectura, voto, distribución y una voz disidente).
 GUION DEL FACILITADOR
 A lee en voz alta: "Lo quieren todo ya.". "Uno, dos, tres." B anuncia la distribución aproximada ("mayoría ___, unos ___"). A pregunta a una persona que votó distinto a la mayoría: "¿Qué viste tú?"
 PREGUNTA
@@ -2186,7 +2192,7 @@
 Mayoría CIERTO. Contraejemplos de la sala: "yo a los 25 también quería todo ya".
 TRANSICIÓN
 "Veamos qué dice la evidencia."
-LIDERA: A · B cuenta y registra.</a:t>
+LIDERA: A · B anuncia la distribución.</a:t>
             </a:r>
             <a:endParaRPr lang="en-US" dirty="0"/>
           </a:p>
@@ -2277,15 +2283,16 @@
               <a:t>PROPÓSITO
 Revelar la evidencia sobre "Lo quieren todo ya." con prudencia, sin sobrecorregir.
 TIEMPO
-≈60 s.
+≈40–60 s (revelación + una frase de A).
 GUION DEL FACILITADOR
 A: "Esta idea viene del video. Hay algo real: a los 25, casi todos queríamos crecer rápido; los motivos de crecimiento bajan con la edad. Y hay contexto: casi la mitad de la Gen Z no se siente financieramente segura. La prisa se vuelve problema cuando no le mostramos una ruta."
 PREGUNTA
 —
 RESPUESTA ESPERADA
-Asentimientos; algún "depende del contexto". Validar: casi todo depende, y esa es la lección.
+"Yo a los 25 también quería todo ya." Validar y preguntar: "¿Tenía una ruta visible?"
 TRANSICIÓN
-A: "¿En cuántas acertamos como sala? ¿Qué tienen en común las que fallamos?"
+A: "Un minuto antes de cerrar este bloque."
+AFIRMACIÓN TOMADA DEL VIDEO (D-18): obligatoria en todas las versiones.
 LIDERA: A.
 CITAR SIEMPRE qué mide el dato, geografía y año (ver Evidence Pack). Datos de EE. UU. = patrón con series largas; decirlo en voz alta.
 NO DECIR "los datos demuestran". Decir "se asocia", "coincide", "la evidencia sugiere".</a:t>
@@ -2379,13 +2386,13 @@
               <a:t>PROPÓSITO
 Cierre conceptual del Acto 4 (Idea 2): distinguir efecto edad, época y cohorte en lenguaje de directores.
 TIEMPO
-1:08–1:10 (2 min).
+1:08–1:10 (1 min escritura + ≈45 s de A).
 GUION DEL FACILITADOR
-A: "Cuando vemos que alguien joven piensa distinto, puede ser por tres cosas: su edad, la época que todos vivimos, o su generación. Como el año de nacimiento es igual al año de hoy menos la edad, si comparo hoy a alguien de 25 con alguien de 60, matemáticamente no puedo saber si la diferencia es por la edad o por la generación. Es como querer saber si un platillo sabe distinto por la receta o por el horno cuando cambiaste las dos cosas a la vez. Por eso las Academias Nacionales de Estados Unidos concluyeron en 2020 que gestionar por generación no está respaldado por la investigación. No es que las generaciones no existan: explican mucho menos de lo que creemos." Cierre: "Si los datos no confirman la mayoría de lo que creemos, la pregunta no es qué les pasa a los jóvenes. Es qué cambió alrededor de todos."
+A: "En su workbook, en silencio, un minuto: una creencia que traían hoy y que ahora revisarían. ¿Qué decisión de planta tomaron con ella?" Después: "Cuando vemos que alguien joven piensa distinto, puede ser por tres cosas: su edad, la época que todos vivimos, o su generación. Como el año de nacimiento es igual al año de hoy menos la edad, si comparo hoy a alguien de 25 con alguien de 60, matemáticamente no puedo saber si la diferencia es por la edad o por la generación. Es como querer saber si un platillo sabe distinto por la receta o por el horno cuando cambiaste las dos cosas a la vez. Por eso las Academias Nacionales de Estados Unidos concluyeron en 2020 que gestionar por generación no está respaldado por la investigación. No es que las generaciones no existan: explican mucho menos de lo que creemos." Cierre: "Si los datos no confirman la mayoría de lo que creemos, la pregunta no es qué les pasa a los jóvenes. Es qué cambió alrededor de todos."
 PREGUNTA
-"¿En cuántas acertamos como sala? ¿Qué tienen en común las que fallamos?"
+En silencio (1 min): una creencia que traía hoy y que ahora revisaría. ¿Qué decisión de planta tomé con ella?
 RESPUESTA ESPERADA
-"Todas eran generalizaciones." "Casi todo era edad." Algún ingeniero puede preguntar por Twenge (2010): "Sí hay estudios que encuentran algunas diferencias, sobre todo en el valor del tiempo libre; aun ahí el tamaño es moderado y no dice nada de la persona que tienes enfrente."
+Escritura concentrada. Si alguien comenta: "Todas eran generalizaciones." "Casi todo era edad." Algún ingeniero puede preguntar por Twenge (2010): "Sí hay estudios que encuentran algunas diferencias, sobre todo en el valor del tiempo libre; aun ahí el tamaño es moderado y no dice nada de la persona que tienes enfrente."
 TRANSICIÓN
 A: "Diez minutos de receso. Al regresar: qué cambió en el mundo al que cada uno entró a trabajar."
 LIDERA: A.
@@ -2580,7 +2587,7 @@
               <a:t>PROPÓSITO
 Reencuadrar las generaciones como contextos (D-17): entender experiencias formativas sin etiquetar a personas.
 TIEMPO
-1:20 (30 s).
+1:20:00–1:20:30 (30 s).
 GUION DEL FACILITADOR
 A: "Ahora sí vamos a hablar de generaciones, pero de otra forma: no de cómo son, sino del mundo que encontraron cuando entraron a trabajar. Esto describe el entorno, no a las personas. Mientras vemos cada uno, ubíquense: ¿cuál fue el suyo? ¿Y el de la persona más nueva de su equipo?"
 PREGUNTA
@@ -2681,16 +2688,16 @@
               <a:t>PROPÓSITO
 Contexto de entrada al trabajo 1 de 4. Generar comprensión de experiencias formativas, no etiquetas.
 TIEMPO
-1:20 (2 min).
+1:20:30 (≈1:20).
 GUION DEL FACILITADOR
-A recorre la columna "El mundo al que entraron" en voz alta, con una historia local si la sala la conoce (Fundidora, SICARTSA, cambios de dueño). Luego lee solo el recuadro "Lo que un líder no debería suponer". 
+A lee solo tres hitos de "El mundo al que entraron", con una historia local si la sala la conoce (Fundidora, SICARTSA, cambios de dueño). Luego lee solo el recuadro "Lo que un líder no debería suponer". 
 PREGUNTA
-"¿Quién entró a trabajar en este contexto? ¿Qué aprendió de él sobre la lealtad?"
+(Opcional, solo si sobra tiempo) "¿Quién entró a trabajar en este contexto? ¿Qué aprendió de él sobre la lealtad?"
 RESPUESTA ESPERADA
 Historias personales breves. Si alguien empieza a generalizar ("los de ahora…"), A pregunta: "¿Qué conducta concreta observaste? ¿Qué más podría explicarla?"
 TRANSICIÓN
 "Siguiente contexto."
-LIDERA: A.
+LIDERA: A (B toma el tiempo de los pares de la última lámina).
 NO USAR: "los chavos", "generación de cristal", "la vieja guardia", "nativos digitales" (glosario §4.6 de instrumentos psicológicos).
 Cifras: verificar en fuente primaria antes de cada edición (Evidence Pack §8).</a:t>
             </a:r>
@@ -2883,16 +2890,16 @@
               <a:t>PROPÓSITO
 Contexto de entrada al trabajo 2 de 4. Generar comprensión de experiencias formativas, no etiquetas.
 TIEMPO
-1:22 (2 min).
+1:21:50 (≈1:20).
 GUION DEL FACILITADOR
-A recorre la columna "El mundo al que entraron" en voz alta, con una historia local si la sala la conoce (Fundidora, SICARTSA, cambios de dueño). Luego lee solo el recuadro "Lo que un líder no debería suponer". 
+A lee solo tres hitos de "El mundo al que entraron", con una historia local si la sala la conoce (Fundidora, SICARTSA, cambios de dueño). Luego lee solo el recuadro "Lo que un líder no debería suponer". 
 PREGUNTA
-"¿Quién vivió un cambio de dueño? ¿Qué le enseñó sobre las promesas de la empresa?"
+(Opcional, solo si sobra tiempo) "¿Quién vivió un cambio de dueño? ¿Qué le enseñó sobre las promesas de la empresa?"
 RESPUESTA ESPERADA
 Historias personales breves. Si alguien empieza a generalizar ("los de ahora…"), A pregunta: "¿Qué conducta concreta observaste? ¿Qué más podría explicarla?"
 TRANSICIÓN
 "Siguiente contexto."
-LIDERA: A.
+LIDERA: A (B toma el tiempo de los pares de la última lámina).
 NO USAR: "los chavos", "generación de cristal", "la vieja guardia", "nativos digitales" (glosario §4.6 de instrumentos psicológicos).
 Cifras: verificar en fuente primaria antes de cada edición (Evidence Pack §8).</a:t>
             </a:r>
@@ -2985,16 +2992,16 @@
               <a:t>PROPÓSITO
 Contexto de entrada al trabajo 3 de 4. Generar comprensión de experiencias formativas, no etiquetas.
 TIEMPO
-1:24 (2 min).
+1:23:10 (≈1:20).
 GUION DEL FACILITADOR
-A recorre la columna "El mundo al que entraron" en voz alta, con una historia local si la sala la conoce (Fundidora, SICARTSA, cambios de dueño). Luego lee solo el recuadro "Lo que un líder no debería suponer". Subrayar: "Muchos Millennials ya son jefes y directores: en esta sala hay algunos."
+A lee solo tres hitos de "El mundo al que entraron", con una historia local si la sala la conoce (Fundidora, SICARTSA, cambios de dueño). Luego lee solo el recuadro "Lo que un líder no debería suponer". Subrayar: "Muchos Millennials ya son jefes y directores: en esta sala hay algunos."
 PREGUNTA
-"¿Qué le pasó a su primer empleo en 2008–2009?"
+(Opcional, solo si sobra tiempo) "¿Qué le pasó a su primer empleo en 2008–2009?"
 RESPUESTA ESPERADA
 Historias personales breves. Si alguien empieza a generalizar ("los de ahora…"), A pregunta: "¿Qué conducta concreta observaste? ¿Qué más podría explicarla?"
 TRANSICIÓN
 "Siguiente contexto."
-LIDERA: A.
+LIDERA: A (B toma el tiempo de los pares de la última lámina).
 NO USAR: "los chavos", "generación de cristal", "la vieja guardia", "nativos digitales" (glosario §4.6 de instrumentos psicológicos).
 Cifras: verificar en fuente primaria antes de cada edición (Evidence Pack §8).</a:t>
             </a:r>
@@ -3087,16 +3094,16 @@
               <a:t>PROPÓSITO
 Contexto de entrada al trabajo 4 de 4. Generar comprensión de experiencias formativas, no etiquetas.
 TIEMPO
-1:26 (2 min).
+1:24:30–1:28 (1 min lámina + 2 min en pares).
 GUION DEL FACILITADOR
-A recorre la columna "El mundo al que entraron" en voz alta, con una historia local si la sala la conoce (Fundidora, SICARTSA, cambios de dueño). Luego lee solo el recuadro "Lo que un líder no debería suponer". Subrayar: "Son los que menos están en esta sala. Todo lo que digamos de ellos es hipótesis que hay que verificar con la persona."
+A lee solo tres hitos de "El mundo al que entraron", con una historia local si la sala la conoce (Fundidora, SICARTSA, cambios de dueño). Luego lee solo el recuadro "Lo que un líder no debería suponer". Subrayar: "Son los que menos están en esta sala. Todo lo que digamos de ellos es hipótesis que hay que verificar con la persona."
 PREGUNTA
-"¿Qué sabemos realmente de la persona más nueva de nuestro equipo… y qué suponemos?"
+En pares, 2 minutos: "¿A cuál de estos mundos entraron ustedes a trabajar y qué les enseñó sobre la lealtad? ¿A cuál entró la persona más nueva de su equipo, y qué sabemos realmente de ella?"
 RESPUESTA ESPERADA
 Historias personales breves. Si alguien empieza a generalizar ("los de ahora…"), A pregunta: "¿Qué conducta concreta observaste? ¿Qué más podría explicarla?"
 TRANSICIÓN
 A: "Cuatro contextos. Y un hilo común: el trato entre las personas y las empresas cambió."
-LIDERA: A.
+LIDERA: A (B toma el tiempo de los pares de la última lámina).
 NO USAR: "los chavos", "generación de cristal", "la vieja guardia", "nativos digitales" (glosario §4.6 de instrumentos psicológicos).
 Cifras: verificar en fuente primaria antes de cada edición (Evidence Pack §8).</a:t>
             </a:r>
@@ -3193,7 +3200,7 @@
 GUION DEL FACILITADOR
 A: "Durante décadas el trato implícito fue el de la izquierda. Muchos en esta sala lo cumplieron y les funcionó. Desde los ochenta, las empresas en todo el mundo —y la siderurgia mexicana no fue excepción— pasaron a reestructuras, outsourcing y relaciones más de mercado. Quienes entraron después aprendieron el contrato de la derecha. No es mejor ni peor: es una respuesta racional al entorno que encontraron." B lee dos frases del rotafolio "Lo que escuchamos" del Acto 2 que hablen de cambio.
 PREGUNTA
-"Regresemos a su rotafolio: ¿cambió la gente o cambió el trato?"
+"Regresemos a su rotafolio: ¿qué frase de las que escribimos después del video leerían hoy distinto?"
 RESPUESTA ESPERADA
 "Cambió el trato." Algunos: "cambiaron las dos cosas". Validar: ambas son ciertas; lo que está en nuestras manos es el trato.
 TRANSICIÓN
@@ -3392,7 +3399,7 @@
               <a:t>PROPÓSITO
 Acto 6: necesidades humanas comunes, organizadas por necesidad y no por generación (D-17), para evitar el tribalismo generacional.
 TIEMPO
-1:34–1:37 (3 min).
+1:34–1:36 (2 min).
 GUION DEL FACILITADOR
 A: "Si juntamos los estudios más grandes sobre qué busca la gente en un trabajo, las prioridades principales se repiten en todas las edades: salario justo, estabilidad, bienestar, hacer lo que uno hace bien, un buen jefe. Por primera vez en 22 años, en la encuesta global de Randstad el equilibrio vida–trabajo quedó por encima del salario, y eso es en todas las edades, no en una. Un dato que para una siderúrgica importa: la brecha de propósito más grande no es entre generaciones, es entre ejecutivos y primera línea."
 PREGUNTA
@@ -3493,16 +3500,16 @@
               <a:t>PROPÓSITO
 Mostrar diferencias reales sin exagerarlas: son de frecuencia, forma y urgencia, y se explican mejor por edad, etapa y época.
 TIEMPO
-1:37–1:40 (3 min).
+1:36–1:38 (2 min).
 GUION DEL FACILITADOR
-A: "Sí hay diferencias. Pero miren la última columna: casi todas se explican mejor por la etapa de vida, el rol o la época que por la generación. Y fíjense en quién aparece como el grupo más estresado: los gerentes." Handoff a B.
+A: "Sí hay diferencias. Pero miren la última columna: casi todas se explican mejor por la etapa de vida, el rol o la época que por la generación. Y fíjense en quién aparece como el grupo más estresado: los gerentes."
 PREGUNTA
-B a las mesas (4 min): "¿Qué necesidad común estamos atendiendo peor, y con quién?"
+(Retórica, 5 s de pausa) "¿Cuál de estas diferencias han visto en su equipo, y qué la explicaría mejor: la edad, la etapa o el jefe?"
 RESPUESTA ESPERADA
 "Desarrollo con los expertos senior." "Reconocimiento con los jóvenes." "Claridad de expectativas con todos." Aparece que los expertos senior también tienen necesidades desatendidas: es un hallazgo valioso.
 TRANSICIÓN
-B: "Hasta aquí hemos hablado de otros. Los próximos cinco minutos son sobre ustedes."
-LIDERA: A (lámina) → B (pregunta a mesas, 1:40–1:44).
+A: "Si casi todo pasa por el jefe, veamos qué dicen los datos sobre nosotros."
+LIDERA: A.
 DATO DE APOYO: Gallup atribuye al gerente al menos 70 % de la varianza del engagement entre equipos (2015, 2.7 millones de empleados; análisis propietario, no "causa 70 %"). Engagement de gerentes: 27 % → 22 % (2024→2025).</a:t>
             </a:r>
             <a:endParaRPr lang="en-US" dirty="0"/>
@@ -3594,16 +3601,16 @@
               <a:t>PROPÓSITO
 Conectar las necesidades con la palanca que está en manos de los directores: el liderazgo directo. Reconocer que también ellos están desgastados (sin tono paternalista).
 TIEMPO
-1:40 (30 s, antes de la pregunta a mesas) — lámina de fondo durante la conversación.
+1:38–1:44 (30 s de A + 90 s de escritura individual + 4 min en mesa).
 GUION DEL FACILITADOR
-A: "Dos datos. El jefe es la variable que más distingue a un equipo de otro. Y los jefes, en todo el mundo, estamos más desgastados que hace un año. Eso no es un reproche: es parte del problema que queremos resolver." B lanza la pregunta a mesas.
+A: "Dos datos. El jefe es la variable que más distingue a un equipo de otro. Y los jefes, en todo el mundo, estamos más desgastados que hace un año. Eso no es un reproche: es parte del problema que queremos resolver." B: "En su mapa de motivadores, marquen en silencio la necesidad común que peor están atendiendo, y con quién. Noventa segundos." Después, 4 min en mesa.
 PREGUNTA
 "¿Qué necesidad común estamos atendiendo peor, y con quién?"
 RESPUESTA ESPERADA
 Conversación de mesa; se reconoce el propio desgaste.
 TRANSICIÓN
-B: "Ahora, cinco minutos de silencio."
-LIDERA: A → B.
+B: "Hasta aquí hemos hablado de otros. Los próximos cinco minutos son sobre ustedes."
+LIDERA: A → B. Versión 120: solo 2 min en mesa, sin escritura.
 NO DECIR "70 % del engagement lo causa el jefe".</a:t>
             </a:r>
             <a:endParaRPr lang="en-US" dirty="0"/>
@@ -3899,7 +3906,7 @@
 TIEMPO
 0:06–0:08 (2 min).
 GUION DEL FACILITADOR
-A (con la CXO asintiendo): "Primero: lo que se dice aquí se puede usar, pero no se atribuye. Nadie sale con una opinión sobre lo que dijo otra persona. Segundo: se vale disentir, también de nosotros y de los datos. Tercero: cualquiera puede decir 'paso', sin explicar por qué. Nada de lo que escriban en su workbook se recoge ni se comparte; tampoco con [CXO], y ella está de acuerdo."
+A (con la CXO asintiendo): "Primero: lo que se dice aquí se puede usar, pero no se atribuye. Nadie sale con una opinión sobre lo que dijo otra persona. Segundo: se vale disentir, también de nosotros y de los datos. Tercero: cualquiera puede decir 'paso', sin explicar por qué. Nada de lo que escriban en su workbook se recoge ni se comparte; tampoco con [CXO], y ella está de acuerdo. Y una petición práctica: teléfonos boca abajo; los vemos en el receso." (La CXO lo modela.)
 PREGUNTA
 "¿Alguien quiere agregar un acuerdo?"
 RESPUESTA ESPERADA
@@ -4203,7 +4210,7 @@
 GUION DEL FACILITADOR
 B conduce las tres preguntas siempre sobre la pared. Conectar con el Acto 1: "¿Las primeras reacciones se parecen a su respuesta por defecto?" Síntesis de B: "Casi todas las mesas coincidieron en lo que no se negocia. Donde diferimos fue en el cómo. Ese cómo tiene un nombre." Handoff a A.
 PREGUNTA
-¿Alguna mesa negoció la seguridad o el estándar?
+¿En qué caso estuvimos más cerca de ceder algo que no se negocia, y qué nos llevó ahí?
 RESPUESTA ESPERADA
 Casi nunca ocurre. Mensaje: adaptarse no fue bajar la vara.
 TRANSICIÓN
@@ -4402,7 +4409,7 @@
 TIEMPO
 2:22–2:27 (5 min, incluye re-lectura de un caso).
 GUION DEL FACILITADOR
-A: "Leer: entender a la persona y el contexto antes de concluir. Adaptar: ajustar cómo lidero. Alinear: sostener lo que no cambia y decirlo en voz alta." Re-lectura de un caso con la sala (recomendado Caso B · Rogelio): "Leer: ¿qué le preocupa del sistema? Adaptar: que él defina qué se registra y enseñe diagnóstico. Alinear: el registro no está a discusión; cómo lo hacemos, sí."
+A (2 min): "Leer: entender a la persona y el contexto antes de concluir. Adaptar: ajustar cómo lidero. Alinear: sostener lo que no cambia y decirlo en voz alta." Ejemplo en una línea (Rogelio): "el registro no está a discusión; cómo lo hacemos, sí." Después, en mesa (2 min): "Relean su propio caso con los tres verbos: ¿cuál se saltaron?" Cierre (1 min): dos voces.
 PREGUNTA
 "¿Cuál de los tres verbos se saltaron más en su caso?"
 RESPUESTA ESPERADA
@@ -4504,7 +4511,7 @@
 TIEMPO
 2:27–2:28 (1 min).
 GUION DEL FACILITADOR
-B: "Una fila para su persona del Acto 7: iniciales, no nombre. A la izquierda, lo que pueden ajustar. A la derecha, lo que no se mueve. La columna de la derecha nunca se queda vacía: si lo está, es una alerta."
+B: "Una columna para su persona del Espejo: iniciales, no nombre. Arriba, lo que pueden ajustar. Abajo, lo que no se mueve. El bloque de lo que no se adapta nunca se queda vacío: si lo está, es una alerta."
 PREGUNTA
 —
 RESPUESTA ESPERADA
@@ -4610,7 +4617,7 @@
 RESPUESTA ESPERADA
 Reconocimiento: "así sí".
 TRANSICIÓN
-B: "Ahora con su persona. Siete minutos en silencio."
+B: "Ahora con su persona. Seis minutos en silencio."
 LIDERA: B.
 Nota AMMX: confirmar que "SAP PM" es la denominación interna correcta.</a:t>
             </a:r>
@@ -4703,9 +4710,9 @@
               <a:t>PROPÓSITO
 Aplicar la herramienta a una persona real (hilo D-06) y validar concreción y claridad del estándar con un par.
 TIEMPO
-2:28–2:39 (7 min individual + 5 min par).
+2:28–2:39 (6 min individual + 5 min en par).
 GUION DEL FACILITADOR
-B: "Siete minutos en silencio." A los 4 minutos: "Revisen que la columna de la derecha no esté vacía." Después: "Con un par distinto al del Acto 7. El par solo hace dos preguntas, impresas en su hoja."
+B: "Antes de llenar la fila, escriban arriba una cosa que no saben de esa persona. Ese es su LEER. Seis minutos en silencio." A los 4 minutos: "Revisen que la columna de la derecha no esté vacía." Después: "Con un par distinto al del Acto 7. El par solo hace dos preguntas, impresas en su hoja."
 PREGUNTA
 Las dos preguntas del par.
 RESPUESTA ESPERADA
@@ -4805,7 +4812,7 @@
 TIEMPO
 2:39–2:49 (2 min parejas · 3+3 min · 1 min cierre · 1 min plenaria).
 GUION DEL FACILITADOR
-B: "Busquen a alguien que haya empezado a trabajar en un contexto distinto al suyo: otra década, otra empresa, otra área, otro país. No tienen que decir su edad. Hablen desde su experiencia, no en nombre de nadie más." Al final, B pide a dos voluntarios compartir solo la respuesta a la frase 4. Handoff a A: "Parece que lo que queremos se parece más de lo que el Muro sugería."
+B: "Busquen a alguien que haya empezado a trabajar en un contexto distinto al suyo: otra década, otra empresa, otra área, otro país. No tienen que decir su edad. Hablen desde su experiencia, no en nombre de nadie más." Mientras las parejas conversan, B entrega en mano los sobres del pre-work, cerrados (D-20). Al final, B pide a dos voluntarios compartir solo la respuesta a la frase 4. Handoff a A: "Parece que lo que queremos se parece más de lo que el Muro sugería."
 PREGUNTA
 Frase 4: "Algo que probablemente ambos queremos es…"
 RESPUESTA ESPERADA
@@ -4813,8 +4820,9 @@
 TRANSICIÓN
 A: "Cerremos donde empezamos."
 LIDERA: B → A.
-SALA HOMOGÉNEA: cada persona responde frases 1, 3 y 4 como cree que respondería "su persona"; el par pregunta "¿Qué tan seguro estás de que diría eso? ¿Cuándo se lo preguntaste por última vez?" (Activity Pack §5.5).
-Evitar parejas jefe–colaborador directo. La CXO se empareja como cualquier participante.</a:t>
+SALA HOMOGÉNEA (decidir en T–7 sin consultar edades): ocultar esta lámina y mostrar la variante siguiente ("Invertir el lente con mi persona").
+ACORDEÓN: si vamos tarde, 8 min (solo frases 1 y 4).
+Evitar parejas jefe–colaborador directo. La CXO forma pareja o trío con personas que no le reportan.</a:t>
             </a:r>
             <a:endParaRPr lang="en-US" dirty="0"/>
           </a:p>
@@ -4903,19 +4911,18 @@
             <a:r>
               <a:rPr lang="en-US" dirty="0"/>
               <a:t>PROPÓSITO
-Cerrar el círculo con el diagnóstico y el pre-work: comparar la mirada de entrada con la de salida.
+Variante para sala homogénea en trayectoria (G3-16): invertir el lente hacia "mi persona" sin forzar a nadie a representar un grupo.
 TIEMPO
-2:49–2:51 (2 min).
+2:39–2:49 (1 min instrucción · 3+3 min · 3 min: cada uno escribe la pregunta que le hará a su persona).
 GUION DEL FACILITADOR
-A: "Abran su sobre. Es lo que ustedes escribieron antes de entrar. No lo compartan. Léanlo y marquen una frase: ¿la escribirían igual hoy? Si sí, ¿por qué? Si no, ¿qué cambió?" Y: "Miren su respuesta por defecto y su rango. Después de los casos, ¿cuál de las cuatro respuestas necesitan usar más con su persona?"
+B: "Piensen en su persona. Respondan como creen que ella respondería. El par solo pregunta: ¿qué tan seguro estás?, ¿cuándo se lo preguntaste por última vez?" Al final: "Escriban la pregunta que le van a hacer. Esa pregunta es su LEER de la semana 1."
 PREGUNTA
-¿Responderían hoy lo mismo?
+"¿Cuándo se lo preguntaste por última vez?"
 RESPUESTA ESPERADA
-Sonrisas, algún "yo escribí eso…". Silencio.
+Reconocimiento de que "nunca se lo he preguntado". Es el aprendizaje.
 TRANSICIÓN
-"Convirtamos esto en una decisión."
-LIDERA: A.
-El sobre y su contenido son del participante; no se recogen. Quien no respondió el pre-work tiene en su sobre las frases en blanco.</a:t>
+A: "Cerremos donde empezamos."
+LÁMINA OCULTA POR DEFECTO. Se muestra solo si en T–7 se decide la variante; entonces se oculta la lámina anterior.</a:t>
             </a:r>
             <a:endParaRPr lang="en-US" dirty="0"/>
           </a:p>
@@ -5105,20 +5112,19 @@
             <a:r>
               <a:rPr lang="en-US" dirty="0"/>
               <a:t>PROPÓSITO
-Compromiso personal concreto (STOP / START / CONTINUE + una persona, una conversación). Nada de compromisos abstractos.
+Cerrar el círculo con el diagnóstico y el pre-work: comparar la mirada de entrada con la de salida.
 TIEMPO
-2:51–2:57 (5 min individual + 1 min en voz baja con el vecino).
+2:49–2:51 (2 min).
 GUION DEL FACILITADOR
-A: "Cinco minutos en silencio. Empiecen por abajo: una persona, una conversación. Es la misma persona que llevan desde el Acto 7, salvo que haya una buena razón para cambiarla. Iniciales, no nombre. Y un campo que no queremos que se salten: qué no vas a negociar en esa conversación." Después: "Díganle a la persona de al lado, en una frase: en siete días voy a…" Sin comentarios.
+A: "Abran su sobre. Es lo que ustedes escribieron antes de entrar. No lo compartan. Léanlo y marquen una frase: ¿la escribirían igual hoy? Si sí, ¿por qué? Si no, ¿qué cambió?" Y: "Miren su respuesta por defecto y su rango. Después de los casos, ¿cuál de las cuatro respuestas necesitan usar más con su persona?"
 PREGUNTA
-"¿Cómo vas a saber que fue una conversación distinta?"
+¿Responderían hoy lo mismo?
 RESPUESTA ESPERADA
-Compromisos concretos; algunos genéricos ("escuchar más"). B recorre y pregunta en privado: "¿Con quién, cuándo y sobre qué?"
+Sonrisas, algún "yo escribí eso…". Silencio.
 TRANSICIÓN
-A cede la palabra a la CXO: 1 minuto.
+"Convirtamos esto en una decisión."
 LIDERA: A.
-CXO (2:57–2:58, D-13): comparte su propio compromiso, idealmente reconociendo una respuesta por defecto suya. No resume el taller ni evalúa a la sala.
-Tarjeta: la fotografía solo su autor o se usa el formato autocopiable; la copia queda en poder del participante.</a:t>
+El sobre y su contenido son del participante; no se recogen. Quien no respondió el pre-work encuentra una sola frase (P4) para contestar en 1 minuto. B hace barrido de sala al final; los sobres olvidados se destruyen el mismo día.</a:t>
             </a:r>
             <a:endParaRPr lang="en-US" dirty="0"/>
           </a:p>
@@ -5207,19 +5213,19 @@
             <a:r>
               <a:rPr lang="en-US" dirty="0"/>
               <a:t>PROPÓSITO
-Entregar el seguimiento: el Experimento a 30 días y la sesión de aprendizaje compartido.
+Compromiso personal concreto (DEJAR / EMPEZAR / MANTENER + una persona, una conversación). Nada de compromisos abstractos.
 TIEMPO
-2:58 (1 min).
+2:51–2:55 (4 min individual, en el workbook).
 GUION DEL FACILITADOR
-A: "En su sobre está la tarjeta del Experimento. Una persona que les cueste leer. Leer, adaptar, alinear, durante treinta días. Cinco minutos a la semana para anotar qué supusieron, qué preguntaron, qué aprendieron, qué cambiaron y qué pasó. La bitácora es suya; nadie la va a revisar. En la siguiente sesión compartimos aprendizajes, no identidades."
+A: "Cuatro minutos en silencio, en su workbook. Empiecen por abajo: una persona, una conversación. Es la misma persona que llevan desde el Espejo, salvo que haya una buena razón para cambiarla. Esa conversación es la semana 1 del Experimento: una conversación para preguntar. Iniciales, no nombre. Y un campo que no queremos que se salten: qué no van a negociar en esa conversación."
 PREGUNTA
-—
+"¿Cómo vas a saber que fue una conversación distinta?"
 RESPUESTA ESPERADA
-Aceptación. Alguien puede preguntar si es obligatorio: "Es una invitación. Los aprendizajes de la sala dependen de quién lo haga."
+Compromisos concretos; algunos genéricos ("escuchar más"). B recorre y pregunta en privado: "¿Con quién, cuándo y sobre qué?"
 TRANSICIÓN
-A: cierre con la frase ancla.
+A: "Antes de cerrar, dos minutos para ustedes."
 LIDERA: A.
-RECORDATORIOS de los facilitadores: días 1, 7, 14, 21 y 30 (texto en el documento del Experimento). Sesión de seguimiento de 60–90 min entre el día 35 y el 45.</a:t>
+El compromiso vive en el workbook (G3-20). Quien quiera, lo fotografía con su propio teléfono. Nada se recoge.</a:t>
             </a:r>
             <a:endParaRPr lang="en-US" dirty="0"/>
           </a:p>
@@ -5308,18 +5314,19 @@
             <a:r>
               <a:rPr lang="en-US" dirty="0"/>
               <a:t>PROPÓSITO
-Cerrar el círculo con la pregunta de apertura: reemplazar la frase de pasillo por una pregunta de liderazgo.
+Encuesta de salida dentro del horario (Nivel 1 y 2 del plan de medición), antes del compromiso de la CXO, para que la sesión termine en la frase ancla (G3-09, G3-10).
 TIEMPO
-2:58–2:59 (1 min).
+2:55–2:58 (2 min encuesta + 1 min en voz baja con el vecino).
 GUION DEL FACILITADOR
-A: "Al inicio les dijimos que al final les propondríamos otra pregunta. Es esta. No es más cómoda. Pero es la que sí depende de nosotros."
+A: "Dos minutos, en silencio: la encuesta del código de su mesa. Es anónima." Al terminar: "Díganle a la persona de al lado, en una frase: en siete días voy a…" Sin comentarios. A menciona en una frase la tarjeta del Experimento que está en su sobre.
 PREGUNTA
-La de la lámina.
+—
 RESPUESTA ESPERADA
-Silencio; asentimientos.
+Silencio operativo; teléfonos en uso por 2 minutos.
 TRANSICIÓN
-Última lámina.
-LIDERA: A.</a:t>
+A cede la palabra a la CXO: 1 minuto.
+LIDERA: A · B verifica que el QR cargue en la red del recinto; 10 encuestas impresas de respaldo.
+CXO (2:58–2:59, D-13): comparte su propio compromiso, idealmente reconociendo una respuesta por defecto suya. No resume el taller ni evalúa a la sala. Esta lámina se queda en pantalla mientras habla.</a:t>
             </a:r>
             <a:endParaRPr lang="en-US" dirty="0"/>
           </a:p>
@@ -5408,19 +5415,18 @@
             <a:r>
               <a:rPr lang="en-US" dirty="0"/>
               <a:t>PROPÓSITO
-Cierre con la frase ancla y la regla de seguridad. Sin aplausos ni dinámica final.
+Lámina de respaldo del Experimento a 30 días (oculta por defecto para descongestionar el Acto 12, G3-10). Se usa en la sesión de seguimiento o si la sala pregunta.
 TIEMPO
-2:59–3:00 (1 min).
+Oculta. Si se muestra: 1 min.
 GUION DEL FACILITADOR
-A lee las dos líneas y la frase de seguridad. Silencio breve. "Gracias. Antes de salir, les pedimos dos minutos para la encuesta del código QR de su mesa."
+A: "En su sobre está la tarjeta del Experimento. Una persona que les cueste leer. Leer, adaptar, alinear, durante treinta días. Cinco minutos a la semana para anotar qué supusieron, qué preguntaron, qué aprendieron, qué cambiaron y qué pasó. La bitácora es suya; nadie la va a revisar. En la siguiente sesión compartimos aprendizajes, no identidades."
 PREGUNTA
 —
 RESPUESTA ESPERADA
-Cierre sobrio.
+Alguien puede preguntar si es obligatorio: "Es una invitación. Los aprendizajes de la sala dependen de quién lo haga."
 TRANSICIÓN
-Fin. B muestra el QR de la encuesta de salida (Nivel 1 del plan de medición).
-LIDERA: A.
-CRITERIO DE ÉXITO: "Entré pensando que tenía un problema con una generación. Salgo entendiendo que tengo que leer mejor a las personas y adaptar mejor mi liderazgo."</a:t>
+—
+RECORDATORIOS de los facilitadores: días 1, 7, 14, 21 y 30. Pulsos anónimos en días 7 y 30. Sesión de seguimiento de 60–90 min entre el día 35 y el 45.</a:t>
             </a:r>
             <a:endParaRPr lang="en-US" dirty="0"/>
           </a:p>
@@ -5509,7 +5515,208 @@
             <a:r>
               <a:rPr lang="en-US" dirty="0"/>
               <a:t>PROPÓSITO
-Respaldo de fuentes para consulta; no se presenta en sala.
+Cerrar el círculo con la pregunta de apertura: reemplazar la frase de pasillo por una pregunta de liderazgo.
+TIEMPO
+2:59:00–2:59:30 (30 s).
+GUION DEL FACILITADOR
+A: "Al inicio les dijimos que al final les propondríamos otra pregunta. Es esta. No es más cómoda. Pero es la que sí depende de nosotros."
+PREGUNTA
+La de la lámina.
+RESPUESTA ESPERADA
+Silencio; asentimientos.
+TRANSICIÓN
+Última lámina.
+LIDERA: A.</a:t>
+            </a:r>
+            <a:endParaRPr lang="en-US" dirty="0"/>
+          </a:p>
+        </p:txBody>
+      </p:sp>
+      <p:sp>
+        <p:nvSpPr>
+          <p:cNvPr id="4" name="Slide Number Placeholder 3"/>
+          <p:cNvSpPr>
+            <a:spLocks noGrp="1"/>
+          </p:cNvSpPr>
+          <p:nvPr>
+            <p:ph type="sldNum" sz="quarter" idx="10"/>
+          </p:nvPr>
+        </p:nvSpPr>
+        <p:spPr/>
+        <p:txBody>
+          <a:bodyPr/>
+          <a:lstStyle/>
+          <a:p>
+            <a:fld id="{F7021451-1387-4CA6-816F-3879F97B5CBC}" type="slidenum">
+              <a:rPr lang="en-US"/>
+              <a:t>54</a:t>
+            </a:fld>
+            <a:endParaRPr lang="en-US"/>
+          </a:p>
+        </p:txBody>
+      </p:sp>
+    </p:spTree>
+    <p:extLst>
+      <p:ext uri="{BB962C8B-B14F-4D97-AF65-F5344CB8AC3E}">
+        <p14:creationId xmlns:p14="http://schemas.microsoft.com/office/powerpoint/2010/main" val="1024086991"/>
+      </p:ext>
+    </p:extLst>
+  </p:cSld>
+  <p:clrMapOvr>
+    <a:masterClrMapping/>
+  </p:clrMapOvr>
+</p:notes>
+</file>
+
+<file path=ppt/notesSlides/notesSlide55.xml><?xml version="1.0" encoding="utf-8"?>
+<p:notes xmlns:a="http://schemas.openxmlformats.org/drawingml/2006/main" xmlns:r="http://schemas.openxmlformats.org/officeDocument/2006/relationships" xmlns:p="http://schemas.openxmlformats.org/presentationml/2006/main">
+  <p:cSld>
+    <p:spTree>
+      <p:nvGrpSpPr>
+        <p:cNvPr id="1" name=""/>
+        <p:cNvGrpSpPr/>
+        <p:nvPr/>
+      </p:nvGrpSpPr>
+      <p:grpSpPr>
+        <a:xfrm>
+          <a:off x="0" y="0"/>
+          <a:ext cx="0" cy="0"/>
+          <a:chOff x="0" y="0"/>
+          <a:chExt cx="0" cy="0"/>
+        </a:xfrm>
+      </p:grpSpPr>
+      <p:sp>
+        <p:nvSpPr>
+          <p:cNvPr id="2" name="Slide Image Placeholder 1"/>
+          <p:cNvSpPr>
+            <a:spLocks noGrp="1" noRot="1" noChangeAspect="1"/>
+          </p:cNvSpPr>
+          <p:nvPr>
+            <p:ph type="sldImg"/>
+          </p:nvPr>
+        </p:nvSpPr>
+        <p:spPr/>
+      </p:sp>
+      <p:sp>
+        <p:nvSpPr>
+          <p:cNvPr id="3" name="Notes Placeholder 2"/>
+          <p:cNvSpPr>
+            <a:spLocks noGrp="1"/>
+          </p:cNvSpPr>
+          <p:nvPr>
+            <p:ph type="body" idx="1"/>
+          </p:nvPr>
+        </p:nvSpPr>
+        <p:spPr/>
+        <p:txBody>
+          <a:bodyPr/>
+          <a:lstStyle/>
+          <a:p>
+            <a:r>
+              <a:rPr lang="en-US" dirty="0"/>
+              <a:t>PROPÓSITO
+Cierre con la frase ancla y la regla de seguridad. Sin aplausos ni dinámica final.
+TIEMPO
+2:59:30–3:00 (30 s).
+GUION DEL FACILITADOR
+A lee las dos líneas y la frase de seguridad. Silencio breve. "Gracias."
+PREGUNTA
+—
+RESPUESTA ESPERADA
+Cierre sobrio.
+TRANSICIÓN
+Fin. B hace barrido de sala (sobres olvidados) y desmontaje del Muro.
+LIDERA: A.
+CRITERIO DE ÉXITO: "Entré pensando que tenía un problema con una generación. Salgo entendiendo que tengo que leer mejor a las personas y adaptar mejor mi liderazgo."</a:t>
+            </a:r>
+            <a:endParaRPr lang="en-US" dirty="0"/>
+          </a:p>
+        </p:txBody>
+      </p:sp>
+      <p:sp>
+        <p:nvSpPr>
+          <p:cNvPr id="4" name="Slide Number Placeholder 3"/>
+          <p:cNvSpPr>
+            <a:spLocks noGrp="1"/>
+          </p:cNvSpPr>
+          <p:nvPr>
+            <p:ph type="sldNum" sz="quarter" idx="10"/>
+          </p:nvPr>
+        </p:nvSpPr>
+        <p:spPr/>
+        <p:txBody>
+          <a:bodyPr/>
+          <a:lstStyle/>
+          <a:p>
+            <a:fld id="{F7021451-1387-4CA6-816F-3879F97B5CBC}" type="slidenum">
+              <a:rPr lang="en-US"/>
+              <a:t>55</a:t>
+            </a:fld>
+            <a:endParaRPr lang="en-US"/>
+          </a:p>
+        </p:txBody>
+      </p:sp>
+    </p:spTree>
+    <p:extLst>
+      <p:ext uri="{BB962C8B-B14F-4D97-AF65-F5344CB8AC3E}">
+        <p14:creationId xmlns:p14="http://schemas.microsoft.com/office/powerpoint/2010/main" val="1024086991"/>
+      </p:ext>
+    </p:extLst>
+  </p:cSld>
+  <p:clrMapOvr>
+    <a:masterClrMapping/>
+  </p:clrMapOvr>
+</p:notes>
+</file>
+
+<file path=ppt/notesSlides/notesSlide56.xml><?xml version="1.0" encoding="utf-8"?>
+<p:notes xmlns:a="http://schemas.openxmlformats.org/drawingml/2006/main" xmlns:r="http://schemas.openxmlformats.org/officeDocument/2006/relationships" xmlns:p="http://schemas.openxmlformats.org/presentationml/2006/main">
+  <p:cSld>
+    <p:spTree>
+      <p:nvGrpSpPr>
+        <p:cNvPr id="1" name=""/>
+        <p:cNvGrpSpPr/>
+        <p:nvPr/>
+      </p:nvGrpSpPr>
+      <p:grpSpPr>
+        <a:xfrm>
+          <a:off x="0" y="0"/>
+          <a:ext cx="0" cy="0"/>
+          <a:chOff x="0" y="0"/>
+          <a:chExt cx="0" cy="0"/>
+        </a:xfrm>
+      </p:grpSpPr>
+      <p:sp>
+        <p:nvSpPr>
+          <p:cNvPr id="2" name="Slide Image Placeholder 1"/>
+          <p:cNvSpPr>
+            <a:spLocks noGrp="1" noRot="1" noChangeAspect="1"/>
+          </p:cNvSpPr>
+          <p:nvPr>
+            <p:ph type="sldImg"/>
+          </p:nvPr>
+        </p:nvSpPr>
+        <p:spPr/>
+      </p:sp>
+      <p:sp>
+        <p:nvSpPr>
+          <p:cNvPr id="3" name="Notes Placeholder 2"/>
+          <p:cNvSpPr>
+            <a:spLocks noGrp="1"/>
+          </p:cNvSpPr>
+          <p:nvPr>
+            <p:ph type="body" idx="1"/>
+          </p:nvPr>
+        </p:nvSpPr>
+        <p:spPr/>
+        <p:txBody>
+          <a:bodyPr/>
+          <a:lstStyle/>
+          <a:p>
+            <a:r>
+              <a:rPr lang="en-US" dirty="0"/>
+              <a:t>PROPÓSITO
+Respaldo de fuentes para consulta; oculta.
 TIEMPO
 No se proyecta salvo pregunta.
 GUION DEL FACILITADOR
@@ -5543,7 +5750,7 @@
           <a:p>
             <a:fld id="{F7021451-1387-4CA6-816F-3879F97B5CBC}" type="slidenum">
               <a:rPr lang="en-US"/>
-              <a:t>54</a:t>
+              <a:t>56</a:t>
             </a:fld>
             <a:endParaRPr lang="en-US"/>
           </a:p>
@@ -5714,9 +5921,9 @@
 TIEMPO
 0:21–0:28 (5 min pares + 2 min plenaria).
 GUION DEL FACILITADOR
-B: "En pares, cinco minutos: ¿qué les sorprendió de su resultado? ¿Qué situación los incomodó más y por qué?" Plenaria, pregunta única y voluntaria: "¿Qué les sorprendió?" A cierra: "Cada uno de nosotros aprendió qué significa trabajo duro, respeto o compromiso en un lugar y en un momento. Eso es nuestro sistema operativo. Funciona. El riesgo es creer que es el único que existe. Por ejemplo, para alguien 'respeto' es no cuestionar al jefe en público; para otra persona es que el jefe le explique el porqué."
+B: "En pares, cinco minutos: ¿qué les sorprendió de su resultado? ¿Qué situación los incomodó más y por qué?" Plenaria (2 min, dos o tres voces, voluntaria): A pregunta "¿Qué significa para ustedes 'compromiso'? ¿Y qué creen que significa para la persona más nueva de su equipo?" y cierra: "Cada uno de nosotros aprendió qué significa trabajo duro, respeto o compromiso en un lugar y en un momento. Eso es nuestro sistema operativo. Funciona. El riesgo es creer que es el único que existe. Por ejemplo, para alguien 'respeto' es no cuestionar al jefe en público; para otra persona es que el jefe le explique el porqué."
 PREGUNTA
-"¿Qué significa para ustedes 'compromiso'? ¿Y qué creen que significa para la persona más nueva de su equipo?"
+"¿Qué significa para ustedes 'compromiso'? ¿Y qué creen que significa para la persona más nueva de su equipo?" (única pregunta de plenaria; "¿qué les sorprendió?" se queda en pares).
 RESPUESTA ESPERADA
 "Compromiso es estar cuando se necesita / quedarse hasta que salga." Contraste: "entregar lo acordado con calidad". Ambas son legítimas.
 TRANSICIÓN
@@ -5825,7 +6032,7 @@
 LIDERA: A (encuadre) · B opera el video.
 [POR CONFIRMAR] Fragmento exacto contra el video que proporcionó la CXO (D-01). Recomendación del equipo de evidencia: usar el segmento donde Sinek pone la responsabilidad en las empresas y los líderes (≈10:00–final de la entrevista de 2016), no los segmentos de crianza y dopamina, que generalizan de forma negativa sobre una generación sin evidencia. Alternativa si la CXO proporcionó otra pieza: Nordic Business Forum 2025 ("We gave them no loyalty…") — acceso por membresía.
 COMPROMISO CON LA CXO (D-13): sabe de antemano que el taller cuestionará algunas afirmaciones del video.
-Subtítulos en español activados; video descargado localmente.</a:t>
+Archivo local con licencia o la copia de la CXO, con subtítulos en español incrustados (.srt revisado); los subtítulos automáticos de YouTube no funcionan sin conexión. Fragmento congelado en T–14. Respaldo: laptop 2 → streaming por la red del recinto → A resume el argumento en voz (máx. 2 min).</a:t>
             </a:r>
             <a:endParaRPr lang="en-US" dirty="0"/>
           </a:p>
@@ -9057,7 +9264,7 @@
                 <a:ea typeface="Century Gothic" pitchFamily="34" charset="-122"/>
                 <a:cs typeface="Century Gothic" pitchFamily="34" charset="-120"/>
               </a:rPr>
-              <a:t>“Valoro la seguridad económica para mi familia”</a:t>
+              <a:t>“Necesito flexibilidad para mi vida fuera del trabajo”</a:t>
             </a:r>
             <a:endParaRPr lang="en-US" sz="1200" dirty="0"/>
           </a:p>
@@ -9116,7 +9323,7 @@
                 <a:ea typeface="Century Gothic" pitchFamily="34" charset="-122"/>
                 <a:cs typeface="Century Gothic" pitchFamily="34" charset="-120"/>
               </a:rPr>
-              <a:t>“Quiero ser tratado con respeto”</a:t>
+              <a:t>“Quiero un jefe que confíe en mí”</a:t>
             </a:r>
             <a:endParaRPr lang="en-US" sz="1200" dirty="0"/>
           </a:p>
@@ -9393,7 +9600,7 @@
                 <a:ea typeface="Century Gothic" pitchFamily="34" charset="-122"/>
                 <a:cs typeface="Century Gothic" pitchFamily="34" charset="-120"/>
               </a:rPr>
-              <a:t>Seis afirmaciones. Tres segundos para decidir</a:t>
+              <a:t>Cinco afirmaciones. Tres segundos para decidir</a:t>
             </a:r>
             <a:endParaRPr lang="en-US" sz="2400" dirty="0"/>
           </a:p>
@@ -10198,7 +10405,7 @@
                 <a:ea typeface="Century Gothic" pitchFamily="34" charset="-122"/>
                 <a:cs typeface="Century Gothic" pitchFamily="34" charset="-120"/>
               </a:rPr>
-              <a:t>1 / 6</a:t>
+              <a:t>1 / 5</a:t>
             </a:r>
             <a:endParaRPr lang="en-US" sz="1200" dirty="0"/>
           </a:p>
@@ -10647,7 +10854,7 @@
                 <a:ea typeface="Century Gothic" pitchFamily="34" charset="-122"/>
                 <a:cs typeface="Century Gothic" pitchFamily="34" charset="-120"/>
               </a:rPr>
-              <a:t>Los jóvenes siempre han cambiado más de empleo</a:t>
+              <a:t>Cambiar más de empleo a los 25 es de edad, no de generación</a:t>
             </a:r>
             <a:endParaRPr lang="en-US" sz="2400" dirty="0"/>
           </a:p>
@@ -11222,7 +11429,7 @@
                 <a:ea typeface="Century Gothic" pitchFamily="34" charset="-122"/>
                 <a:cs typeface="Century Gothic" pitchFamily="34" charset="-120"/>
               </a:rPr>
-              <a:t>2 / 6</a:t>
+              <a:t>2 / 5</a:t>
             </a:r>
             <a:endParaRPr lang="en-US" sz="1200" dirty="0"/>
           </a:p>
@@ -12151,7 +12358,7 @@
 </file>
 
 <file path=ppt/slides/slide18.xml><?xml version="1.0" encoding="utf-8"?>
-<p:sld xmlns:a="http://schemas.openxmlformats.org/drawingml/2006/main" xmlns:r="http://schemas.openxmlformats.org/officeDocument/2006/relationships" xmlns:p="http://schemas.openxmlformats.org/presentationml/2006/main">
+<p:sld xmlns:a="http://schemas.openxmlformats.org/drawingml/2006/main" xmlns:r="http://schemas.openxmlformats.org/officeDocument/2006/relationships" xmlns:p="http://schemas.openxmlformats.org/presentationml/2006/main" show="0">
   <p:cSld name="Slide 18">
     <p:bg>
       <p:bgPr>
@@ -12246,7 +12453,7 @@
                 <a:ea typeface="Century Gothic" pitchFamily="34" charset="-122"/>
                 <a:cs typeface="Century Gothic" pitchFamily="34" charset="-120"/>
               </a:rPr>
-              <a:t>3 / 6</a:t>
+              <a:t>RESERVA</a:t>
             </a:r>
             <a:endParaRPr lang="en-US" sz="1200" dirty="0"/>
           </a:p>
@@ -12600,7 +12807,7 @@
 </file>
 
 <file path=ppt/slides/slide19.xml><?xml version="1.0" encoding="utf-8"?>
-<p:sld xmlns:a="http://schemas.openxmlformats.org/drawingml/2006/main" xmlns:r="http://schemas.openxmlformats.org/officeDocument/2006/relationships" xmlns:p="http://schemas.openxmlformats.org/presentationml/2006/main">
+<p:sld xmlns:a="http://schemas.openxmlformats.org/drawingml/2006/main" xmlns:r="http://schemas.openxmlformats.org/officeDocument/2006/relationships" xmlns:p="http://schemas.openxmlformats.org/presentationml/2006/main" show="0">
   <p:cSld name="Slide 19">
     <p:bg>
       <p:bgPr>
@@ -13469,7 +13676,7 @@
                 <a:ea typeface="Century Gothic" pitchFamily="34" charset="-122"/>
                 <a:cs typeface="Century Gothic" pitchFamily="34" charset="-120"/>
               </a:rPr>
-              <a:t>4 / 6</a:t>
+              <a:t>3 / 5</a:t>
             </a:r>
             <a:endParaRPr lang="en-US" sz="1200" dirty="0"/>
           </a:p>
@@ -14493,7 +14700,7 @@
                 <a:ea typeface="Century Gothic" pitchFamily="34" charset="-122"/>
                 <a:cs typeface="Century Gothic" pitchFamily="34" charset="-120"/>
               </a:rPr>
-              <a:t>5 / 6</a:t>
+              <a:t>4 / 5</a:t>
             </a:r>
             <a:endParaRPr lang="en-US" sz="1200" dirty="0"/>
           </a:p>
@@ -14942,7 +15149,7 @@
                 <a:ea typeface="Century Gothic" pitchFamily="34" charset="-122"/>
                 <a:cs typeface="Century Gothic" pitchFamily="34" charset="-120"/>
               </a:rPr>
-              <a:t>Varía la frecuencia; la necesidad es de todos</a:t>
+              <a:t>En parte cierto: varía la frecuencia; la necesidad es de todos</a:t>
             </a:r>
             <a:endParaRPr lang="en-US" sz="2400" dirty="0"/>
           </a:p>
@@ -15059,7 +15266,7 @@
         <p:spPr>
           <a:xfrm>
             <a:off x="548640" y="1481328"/>
-            <a:ext cx="2450592" cy="384048"/>
+            <a:ext cx="1463040" cy="384048"/>
           </a:xfrm>
           <a:prstGeom prst="roundRect">
             <a:avLst>
@@ -15081,7 +15288,7 @@
         <p:spPr>
           <a:xfrm>
             <a:off x="548640" y="1481328"/>
-            <a:ext cx="2450592" cy="384048"/>
+            <a:ext cx="1463040" cy="384048"/>
           </a:xfrm>
           <a:prstGeom prst="rect">
             <a:avLst/>
@@ -15105,7 +15312,7 @@
                 <a:ea typeface="Century Gothic" pitchFamily="34" charset="-122"/>
                 <a:cs typeface="Century Gothic" pitchFamily="34" charset="-120"/>
               </a:rPr>
-              <a:t>PARCIALMENTE CIERTO</a:t>
+              <a:t>DEPENDE</a:t>
             </a:r>
             <a:endParaRPr lang="en-US" sz="1100" dirty="0"/>
           </a:p>
@@ -15517,7 +15724,7 @@
                 <a:ea typeface="Century Gothic" pitchFamily="34" charset="-122"/>
                 <a:cs typeface="Century Gothic" pitchFamily="34" charset="-120"/>
               </a:rPr>
-              <a:t>6 / 6</a:t>
+              <a:t>5 / 5</a:t>
             </a:r>
             <a:endParaRPr lang="en-US" sz="1200" dirty="0"/>
           </a:p>
@@ -27703,7 +27910,7 @@
                 <a:ea typeface="Century Gothic" pitchFamily="34" charset="-122"/>
                 <a:cs typeface="Century Gothic" pitchFamily="34" charset="-120"/>
               </a:rPr>
-              <a:t>¿Qué parte de mi forma de liderar se formó en condiciones que cambiaron, y qué parte sigue siendo valiosa?</a:t>
+              <a:t>¿Qué parte de mi forma de liderar se formó en condiciones que hoy cambiaron, y qué parte sigue siendo igual de valiosa?</a:t>
             </a:r>
             <a:endParaRPr lang="en-US" sz="1450" dirty="0"/>
           </a:p>
@@ -30958,7 +31165,7 @@
                 <a:ea typeface="Century Gothic" pitchFamily="34" charset="-122"/>
                 <a:cs typeface="Century Gothic" pitchFamily="34" charset="-120"/>
               </a:rPr>
-              <a:t>Miren todas las respuestas a la pregunta 6: ¿alguna mesa negoció la seguridad o el estándar?</a:t>
+              <a:t>Miren las respuestas a la pregunta 6: ¿en qué caso estuvimos más cerca de ceder algo que no se negocia, y qué nos llevó ahí?</a:t>
             </a:r>
             <a:endParaRPr lang="en-US" sz="2000" dirty="0"/>
           </a:p>
@@ -31848,7 +32055,7 @@
                 <a:ea typeface="Century Gothic" pitchFamily="34" charset="-122"/>
                 <a:cs typeface="Century Gothic" pitchFamily="34" charset="-120"/>
               </a:rPr>
-              <a:t>Pregunta antes de concluir</a:t>
+              <a:t>Distingue lo distinto de lo incorrecto</a:t>
             </a:r>
             <a:endParaRPr lang="en-US" sz="1350" dirty="0"/>
           </a:p>
@@ -31907,7 +32114,7 @@
                 <a:ea typeface="Century Gothic" pitchFamily="34" charset="-122"/>
                 <a:cs typeface="Century Gothic" pitchFamily="34" charset="-120"/>
               </a:rPr>
-              <a:t>Ajusta el cómo: canal, feedback, autonomía</a:t>
+              <a:t>Pregunta antes de concluir</a:t>
             </a:r>
             <a:endParaRPr lang="en-US" sz="1350" dirty="0"/>
           </a:p>
@@ -31966,7 +32173,7 @@
                 <a:ea typeface="Century Gothic" pitchFamily="34" charset="-122"/>
                 <a:cs typeface="Century Gothic" pitchFamily="34" charset="-120"/>
               </a:rPr>
-              <a:t>Separa costumbre de estándar</a:t>
+              <a:t>Separa costumbre de estándar, y lo sostiene</a:t>
             </a:r>
             <a:endParaRPr lang="en-US" sz="1350" dirty="0"/>
           </a:p>
@@ -32084,7 +32291,7 @@
                 <a:ea typeface="Century Gothic" pitchFamily="34" charset="-122"/>
                 <a:cs typeface="Century Gothic" pitchFamily="34" charset="-120"/>
               </a:rPr>
-              <a:t>Sostiene el estándar con claridad</a:t>
+              <a:t>Revisa qué ofrece para merecer lealtad</a:t>
             </a:r>
             <a:endParaRPr lang="en-US" sz="1350" dirty="0"/>
           </a:p>
@@ -33826,7 +34033,7 @@
                 <a:ea typeface="Century Gothic" pitchFamily="34" charset="-122"/>
                 <a:cs typeface="Century Gothic" pitchFamily="34" charset="-120"/>
               </a:rPr>
-              <a:t>Filas: mi persona (iniciales) · un caso del laboratorio.  La seguridad es innegociable.</a:t>
+              <a:t>En su workbook: una columna para su persona (iniciales) y otra, opcional, para un caso.  La seguridad es innegociable.</a:t>
             </a:r>
             <a:endParaRPr lang="en-US" sz="1300" dirty="0"/>
           </a:p>
@@ -35985,7 +36192,7 @@
                 <a:ea typeface="Century Gothic" pitchFamily="34" charset="-122"/>
                 <a:cs typeface="Century Gothic" pitchFamily="34" charset="-120"/>
               </a:rPr>
-              <a:t>Individual: llenen la fila de su persona. Al menos tres celdas de la izquierda y todas las de la derecha.</a:t>
+              <a:t>Arriba, una cosa que no saben de su persona (LEER). Después, su columna: al menos tres filas de “lo que adapto” y todas las de “lo que no adapto”.</a:t>
             </a:r>
             <a:endParaRPr lang="en-US" sz="1400" dirty="0"/>
           </a:p>
@@ -36359,7 +36566,7 @@
                 <a:ea typeface="Century Gothic" pitchFamily="34" charset="-122"/>
                 <a:cs typeface="Century Gothic" pitchFamily="34" charset="-120"/>
               </a:rPr>
-              <a:t>7 min individual · 5 min en par</a:t>
+              <a:t>6 min individual · 5 min en par</a:t>
             </a:r>
             <a:endParaRPr lang="en-US" sz="1200" dirty="0"/>
           </a:p>
@@ -36483,7 +36690,7 @@
                 <a:ea typeface="Century Gothic" pitchFamily="34" charset="-122"/>
                 <a:cs typeface="Century Gothic" pitchFamily="34" charset="-120"/>
               </a:rPr>
-              <a:t>Una celda vacía en “lo que no adapto” es una alerta.</a:t>
+              <a:t>Un espacio vacío en “lo que no adapto” es una alerta.</a:t>
             </a:r>
             <a:endParaRPr lang="en-US" sz="1400" dirty="0"/>
           </a:p>
@@ -37152,7 +37359,7 @@
 </file>
 
 <file path=ppt/slides/slide49.xml><?xml version="1.0" encoding="utf-8"?>
-<p:sld xmlns:a="http://schemas.openxmlformats.org/drawingml/2006/main" xmlns:r="http://schemas.openxmlformats.org/officeDocument/2006/relationships" xmlns:p="http://schemas.openxmlformats.org/presentationml/2006/main">
+<p:sld xmlns:a="http://schemas.openxmlformats.org/drawingml/2006/main" xmlns:r="http://schemas.openxmlformats.org/officeDocument/2006/relationships" xmlns:p="http://schemas.openxmlformats.org/presentationml/2006/main" show="0">
   <p:cSld name="Slide 49">
     <p:bg>
       <p:bgPr>
@@ -37208,15 +37415,54 @@
                 <a:ea typeface="Century Gothic" pitchFamily="34" charset="-122"/>
                 <a:cs typeface="Century Gothic" pitchFamily="34" charset="-120"/>
               </a:rPr>
-              <a:t>12 · COMPROMISO</a:t>
+              <a:t>11 · INVERTIR EL LENTE · VARIANTE</a:t>
             </a:r>
             <a:endParaRPr lang="en-US" sz="1000" dirty="0"/>
+          </a:p>
+        </p:txBody>
+      </p:sp>
+      <p:sp>
+        <p:nvSpPr>
+          <p:cNvPr id="3" name="Text 1"/>
+          <p:cNvSpPr txBox="1"/>
+          <p:nvPr/>
+        </p:nvSpPr>
+        <p:spPr>
+          <a:xfrm>
+            <a:off x="548640" y="566928"/>
+            <a:ext cx="11109960" cy="685800"/>
+          </a:xfrm>
+          <a:prstGeom prst="rect">
+            <a:avLst/>
+          </a:prstGeom>
+          <a:noFill/>
+          <a:ln/>
+        </p:spPr>
+        <p:txBody>
+          <a:bodyPr wrap="square" lIns="0" tIns="0" rIns="0" bIns="0" rtlCol="0" anchor="ctr"/>
+          <a:lstStyle/>
+          <a:p>
+            <a:pPr indent="0" marL="0">
+              <a:buNone/>
+            </a:pPr>
+            <a:r>
+              <a:rPr lang="en-US" sz="2400" b="1" dirty="0">
+                <a:solidFill>
+                  <a:srgbClr val="1A1A2E"/>
+                </a:solidFill>
+                <a:latin typeface="Century Gothic" pitchFamily="34" charset="0"/>
+                <a:ea typeface="Century Gothic" pitchFamily="34" charset="-122"/>
+                <a:cs typeface="Century Gothic" pitchFamily="34" charset="-120"/>
+              </a:rPr>
+              <a:t>Invertir el lente con mi persona</a:t>
+            </a:r>
+            <a:endParaRPr lang="en-US" sz="2400" dirty="0"/>
           </a:p>
         </p:txBody>
       </p:sp>
       <p:pic>
         <p:nvPicPr>
-          <p:cNvPr id="3" name="Image 0" descr="/home/user/Training-and-Development-PROYECTS/workshop-liderazgo-intergeneracional/src/assets/gradient_band.png">    </p:cNvPr>
+          <p:cNvPr id="4" name="Image 0" descr="/home/user/Training-and-Development-PROYECTS/workshop-liderazgo-intergeneracional/src/assets/am_logo.png">    </p:cNvPr>
           <p:cNvPicPr>
             <a:picLocks noChangeAspect="1"/>
           </p:cNvPicPr>
@@ -37224,110 +37470,6 @@
         </p:nvPicPr>
         <p:blipFill>
           <a:blip r:embed="rId1"/>
-          <a:srcRect l="0" r="0" t="0" b="0"/>
-          <a:stretch/>
-        </p:blipFill>
-        <p:spPr>
-          <a:xfrm>
-            <a:off x="548640" y="1417320"/>
-            <a:ext cx="1005840" cy="54864"/>
-          </a:xfrm>
-          <a:prstGeom prst="rect">
-            <a:avLst/>
-          </a:prstGeom>
-        </p:spPr>
-      </p:pic>
-      <p:sp>
-        <p:nvSpPr>
-          <p:cNvPr id="4" name="Text 1"/>
-          <p:cNvSpPr txBox="1"/>
-          <p:nvPr/>
-        </p:nvSpPr>
-        <p:spPr>
-          <a:xfrm>
-            <a:off x="548640" y="1645920"/>
-            <a:ext cx="10241280" cy="2651760"/>
-          </a:xfrm>
-          <a:prstGeom prst="rect">
-            <a:avLst/>
-          </a:prstGeom>
-          <a:noFill/>
-          <a:ln/>
-        </p:spPr>
-        <p:txBody>
-          <a:bodyPr wrap="square" lIns="0" tIns="0" rIns="0" bIns="0" rtlCol="0" anchor="t"/>
-          <a:lstStyle/>
-          <a:p>
-            <a:pPr indent="0" marL="0">
-              <a:lnSpc>
-                <a:spcPct val="105000"/>
-              </a:lnSpc>
-              <a:buNone/>
-            </a:pPr>
-            <a:r>
-              <a:rPr lang="en-US" sz="3600" b="1" dirty="0">
-                <a:solidFill>
-                  <a:srgbClr val="1A1A2E"/>
-                </a:solidFill>
-                <a:latin typeface="Century Gothic" pitchFamily="34" charset="0"/>
-                <a:ea typeface="Century Gothic" pitchFamily="34" charset="-122"/>
-                <a:cs typeface="Century Gothic" pitchFamily="34" charset="-120"/>
-              </a:rPr>
-              <a:t>¿Responderían hoy lo mismo?</a:t>
-            </a:r>
-            <a:endParaRPr lang="en-US" sz="3600" dirty="0"/>
-          </a:p>
-        </p:txBody>
-      </p:sp>
-      <p:sp>
-        <p:nvSpPr>
-          <p:cNvPr id="5" name="Text 2"/>
-          <p:cNvSpPr txBox="1"/>
-          <p:nvPr/>
-        </p:nvSpPr>
-        <p:spPr>
-          <a:xfrm>
-            <a:off x="548640" y="3108960"/>
-            <a:ext cx="9601200" cy="1097280"/>
-          </a:xfrm>
-          <a:prstGeom prst="rect">
-            <a:avLst/>
-          </a:prstGeom>
-          <a:noFill/>
-          <a:ln/>
-        </p:spPr>
-        <p:txBody>
-          <a:bodyPr wrap="square" lIns="0" tIns="0" rIns="0" bIns="0" rtlCol="0" anchor="t"/>
-          <a:lstStyle/>
-          <a:p>
-            <a:pPr indent="0" marL="0">
-              <a:buNone/>
-            </a:pPr>
-            <a:r>
-              <a:rPr lang="en-US" sz="1500" dirty="0">
-                <a:solidFill>
-                  <a:srgbClr val="5A5A6E"/>
-                </a:solidFill>
-                <a:latin typeface="Century Gothic" pitchFamily="34" charset="0"/>
-                <a:ea typeface="Century Gothic" pitchFamily="34" charset="-122"/>
-                <a:cs typeface="Century Gothic" pitchFamily="34" charset="-120"/>
-              </a:rPr>
-              <a:t>Abran el sobre con sus respuestas del pre-work. Léanlas en silencio. Miren también su resultado del diagnóstico: ¿qué respuesta necesitan usar más con su persona?</a:t>
-            </a:r>
-            <a:endParaRPr lang="en-US" sz="1500" dirty="0"/>
-          </a:p>
-        </p:txBody>
-      </p:sp>
-      <p:pic>
-        <p:nvPicPr>
-          <p:cNvPr id="6" name="Image 1" descr="/home/user/Training-and-Development-PROYECTS/workshop-liderazgo-intergeneracional/src/assets/am_logo.png">    </p:cNvPr>
-          <p:cNvPicPr>
-            <a:picLocks noChangeAspect="1"/>
-          </p:cNvPicPr>
-          <p:nvPr/>
-        </p:nvPicPr>
-        <p:blipFill>
-          <a:blip r:embed="rId2"/>
           <a:stretch>
             <a:fillRect/>
           </a:stretch>
@@ -37344,7 +37486,7 @@
       </p:pic>
       <p:sp>
         <p:nvSpPr>
-          <p:cNvPr id="7" name="Text 3"/>
+          <p:cNvPr id="5" name="Text 2"/>
           <p:cNvSpPr txBox="1"/>
           <p:nvPr/>
         </p:nvSpPr>
@@ -37378,6 +37520,386 @@
               <a:t>49</a:t>
             </a:r>
             <a:endParaRPr lang="en-US" sz="750" dirty="0"/>
+          </a:p>
+        </p:txBody>
+      </p:sp>
+      <p:sp>
+        <p:nvSpPr>
+          <p:cNvPr id="7" name="Text 3"/>
+          <p:cNvSpPr txBox="1"/>
+          <p:nvPr/>
+        </p:nvSpPr>
+        <p:spPr>
+          <a:xfrm>
+            <a:off x="548640" y="1645920"/>
+            <a:ext cx="640080" cy="667512"/>
+          </a:xfrm>
+          <a:prstGeom prst="rect">
+            <a:avLst/>
+          </a:prstGeom>
+          <a:noFill/>
+          <a:ln/>
+        </p:spPr>
+        <p:txBody>
+          <a:bodyPr wrap="square" lIns="0" tIns="0" rIns="0" bIns="0" rtlCol="0" anchor="t"/>
+          <a:lstStyle/>
+          <a:p>
+            <a:pPr indent="0" marL="0">
+              <a:buNone/>
+            </a:pPr>
+            <a:r>
+              <a:rPr lang="en-US" sz="1600" b="1" dirty="0">
+                <a:solidFill>
+                  <a:srgbClr val="FA4642"/>
+                </a:solidFill>
+                <a:latin typeface="Century Gothic" pitchFamily="34" charset="0"/>
+                <a:ea typeface="Century Gothic" pitchFamily="34" charset="-122"/>
+                <a:cs typeface="Century Gothic" pitchFamily="34" charset="-120"/>
+              </a:rPr>
+              <a:t>01</a:t>
+            </a:r>
+            <a:endParaRPr lang="en-US" sz="1600" dirty="0"/>
+          </a:p>
+        </p:txBody>
+      </p:sp>
+      <p:sp>
+        <p:nvSpPr>
+          <p:cNvPr id="8" name="Text 4"/>
+          <p:cNvSpPr txBox="1"/>
+          <p:nvPr/>
+        </p:nvSpPr>
+        <p:spPr>
+          <a:xfrm>
+            <a:off x="1234440" y="1645920"/>
+            <a:ext cx="6035040" cy="667512"/>
+          </a:xfrm>
+          <a:prstGeom prst="rect">
+            <a:avLst/>
+          </a:prstGeom>
+          <a:noFill/>
+          <a:ln/>
+        </p:spPr>
+        <p:txBody>
+          <a:bodyPr wrap="square" lIns="0" tIns="0" rIns="0" bIns="0" rtlCol="0" anchor="t"/>
+          <a:lstStyle/>
+          <a:p>
+            <a:pPr indent="0" marL="0">
+              <a:buNone/>
+            </a:pPr>
+            <a:r>
+              <a:rPr lang="en-US" sz="1900" dirty="0">
+                <a:solidFill>
+                  <a:srgbClr val="1A1A2E"/>
+                </a:solidFill>
+                <a:latin typeface="Century Gothic" pitchFamily="34" charset="0"/>
+                <a:ea typeface="Century Gothic" pitchFamily="34" charset="-122"/>
+                <a:cs typeface="Century Gothic" pitchFamily="34" charset="-120"/>
+              </a:rPr>
+              <a:t>Algo que los líderes malinterpretan de las personas en su etapa de carrera es…</a:t>
+            </a:r>
+            <a:endParaRPr lang="en-US" sz="1900" dirty="0"/>
+          </a:p>
+        </p:txBody>
+      </p:sp>
+      <p:sp>
+        <p:nvSpPr>
+          <p:cNvPr id="9" name="Text 5"/>
+          <p:cNvSpPr txBox="1"/>
+          <p:nvPr/>
+        </p:nvSpPr>
+        <p:spPr>
+          <a:xfrm>
+            <a:off x="548640" y="2359152"/>
+            <a:ext cx="640080" cy="667512"/>
+          </a:xfrm>
+          <a:prstGeom prst="rect">
+            <a:avLst/>
+          </a:prstGeom>
+          <a:noFill/>
+          <a:ln/>
+        </p:spPr>
+        <p:txBody>
+          <a:bodyPr wrap="square" lIns="0" tIns="0" rIns="0" bIns="0" rtlCol="0" anchor="t"/>
+          <a:lstStyle/>
+          <a:p>
+            <a:pPr indent="0" marL="0">
+              <a:buNone/>
+            </a:pPr>
+            <a:r>
+              <a:rPr lang="en-US" sz="1600" b="1" dirty="0">
+                <a:solidFill>
+                  <a:srgbClr val="FA4642"/>
+                </a:solidFill>
+                <a:latin typeface="Century Gothic" pitchFamily="34" charset="0"/>
+                <a:ea typeface="Century Gothic" pitchFamily="34" charset="-122"/>
+                <a:cs typeface="Century Gothic" pitchFamily="34" charset="-120"/>
+              </a:rPr>
+              <a:t>02</a:t>
+            </a:r>
+            <a:endParaRPr lang="en-US" sz="1600" dirty="0"/>
+          </a:p>
+        </p:txBody>
+      </p:sp>
+      <p:sp>
+        <p:nvSpPr>
+          <p:cNvPr id="10" name="Text 6"/>
+          <p:cNvSpPr txBox="1"/>
+          <p:nvPr/>
+        </p:nvSpPr>
+        <p:spPr>
+          <a:xfrm>
+            <a:off x="1234440" y="2359152"/>
+            <a:ext cx="6035040" cy="667512"/>
+          </a:xfrm>
+          <a:prstGeom prst="rect">
+            <a:avLst/>
+          </a:prstGeom>
+          <a:noFill/>
+          <a:ln/>
+        </p:spPr>
+        <p:txBody>
+          <a:bodyPr wrap="square" lIns="0" tIns="0" rIns="0" bIns="0" rtlCol="0" anchor="t"/>
+          <a:lstStyle/>
+          <a:p>
+            <a:pPr indent="0" marL="0">
+              <a:buNone/>
+            </a:pPr>
+            <a:r>
+              <a:rPr lang="en-US" sz="1900" dirty="0">
+                <a:solidFill>
+                  <a:srgbClr val="1A1A2E"/>
+                </a:solidFill>
+                <a:latin typeface="Century Gothic" pitchFamily="34" charset="0"/>
+                <a:ea typeface="Century Gothic" pitchFamily="34" charset="-122"/>
+                <a:cs typeface="Century Gothic" pitchFamily="34" charset="-120"/>
+              </a:rPr>
+              <a:t>Algo que yo podría aprender de su etapa es…</a:t>
+            </a:r>
+            <a:endParaRPr lang="en-US" sz="1900" dirty="0"/>
+          </a:p>
+        </p:txBody>
+      </p:sp>
+      <p:sp>
+        <p:nvSpPr>
+          <p:cNvPr id="11" name="Text 7"/>
+          <p:cNvSpPr txBox="1"/>
+          <p:nvPr/>
+        </p:nvSpPr>
+        <p:spPr>
+          <a:xfrm>
+            <a:off x="548640" y="3072384"/>
+            <a:ext cx="640080" cy="667512"/>
+          </a:xfrm>
+          <a:prstGeom prst="rect">
+            <a:avLst/>
+          </a:prstGeom>
+          <a:noFill/>
+          <a:ln/>
+        </p:spPr>
+        <p:txBody>
+          <a:bodyPr wrap="square" lIns="0" tIns="0" rIns="0" bIns="0" rtlCol="0" anchor="t"/>
+          <a:lstStyle/>
+          <a:p>
+            <a:pPr indent="0" marL="0">
+              <a:buNone/>
+            </a:pPr>
+            <a:r>
+              <a:rPr lang="en-US" sz="1600" b="1" dirty="0">
+                <a:solidFill>
+                  <a:srgbClr val="FA4642"/>
+                </a:solidFill>
+                <a:latin typeface="Century Gothic" pitchFamily="34" charset="0"/>
+                <a:ea typeface="Century Gothic" pitchFamily="34" charset="-122"/>
+                <a:cs typeface="Century Gothic" pitchFamily="34" charset="-120"/>
+              </a:rPr>
+              <a:t>03</a:t>
+            </a:r>
+            <a:endParaRPr lang="en-US" sz="1600" dirty="0"/>
+          </a:p>
+        </p:txBody>
+      </p:sp>
+      <p:sp>
+        <p:nvSpPr>
+          <p:cNvPr id="12" name="Text 8"/>
+          <p:cNvSpPr txBox="1"/>
+          <p:nvPr/>
+        </p:nvSpPr>
+        <p:spPr>
+          <a:xfrm>
+            <a:off x="1234440" y="3072384"/>
+            <a:ext cx="6035040" cy="667512"/>
+          </a:xfrm>
+          <a:prstGeom prst="rect">
+            <a:avLst/>
+          </a:prstGeom>
+          <a:noFill/>
+          <a:ln/>
+        </p:spPr>
+        <p:txBody>
+          <a:bodyPr wrap="square" lIns="0" tIns="0" rIns="0" bIns="0" rtlCol="0" anchor="t"/>
+          <a:lstStyle/>
+          <a:p>
+            <a:pPr indent="0" marL="0">
+              <a:buNone/>
+            </a:pPr>
+            <a:r>
+              <a:rPr lang="en-US" sz="1900" dirty="0">
+                <a:solidFill>
+                  <a:srgbClr val="1A1A2E"/>
+                </a:solidFill>
+                <a:latin typeface="Century Gothic" pitchFamily="34" charset="0"/>
+                <a:ea typeface="Century Gothic" pitchFamily="34" charset="-122"/>
+                <a:cs typeface="Century Gothic" pitchFamily="34" charset="-120"/>
+              </a:rPr>
+              <a:t>Algo que probablemente ambos queremos es…</a:t>
+            </a:r>
+            <a:endParaRPr lang="en-US" sz="1900" dirty="0"/>
+          </a:p>
+        </p:txBody>
+      </p:sp>
+      <p:sp>
+        <p:nvSpPr>
+          <p:cNvPr id="13" name="Shape 9"/>
+          <p:cNvSpPr/>
+          <p:nvPr/>
+        </p:nvSpPr>
+        <p:spPr>
+          <a:xfrm>
+            <a:off x="7680960" y="1600200"/>
+            <a:ext cx="3959352" cy="4480560"/>
+          </a:xfrm>
+          <a:prstGeom prst="roundRect">
+            <a:avLst>
+              <a:gd name="adj" fmla="val 1848"/>
+            </a:avLst>
+          </a:prstGeom>
+          <a:solidFill>
+            <a:srgbClr val="F4F5F9"/>
+          </a:solidFill>
+          <a:ln/>
+        </p:spPr>
+      </p:sp>
+      <p:sp>
+        <p:nvSpPr>
+          <p:cNvPr id="14" name="Text 10"/>
+          <p:cNvSpPr txBox="1"/>
+          <p:nvPr/>
+        </p:nvSpPr>
+        <p:spPr>
+          <a:xfrm>
+            <a:off x="7955280" y="1783080"/>
+            <a:ext cx="3410712" cy="274320"/>
+          </a:xfrm>
+          <a:prstGeom prst="rect">
+            <a:avLst/>
+          </a:prstGeom>
+          <a:noFill/>
+          <a:ln/>
+        </p:spPr>
+        <p:txBody>
+          <a:bodyPr wrap="square" lIns="0" tIns="0" rIns="0" bIns="0" rtlCol="0" anchor="t"/>
+          <a:lstStyle/>
+          <a:p>
+            <a:pPr indent="0" marL="0">
+              <a:buNone/>
+            </a:pPr>
+            <a:r>
+              <a:rPr lang="en-US" sz="1000" b="1" spc="200" kern="0" dirty="0">
+                <a:solidFill>
+                  <a:srgbClr val="FA4642"/>
+                </a:solidFill>
+                <a:latin typeface="Century Gothic" pitchFamily="34" charset="0"/>
+                <a:ea typeface="Century Gothic" pitchFamily="34" charset="-122"/>
+                <a:cs typeface="Century Gothic" pitchFamily="34" charset="-120"/>
+              </a:rPr>
+              <a:t>CÓMO</a:t>
+            </a:r>
+            <a:endParaRPr lang="en-US" sz="1000" dirty="0"/>
+          </a:p>
+        </p:txBody>
+      </p:sp>
+      <p:sp>
+        <p:nvSpPr>
+          <p:cNvPr id="15" name="Text 11"/>
+          <p:cNvSpPr txBox="1"/>
+          <p:nvPr/>
+        </p:nvSpPr>
+        <p:spPr>
+          <a:xfrm>
+            <a:off x="7955280" y="2167128"/>
+            <a:ext cx="3429000" cy="3749040"/>
+          </a:xfrm>
+          <a:prstGeom prst="rect">
+            <a:avLst/>
+          </a:prstGeom>
+          <a:noFill/>
+          <a:ln/>
+        </p:spPr>
+        <p:txBody>
+          <a:bodyPr wrap="square" lIns="0" tIns="0" rIns="0" bIns="0" rtlCol="0" anchor="t"/>
+          <a:lstStyle/>
+          <a:p>
+            <a:pPr indent="0" marL="0">
+              <a:buNone/>
+            </a:pPr>
+            <a:r>
+              <a:rPr lang="en-US" sz="1200" dirty="0">
+                <a:solidFill>
+                  <a:srgbClr val="1A1A2E"/>
+                </a:solidFill>
+                <a:latin typeface="Century Gothic" pitchFamily="34" charset="0"/>
+                <a:ea typeface="Century Gothic" pitchFamily="34" charset="-122"/>
+                <a:cs typeface="Century Gothic" pitchFamily="34" charset="-120"/>
+              </a:rPr>
+              <a:t>Respondan como creen que respondería su persona. Iniciales, no nombre.</a:t>
+            </a:r>
+            <a:endParaRPr lang="en-US" sz="1200" dirty="0"/>
+          </a:p>
+          <a:p>
+            <a:pPr indent="0" marL="0">
+              <a:buNone/>
+            </a:pPr>
+            <a:endParaRPr lang="en-US" sz="1200" dirty="0"/>
+          </a:p>
+          <a:p>
+            <a:pPr indent="0" marL="0">
+              <a:buNone/>
+            </a:pPr>
+            <a:r>
+              <a:rPr lang="en-US" sz="1200" dirty="0">
+                <a:solidFill>
+                  <a:srgbClr val="1A1A2E"/>
+                </a:solidFill>
+                <a:latin typeface="Century Gothic" pitchFamily="34" charset="0"/>
+                <a:ea typeface="Century Gothic" pitchFamily="34" charset="-122"/>
+                <a:cs typeface="Century Gothic" pitchFamily="34" charset="-120"/>
+              </a:rPr>
+              <a:t>El par pregunta: “¿Qué tan seguro estás de que diría eso? ¿Cuándo se lo preguntaste por última vez?”</a:t>
+            </a:r>
+            <a:endParaRPr lang="en-US" sz="1200" dirty="0"/>
+          </a:p>
+          <a:p>
+            <a:pPr indent="0" marL="0">
+              <a:buNone/>
+            </a:pPr>
+            <a:endParaRPr lang="en-US" sz="1200" dirty="0"/>
+          </a:p>
+          <a:p>
+            <a:pPr indent="0" marL="0">
+              <a:buNone/>
+            </a:pPr>
+            <a:r>
+              <a:rPr lang="en-US" sz="1200" dirty="0">
+                <a:solidFill>
+                  <a:srgbClr val="1A1A2E"/>
+                </a:solidFill>
+                <a:latin typeface="Century Gothic" pitchFamily="34" charset="0"/>
+                <a:ea typeface="Century Gothic" pitchFamily="34" charset="-122"/>
+                <a:cs typeface="Century Gothic" pitchFamily="34" charset="-120"/>
+              </a:rPr>
+              <a:t>Hoy imaginamos sus respuestas. La única forma de saber si acertamos es preguntar.</a:t>
+            </a:r>
+            <a:endParaRPr lang="en-US" sz="1200" dirty="0"/>
           </a:p>
         </p:txBody>
       </p:sp>
@@ -38198,48 +38720,9 @@
           </a:p>
         </p:txBody>
       </p:sp>
-      <p:sp>
-        <p:nvSpPr>
-          <p:cNvPr id="3" name="Text 1"/>
-          <p:cNvSpPr txBox="1"/>
-          <p:nvPr/>
-        </p:nvSpPr>
-        <p:spPr>
-          <a:xfrm>
-            <a:off x="548640" y="566928"/>
-            <a:ext cx="11109960" cy="685800"/>
-          </a:xfrm>
-          <a:prstGeom prst="rect">
-            <a:avLst/>
-          </a:prstGeom>
-          <a:noFill/>
-          <a:ln/>
-        </p:spPr>
-        <p:txBody>
-          <a:bodyPr wrap="square" lIns="0" tIns="0" rIns="0" bIns="0" rtlCol="0" anchor="ctr"/>
-          <a:lstStyle/>
-          <a:p>
-            <a:pPr indent="0" marL="0">
-              <a:buNone/>
-            </a:pPr>
-            <a:r>
-              <a:rPr lang="en-US" sz="2400" b="1" dirty="0">
-                <a:solidFill>
-                  <a:srgbClr val="1A1A2E"/>
-                </a:solidFill>
-                <a:latin typeface="Century Gothic" pitchFamily="34" charset="0"/>
-                <a:ea typeface="Century Gothic" pitchFamily="34" charset="-122"/>
-                <a:cs typeface="Century Gothic" pitchFamily="34" charset="-120"/>
-              </a:rPr>
-              <a:t>Una decisión, no una intención</a:t>
-            </a:r>
-            <a:endParaRPr lang="en-US" sz="2400" dirty="0"/>
-          </a:p>
-        </p:txBody>
-      </p:sp>
       <p:pic>
         <p:nvPicPr>
-          <p:cNvPr id="4" name="Image 0" descr="/home/user/Training-and-Development-PROYECTS/workshop-liderazgo-intergeneracional/src/assets/am_logo.png">    </p:cNvPr>
+          <p:cNvPr id="3" name="Image 0" descr="/home/user/Training-and-Development-PROYECTS/workshop-liderazgo-intergeneracional/src/assets/gradient_band.png">    </p:cNvPr>
           <p:cNvPicPr>
             <a:picLocks noChangeAspect="1"/>
           </p:cNvPicPr>
@@ -38247,6 +38730,110 @@
         </p:nvPicPr>
         <p:blipFill>
           <a:blip r:embed="rId1"/>
+          <a:srcRect l="0" r="0" t="0" b="0"/>
+          <a:stretch/>
+        </p:blipFill>
+        <p:spPr>
+          <a:xfrm>
+            <a:off x="548640" y="1417320"/>
+            <a:ext cx="1005840" cy="54864"/>
+          </a:xfrm>
+          <a:prstGeom prst="rect">
+            <a:avLst/>
+          </a:prstGeom>
+        </p:spPr>
+      </p:pic>
+      <p:sp>
+        <p:nvSpPr>
+          <p:cNvPr id="4" name="Text 1"/>
+          <p:cNvSpPr txBox="1"/>
+          <p:nvPr/>
+        </p:nvSpPr>
+        <p:spPr>
+          <a:xfrm>
+            <a:off x="548640" y="1645920"/>
+            <a:ext cx="10241280" cy="2651760"/>
+          </a:xfrm>
+          <a:prstGeom prst="rect">
+            <a:avLst/>
+          </a:prstGeom>
+          <a:noFill/>
+          <a:ln/>
+        </p:spPr>
+        <p:txBody>
+          <a:bodyPr wrap="square" lIns="0" tIns="0" rIns="0" bIns="0" rtlCol="0" anchor="t"/>
+          <a:lstStyle/>
+          <a:p>
+            <a:pPr indent="0" marL="0">
+              <a:lnSpc>
+                <a:spcPct val="105000"/>
+              </a:lnSpc>
+              <a:buNone/>
+            </a:pPr>
+            <a:r>
+              <a:rPr lang="en-US" sz="3600" b="1" dirty="0">
+                <a:solidFill>
+                  <a:srgbClr val="1A1A2E"/>
+                </a:solidFill>
+                <a:latin typeface="Century Gothic" pitchFamily="34" charset="0"/>
+                <a:ea typeface="Century Gothic" pitchFamily="34" charset="-122"/>
+                <a:cs typeface="Century Gothic" pitchFamily="34" charset="-120"/>
+              </a:rPr>
+              <a:t>¿Responderían hoy lo mismo?</a:t>
+            </a:r>
+            <a:endParaRPr lang="en-US" sz="3600" dirty="0"/>
+          </a:p>
+        </p:txBody>
+      </p:sp>
+      <p:sp>
+        <p:nvSpPr>
+          <p:cNvPr id="5" name="Text 2"/>
+          <p:cNvSpPr txBox="1"/>
+          <p:nvPr/>
+        </p:nvSpPr>
+        <p:spPr>
+          <a:xfrm>
+            <a:off x="548640" y="3108960"/>
+            <a:ext cx="9601200" cy="1097280"/>
+          </a:xfrm>
+          <a:prstGeom prst="rect">
+            <a:avLst/>
+          </a:prstGeom>
+          <a:noFill/>
+          <a:ln/>
+        </p:spPr>
+        <p:txBody>
+          <a:bodyPr wrap="square" lIns="0" tIns="0" rIns="0" bIns="0" rtlCol="0" anchor="t"/>
+          <a:lstStyle/>
+          <a:p>
+            <a:pPr indent="0" marL="0">
+              <a:buNone/>
+            </a:pPr>
+            <a:r>
+              <a:rPr lang="en-US" sz="1500" dirty="0">
+                <a:solidFill>
+                  <a:srgbClr val="5A5A6E"/>
+                </a:solidFill>
+                <a:latin typeface="Century Gothic" pitchFamily="34" charset="0"/>
+                <a:ea typeface="Century Gothic" pitchFamily="34" charset="-122"/>
+                <a:cs typeface="Century Gothic" pitchFamily="34" charset="-120"/>
+              </a:rPr>
+              <a:t>Abran el sobre con sus respuestas del pre-work. Léanlas en silencio. Miren también su resultado del diagnóstico: ¿qué respuesta necesitan usar más con su persona?</a:t>
+            </a:r>
+            <a:endParaRPr lang="en-US" sz="1500" dirty="0"/>
+          </a:p>
+        </p:txBody>
+      </p:sp>
+      <p:pic>
+        <p:nvPicPr>
+          <p:cNvPr id="6" name="Image 1" descr="/home/user/Training-and-Development-PROYECTS/workshop-liderazgo-intergeneracional/src/assets/am_logo.png">    </p:cNvPr>
+          <p:cNvPicPr>
+            <a:picLocks noChangeAspect="1"/>
+          </p:cNvPicPr>
+          <p:nvPr/>
+        </p:nvPicPr>
+        <p:blipFill>
+          <a:blip r:embed="rId2"/>
           <a:stretch>
             <a:fillRect/>
           </a:stretch>
@@ -38263,7 +38850,7 @@
       </p:pic>
       <p:sp>
         <p:nvSpPr>
-          <p:cNvPr id="5" name="Text 2"/>
+          <p:cNvPr id="7" name="Text 3"/>
           <p:cNvSpPr txBox="1"/>
           <p:nvPr/>
         </p:nvSpPr>
@@ -38297,531 +38884,6 @@
               <a:t>50</a:t>
             </a:r>
             <a:endParaRPr lang="en-US" sz="750" dirty="0"/>
-          </a:p>
-        </p:txBody>
-      </p:sp>
-      <p:sp>
-        <p:nvSpPr>
-          <p:cNvPr id="7" name="Shape 3"/>
-          <p:cNvSpPr/>
-          <p:nvPr/>
-        </p:nvSpPr>
-        <p:spPr>
-          <a:xfrm>
-            <a:off x="548640" y="1645920"/>
-            <a:ext cx="3514344" cy="109728"/>
-          </a:xfrm>
-          <a:prstGeom prst="rect">
-            <a:avLst/>
-          </a:prstGeom>
-          <a:solidFill>
-            <a:srgbClr val="FF8C47"/>
-          </a:solidFill>
-          <a:ln/>
-        </p:spPr>
-      </p:sp>
-      <p:sp>
-        <p:nvSpPr>
-          <p:cNvPr id="8" name="Text 4"/>
-          <p:cNvSpPr txBox="1"/>
-          <p:nvPr/>
-        </p:nvSpPr>
-        <p:spPr>
-          <a:xfrm>
-            <a:off x="548640" y="1874520"/>
-            <a:ext cx="3514344" cy="777240"/>
-          </a:xfrm>
-          <a:prstGeom prst="rect">
-            <a:avLst/>
-          </a:prstGeom>
-          <a:noFill/>
-          <a:ln/>
-        </p:spPr>
-        <p:txBody>
-          <a:bodyPr wrap="square" lIns="0" tIns="0" rIns="0" bIns="0" rtlCol="0" anchor="ctr"/>
-          <a:lstStyle/>
-          <a:p>
-            <a:pPr indent="0" marL="0">
-              <a:buNone/>
-            </a:pPr>
-            <a:r>
-              <a:rPr lang="en-US" sz="3400" b="1" dirty="0">
-                <a:solidFill>
-                  <a:srgbClr val="1A1A2E"/>
-                </a:solidFill>
-                <a:latin typeface="Century Gothic" pitchFamily="34" charset="0"/>
-                <a:ea typeface="Century Gothic" pitchFamily="34" charset="-122"/>
-                <a:cs typeface="Century Gothic" pitchFamily="34" charset="-120"/>
-              </a:rPr>
-              <a:t>DEJAR</a:t>
-            </a:r>
-            <a:endParaRPr lang="en-US" sz="3400" dirty="0"/>
-          </a:p>
-        </p:txBody>
-      </p:sp>
-      <p:sp>
-        <p:nvSpPr>
-          <p:cNvPr id="9" name="Text 5"/>
-          <p:cNvSpPr txBox="1"/>
-          <p:nvPr/>
-        </p:nvSpPr>
-        <p:spPr>
-          <a:xfrm>
-            <a:off x="548640" y="2651760"/>
-            <a:ext cx="3514344" cy="457200"/>
-          </a:xfrm>
-          <a:prstGeom prst="rect">
-            <a:avLst/>
-          </a:prstGeom>
-          <a:noFill/>
-          <a:ln/>
-        </p:spPr>
-        <p:txBody>
-          <a:bodyPr wrap="square" lIns="0" tIns="0" rIns="0" bIns="0" rtlCol="0" anchor="t"/>
-          <a:lstStyle/>
-          <a:p>
-            <a:pPr indent="0" marL="0">
-              <a:buNone/>
-            </a:pPr>
-            <a:r>
-              <a:rPr lang="en-US" sz="1400" b="1" dirty="0">
-                <a:solidFill>
-                  <a:srgbClr val="FF8C47"/>
-                </a:solidFill>
-                <a:latin typeface="Century Gothic" pitchFamily="34" charset="0"/>
-                <a:ea typeface="Century Gothic" pitchFamily="34" charset="-122"/>
-                <a:cs typeface="Century Gothic" pitchFamily="34" charset="-120"/>
-              </a:rPr>
-              <a:t>Algo que dejaré de hacer</a:t>
-            </a:r>
-            <a:endParaRPr lang="en-US" sz="1400" dirty="0"/>
-          </a:p>
-        </p:txBody>
-      </p:sp>
-      <p:sp>
-        <p:nvSpPr>
-          <p:cNvPr id="10" name="Text 6"/>
-          <p:cNvSpPr txBox="1"/>
-          <p:nvPr/>
-        </p:nvSpPr>
-        <p:spPr>
-          <a:xfrm>
-            <a:off x="548640" y="3200400"/>
-            <a:ext cx="3422904" cy="2103120"/>
-          </a:xfrm>
-          <a:prstGeom prst="rect">
-            <a:avLst/>
-          </a:prstGeom>
-          <a:noFill/>
-          <a:ln/>
-        </p:spPr>
-        <p:txBody>
-          <a:bodyPr wrap="square" lIns="0" tIns="0" rIns="0" bIns="0" rtlCol="0" anchor="t"/>
-          <a:lstStyle/>
-          <a:p>
-            <a:pPr marL="213360" indent="-213360">
-              <a:spcAft>
-                <a:spcPts val="720"/>
-              </a:spcAft>
-              <a:buSzPct val="100000"/>
-              <a:buChar char="•"/>
-            </a:pPr>
-            <a:r>
-              <a:rPr lang="en-US" sz="1200" dirty="0">
-                <a:solidFill>
-                  <a:srgbClr val="1A1A2E"/>
-                </a:solidFill>
-                <a:latin typeface="Century Gothic" pitchFamily="34" charset="0"/>
-                <a:ea typeface="Century Gothic" pitchFamily="34" charset="-122"/>
-                <a:cs typeface="Century Gothic" pitchFamily="34" charset="-120"/>
-              </a:rPr>
-              <a:t>Una conducta concreta, no un rasgo.</a:t>
-            </a:r>
-            <a:endParaRPr lang="en-US" sz="1200" dirty="0"/>
-          </a:p>
-          <a:p>
-            <a:pPr marL="213360" indent="-213360">
-              <a:spcAft>
-                <a:spcPts val="720"/>
-              </a:spcAft>
-              <a:buSzPct val="100000"/>
-              <a:buChar char="•"/>
-            </a:pPr>
-            <a:r>
-              <a:rPr lang="en-US" sz="1200" dirty="0">
-                <a:solidFill>
-                  <a:srgbClr val="1A1A2E"/>
-                </a:solidFill>
-                <a:latin typeface="Century Gothic" pitchFamily="34" charset="0"/>
-                <a:ea typeface="Century Gothic" pitchFamily="34" charset="-122"/>
-                <a:cs typeface="Century Gothic" pitchFamily="34" charset="-120"/>
-              </a:rPr>
-              <a:t>Ejemplo: responder “todavía te falta piso” sin decir qué falta.</a:t>
-            </a:r>
-            <a:endParaRPr lang="en-US" sz="1200" dirty="0"/>
-          </a:p>
-        </p:txBody>
-      </p:sp>
-      <p:sp>
-        <p:nvSpPr>
-          <p:cNvPr id="11" name="Shape 7"/>
-          <p:cNvSpPr/>
-          <p:nvPr/>
-        </p:nvSpPr>
-        <p:spPr>
-          <a:xfrm>
-            <a:off x="4337304" y="1645920"/>
-            <a:ext cx="3514344" cy="109728"/>
-          </a:xfrm>
-          <a:prstGeom prst="rect">
-            <a:avLst/>
-          </a:prstGeom>
-          <a:solidFill>
-            <a:srgbClr val="FA4642"/>
-          </a:solidFill>
-          <a:ln/>
-        </p:spPr>
-      </p:sp>
-      <p:sp>
-        <p:nvSpPr>
-          <p:cNvPr id="12" name="Text 8"/>
-          <p:cNvSpPr txBox="1"/>
-          <p:nvPr/>
-        </p:nvSpPr>
-        <p:spPr>
-          <a:xfrm>
-            <a:off x="4337304" y="1874520"/>
-            <a:ext cx="3514344" cy="777240"/>
-          </a:xfrm>
-          <a:prstGeom prst="rect">
-            <a:avLst/>
-          </a:prstGeom>
-          <a:noFill/>
-          <a:ln/>
-        </p:spPr>
-        <p:txBody>
-          <a:bodyPr wrap="square" lIns="0" tIns="0" rIns="0" bIns="0" rtlCol="0" anchor="ctr"/>
-          <a:lstStyle/>
-          <a:p>
-            <a:pPr indent="0" marL="0">
-              <a:buNone/>
-            </a:pPr>
-            <a:r>
-              <a:rPr lang="en-US" sz="3400" b="1" dirty="0">
-                <a:solidFill>
-                  <a:srgbClr val="1A1A2E"/>
-                </a:solidFill>
-                <a:latin typeface="Century Gothic" pitchFamily="34" charset="0"/>
-                <a:ea typeface="Century Gothic" pitchFamily="34" charset="-122"/>
-                <a:cs typeface="Century Gothic" pitchFamily="34" charset="-120"/>
-              </a:rPr>
-              <a:t>EMPEZAR</a:t>
-            </a:r>
-            <a:endParaRPr lang="en-US" sz="3400" dirty="0"/>
-          </a:p>
-        </p:txBody>
-      </p:sp>
-      <p:sp>
-        <p:nvSpPr>
-          <p:cNvPr id="13" name="Text 9"/>
-          <p:cNvSpPr txBox="1"/>
-          <p:nvPr/>
-        </p:nvSpPr>
-        <p:spPr>
-          <a:xfrm>
-            <a:off x="4337304" y="2651760"/>
-            <a:ext cx="3514344" cy="457200"/>
-          </a:xfrm>
-          <a:prstGeom prst="rect">
-            <a:avLst/>
-          </a:prstGeom>
-          <a:noFill/>
-          <a:ln/>
-        </p:spPr>
-        <p:txBody>
-          <a:bodyPr wrap="square" lIns="0" tIns="0" rIns="0" bIns="0" rtlCol="0" anchor="t"/>
-          <a:lstStyle/>
-          <a:p>
-            <a:pPr indent="0" marL="0">
-              <a:buNone/>
-            </a:pPr>
-            <a:r>
-              <a:rPr lang="en-US" sz="1400" b="1" dirty="0">
-                <a:solidFill>
-                  <a:srgbClr val="FA4642"/>
-                </a:solidFill>
-                <a:latin typeface="Century Gothic" pitchFamily="34" charset="0"/>
-                <a:ea typeface="Century Gothic" pitchFamily="34" charset="-122"/>
-                <a:cs typeface="Century Gothic" pitchFamily="34" charset="-120"/>
-              </a:rPr>
-              <a:t>Algo que empezaré a hacer</a:t>
-            </a:r>
-            <a:endParaRPr lang="en-US" sz="1400" dirty="0"/>
-          </a:p>
-        </p:txBody>
-      </p:sp>
-      <p:sp>
-        <p:nvSpPr>
-          <p:cNvPr id="14" name="Text 10"/>
-          <p:cNvSpPr txBox="1"/>
-          <p:nvPr/>
-        </p:nvSpPr>
-        <p:spPr>
-          <a:xfrm>
-            <a:off x="4337304" y="3200400"/>
-            <a:ext cx="3422904" cy="2103120"/>
-          </a:xfrm>
-          <a:prstGeom prst="rect">
-            <a:avLst/>
-          </a:prstGeom>
-          <a:noFill/>
-          <a:ln/>
-        </p:spPr>
-        <p:txBody>
-          <a:bodyPr wrap="square" lIns="0" tIns="0" rIns="0" bIns="0" rtlCol="0" anchor="t"/>
-          <a:lstStyle/>
-          <a:p>
-            <a:pPr marL="213360" indent="-213360">
-              <a:spcAft>
-                <a:spcPts val="720"/>
-              </a:spcAft>
-              <a:buSzPct val="100000"/>
-              <a:buChar char="•"/>
-            </a:pPr>
-            <a:r>
-              <a:rPr lang="en-US" sz="1200" dirty="0">
-                <a:solidFill>
-                  <a:srgbClr val="1A1A2E"/>
-                </a:solidFill>
-                <a:latin typeface="Century Gothic" pitchFamily="34" charset="0"/>
-                <a:ea typeface="Century Gothic" pitchFamily="34" charset="-122"/>
-                <a:cs typeface="Century Gothic" pitchFamily="34" charset="-120"/>
-              </a:rPr>
-              <a:t>Observable por mi equipo.</a:t>
-            </a:r>
-            <a:endParaRPr lang="en-US" sz="1200" dirty="0"/>
-          </a:p>
-          <a:p>
-            <a:pPr marL="213360" indent="-213360">
-              <a:spcAft>
-                <a:spcPts val="720"/>
-              </a:spcAft>
-              <a:buSzPct val="100000"/>
-              <a:buChar char="•"/>
-            </a:pPr>
-            <a:r>
-              <a:rPr lang="en-US" sz="1200" dirty="0">
-                <a:solidFill>
-                  <a:srgbClr val="1A1A2E"/>
-                </a:solidFill>
-                <a:latin typeface="Century Gothic" pitchFamily="34" charset="0"/>
-                <a:ea typeface="Century Gothic" pitchFamily="34" charset="-122"/>
-                <a:cs typeface="Century Gothic" pitchFamily="34" charset="-120"/>
-              </a:rPr>
-              <a:t>Ejemplo: preguntar antes de concluir.</a:t>
-            </a:r>
-            <a:endParaRPr lang="en-US" sz="1200" dirty="0"/>
-          </a:p>
-        </p:txBody>
-      </p:sp>
-      <p:sp>
-        <p:nvSpPr>
-          <p:cNvPr id="15" name="Shape 11"/>
-          <p:cNvSpPr/>
-          <p:nvPr/>
-        </p:nvSpPr>
-        <p:spPr>
-          <a:xfrm>
-            <a:off x="8125968" y="1645920"/>
-            <a:ext cx="3514344" cy="109728"/>
-          </a:xfrm>
-          <a:prstGeom prst="rect">
-            <a:avLst/>
-          </a:prstGeom>
-          <a:solidFill>
-            <a:srgbClr val="AA0582"/>
-          </a:solidFill>
-          <a:ln/>
-        </p:spPr>
-      </p:sp>
-      <p:sp>
-        <p:nvSpPr>
-          <p:cNvPr id="16" name="Text 12"/>
-          <p:cNvSpPr txBox="1"/>
-          <p:nvPr/>
-        </p:nvSpPr>
-        <p:spPr>
-          <a:xfrm>
-            <a:off x="8125968" y="1874520"/>
-            <a:ext cx="3514344" cy="777240"/>
-          </a:xfrm>
-          <a:prstGeom prst="rect">
-            <a:avLst/>
-          </a:prstGeom>
-          <a:noFill/>
-          <a:ln/>
-        </p:spPr>
-        <p:txBody>
-          <a:bodyPr wrap="square" lIns="0" tIns="0" rIns="0" bIns="0" rtlCol="0" anchor="ctr"/>
-          <a:lstStyle/>
-          <a:p>
-            <a:pPr indent="0" marL="0">
-              <a:buNone/>
-            </a:pPr>
-            <a:r>
-              <a:rPr lang="en-US" sz="3400" b="1" dirty="0">
-                <a:solidFill>
-                  <a:srgbClr val="1A1A2E"/>
-                </a:solidFill>
-                <a:latin typeface="Century Gothic" pitchFamily="34" charset="0"/>
-                <a:ea typeface="Century Gothic" pitchFamily="34" charset="-122"/>
-                <a:cs typeface="Century Gothic" pitchFamily="34" charset="-120"/>
-              </a:rPr>
-              <a:t>MANTENER</a:t>
-            </a:r>
-            <a:endParaRPr lang="en-US" sz="3400" dirty="0"/>
-          </a:p>
-        </p:txBody>
-      </p:sp>
-      <p:sp>
-        <p:nvSpPr>
-          <p:cNvPr id="17" name="Text 13"/>
-          <p:cNvSpPr txBox="1"/>
-          <p:nvPr/>
-        </p:nvSpPr>
-        <p:spPr>
-          <a:xfrm>
-            <a:off x="8125968" y="2651760"/>
-            <a:ext cx="3514344" cy="457200"/>
-          </a:xfrm>
-          <a:prstGeom prst="rect">
-            <a:avLst/>
-          </a:prstGeom>
-          <a:noFill/>
-          <a:ln/>
-        </p:spPr>
-        <p:txBody>
-          <a:bodyPr wrap="square" lIns="0" tIns="0" rIns="0" bIns="0" rtlCol="0" anchor="t"/>
-          <a:lstStyle/>
-          <a:p>
-            <a:pPr indent="0" marL="0">
-              <a:buNone/>
-            </a:pPr>
-            <a:r>
-              <a:rPr lang="en-US" sz="1400" b="1" dirty="0">
-                <a:solidFill>
-                  <a:srgbClr val="AA0582"/>
-                </a:solidFill>
-                <a:latin typeface="Century Gothic" pitchFamily="34" charset="0"/>
-                <a:ea typeface="Century Gothic" pitchFamily="34" charset="-122"/>
-                <a:cs typeface="Century Gothic" pitchFamily="34" charset="-120"/>
-              </a:rPr>
-              <a:t>Algo que ya hago bien</a:t>
-            </a:r>
-            <a:endParaRPr lang="en-US" sz="1400" dirty="0"/>
-          </a:p>
-        </p:txBody>
-      </p:sp>
-      <p:sp>
-        <p:nvSpPr>
-          <p:cNvPr id="18" name="Text 14"/>
-          <p:cNvSpPr txBox="1"/>
-          <p:nvPr/>
-        </p:nvSpPr>
-        <p:spPr>
-          <a:xfrm>
-            <a:off x="8125968" y="3200400"/>
-            <a:ext cx="3422904" cy="2103120"/>
-          </a:xfrm>
-          <a:prstGeom prst="rect">
-            <a:avLst/>
-          </a:prstGeom>
-          <a:noFill/>
-          <a:ln/>
-        </p:spPr>
-        <p:txBody>
-          <a:bodyPr wrap="square" lIns="0" tIns="0" rIns="0" bIns="0" rtlCol="0" anchor="t"/>
-          <a:lstStyle/>
-          <a:p>
-            <a:pPr marL="213360" indent="-213360">
-              <a:spcAft>
-                <a:spcPts val="720"/>
-              </a:spcAft>
-              <a:buSzPct val="100000"/>
-              <a:buChar char="•"/>
-            </a:pPr>
-            <a:r>
-              <a:rPr lang="en-US" sz="1200" dirty="0">
-                <a:solidFill>
-                  <a:srgbClr val="1A1A2E"/>
-                </a:solidFill>
-                <a:latin typeface="Century Gothic" pitchFamily="34" charset="0"/>
-                <a:ea typeface="Century Gothic" pitchFamily="34" charset="-122"/>
-                <a:cs typeface="Century Gothic" pitchFamily="34" charset="-120"/>
-              </a:rPr>
-              <a:t>Lo que sí funciona y voy a sostener.</a:t>
-            </a:r>
-            <a:endParaRPr lang="en-US" sz="1200" dirty="0"/>
-          </a:p>
-          <a:p>
-            <a:pPr marL="213360" indent="-213360">
-              <a:spcAft>
-                <a:spcPts val="720"/>
-              </a:spcAft>
-              <a:buSzPct val="100000"/>
-              <a:buChar char="•"/>
-            </a:pPr>
-            <a:r>
-              <a:rPr lang="en-US" sz="1200" dirty="0">
-                <a:solidFill>
-                  <a:srgbClr val="1A1A2E"/>
-                </a:solidFill>
-                <a:latin typeface="Century Gothic" pitchFamily="34" charset="0"/>
-                <a:ea typeface="Century Gothic" pitchFamily="34" charset="-122"/>
-                <a:cs typeface="Century Gothic" pitchFamily="34" charset="-120"/>
-              </a:rPr>
-              <a:t>Ejemplo: ser claro con el estándar de seguridad.</a:t>
-            </a:r>
-            <a:endParaRPr lang="en-US" sz="1200" dirty="0"/>
-          </a:p>
-        </p:txBody>
-      </p:sp>
-      <p:sp>
-        <p:nvSpPr>
-          <p:cNvPr id="19" name="Text 15"/>
-          <p:cNvSpPr txBox="1"/>
-          <p:nvPr/>
-        </p:nvSpPr>
-        <p:spPr>
-          <a:xfrm>
-            <a:off x="548640" y="5897880"/>
-            <a:ext cx="11064240" cy="411480"/>
-          </a:xfrm>
-          <a:prstGeom prst="rect">
-            <a:avLst/>
-          </a:prstGeom>
-          <a:noFill/>
-          <a:ln/>
-        </p:spPr>
-        <p:txBody>
-          <a:bodyPr wrap="square" lIns="0" tIns="0" rIns="0" bIns="0" rtlCol="0" anchor="ctr"/>
-          <a:lstStyle/>
-          <a:p>
-            <a:pPr indent="0" marL="0">
-              <a:buNone/>
-            </a:pPr>
-            <a:r>
-              <a:rPr lang="en-US" sz="1300" b="1" dirty="0">
-                <a:solidFill>
-                  <a:srgbClr val="FA4642"/>
-                </a:solidFill>
-                <a:latin typeface="Century Gothic" pitchFamily="34" charset="0"/>
-                <a:ea typeface="Century Gothic" pitchFamily="34" charset="-122"/>
-                <a:cs typeface="Century Gothic" pitchFamily="34" charset="-120"/>
-              </a:rPr>
-              <a:t>Una persona, una conversación: en los próximos 7 días tendré una conversación distinta con ___ sobre ___.</a:t>
-            </a:r>
-            <a:endParaRPr lang="en-US" sz="1300" dirty="0"/>
           </a:p>
         </p:txBody>
       </p:sp>
@@ -38890,7 +38952,7 @@
                 <a:ea typeface="Century Gothic" pitchFamily="34" charset="-122"/>
                 <a:cs typeface="Century Gothic" pitchFamily="34" charset="-120"/>
               </a:rPr>
-              <a:t>12 · EXPERIMENTO DE LIDERAZGO A 30 DÍAS</a:t>
+              <a:t>12 · COMPROMISO</a:t>
             </a:r>
             <a:endParaRPr lang="en-US" sz="1000" dirty="0"/>
           </a:p>
@@ -38929,7 +38991,7 @@
                 <a:ea typeface="Century Gothic" pitchFamily="34" charset="-122"/>
                 <a:cs typeface="Century Gothic" pitchFamily="34" charset="-120"/>
               </a:rPr>
-              <a:t>Una persona que me cuesta leer. Treinta días</a:t>
+              <a:t>Una decisión, no una intención</a:t>
             </a:r>
             <a:endParaRPr lang="en-US" sz="2400" dirty="0"/>
           </a:p>
@@ -39006,33 +39068,10 @@
         </p:nvSpPr>
         <p:spPr>
           <a:xfrm>
-            <a:off x="1655064" y="1965960"/>
-            <a:ext cx="8851392" cy="0"/>
-          </a:xfrm>
-          <a:prstGeom prst="line">
-            <a:avLst/>
-          </a:prstGeom>
-          <a:noFill/>
-          <a:ln w="12700">
-            <a:solidFill>
-              <a:srgbClr val="D6D8EA"/>
-            </a:solidFill>
-            <a:prstDash val="solid"/>
-          </a:ln>
-        </p:spPr>
-      </p:sp>
-      <p:sp>
-        <p:nvSpPr>
-          <p:cNvPr id="8" name="Shape 4"/>
-          <p:cNvSpPr/>
-          <p:nvPr/>
-        </p:nvSpPr>
-        <p:spPr>
-          <a:xfrm>
-            <a:off x="1472184" y="1783080"/>
-            <a:ext cx="365760" cy="365760"/>
-          </a:xfrm>
-          <a:prstGeom prst="ellipse">
+            <a:off x="548640" y="1645920"/>
+            <a:ext cx="3514344" cy="109728"/>
+          </a:xfrm>
+          <a:prstGeom prst="rect">
             <a:avLst/>
           </a:prstGeom>
           <a:solidFill>
@@ -39043,40 +39082,79 @@
       </p:sp>
       <p:sp>
         <p:nvSpPr>
+          <p:cNvPr id="8" name="Text 4"/>
+          <p:cNvSpPr txBox="1"/>
+          <p:nvPr/>
+        </p:nvSpPr>
+        <p:spPr>
+          <a:xfrm>
+            <a:off x="548640" y="1874520"/>
+            <a:ext cx="3514344" cy="777240"/>
+          </a:xfrm>
+          <a:prstGeom prst="rect">
+            <a:avLst/>
+          </a:prstGeom>
+          <a:noFill/>
+          <a:ln/>
+        </p:spPr>
+        <p:txBody>
+          <a:bodyPr wrap="square" lIns="0" tIns="0" rIns="0" bIns="0" rtlCol="0" anchor="ctr"/>
+          <a:lstStyle/>
+          <a:p>
+            <a:pPr indent="0" marL="0">
+              <a:buNone/>
+            </a:pPr>
+            <a:r>
+              <a:rPr lang="en-US" sz="3400" b="1" dirty="0">
+                <a:solidFill>
+                  <a:srgbClr val="1A1A2E"/>
+                </a:solidFill>
+                <a:latin typeface="Century Gothic" pitchFamily="34" charset="0"/>
+                <a:ea typeface="Century Gothic" pitchFamily="34" charset="-122"/>
+                <a:cs typeface="Century Gothic" pitchFamily="34" charset="-120"/>
+              </a:rPr>
+              <a:t>DEJAR</a:t>
+            </a:r>
+            <a:endParaRPr lang="en-US" sz="3400" dirty="0"/>
+          </a:p>
+        </p:txBody>
+      </p:sp>
+      <p:sp>
+        <p:nvSpPr>
           <p:cNvPr id="9" name="Text 5"/>
           <p:cNvSpPr txBox="1"/>
           <p:nvPr/>
         </p:nvSpPr>
         <p:spPr>
           <a:xfrm>
-            <a:off x="1472184" y="1783080"/>
-            <a:ext cx="365760" cy="365760"/>
-          </a:xfrm>
-          <a:prstGeom prst="rect">
-            <a:avLst/>
-          </a:prstGeom>
-          <a:noFill/>
-          <a:ln/>
-        </p:spPr>
-        <p:txBody>
-          <a:bodyPr wrap="square" lIns="0" tIns="0" rIns="0" bIns="0" rtlCol="0" anchor="ctr"/>
-          <a:lstStyle/>
-          <a:p>
-            <a:pPr algn="ctr" indent="0" marL="0">
-              <a:buNone/>
-            </a:pPr>
-            <a:r>
-              <a:rPr lang="en-US" sz="1000" b="1" dirty="0">
-                <a:solidFill>
-                  <a:srgbClr val="FFFFFF"/>
-                </a:solidFill>
-                <a:latin typeface="Century Gothic" pitchFamily="34" charset="0"/>
-                <a:ea typeface="Century Gothic" pitchFamily="34" charset="-122"/>
-                <a:cs typeface="Century Gothic" pitchFamily="34" charset="-120"/>
-              </a:rPr>
-              <a:t>1</a:t>
-            </a:r>
-            <a:endParaRPr lang="en-US" sz="1000" dirty="0"/>
+            <a:off x="548640" y="2651760"/>
+            <a:ext cx="3514344" cy="457200"/>
+          </a:xfrm>
+          <a:prstGeom prst="rect">
+            <a:avLst/>
+          </a:prstGeom>
+          <a:noFill/>
+          <a:ln/>
+        </p:spPr>
+        <p:txBody>
+          <a:bodyPr wrap="square" lIns="0" tIns="0" rIns="0" bIns="0" rtlCol="0" anchor="t"/>
+          <a:lstStyle/>
+          <a:p>
+            <a:pPr indent="0" marL="0">
+              <a:buNone/>
+            </a:pPr>
+            <a:r>
+              <a:rPr lang="en-US" sz="1400" b="1" dirty="0">
+                <a:solidFill>
+                  <a:srgbClr val="FF8C47"/>
+                </a:solidFill>
+                <a:latin typeface="Century Gothic" pitchFamily="34" charset="0"/>
+                <a:ea typeface="Century Gothic" pitchFamily="34" charset="-122"/>
+                <a:cs typeface="Century Gothic" pitchFamily="34" charset="-120"/>
+              </a:rPr>
+              <a:t>Algo que dejaré de hacer</a:t>
+            </a:r>
+            <a:endParaRPr lang="en-US" sz="1400" dirty="0"/>
           </a:p>
         </p:txBody>
       </p:sp>
@@ -39088,8 +39166,8 @@
         </p:nvSpPr>
         <p:spPr>
           <a:xfrm>
-            <a:off x="594360" y="2240280"/>
-            <a:ext cx="2121408" cy="457200"/>
+            <a:off x="548640" y="3200400"/>
+            <a:ext cx="3422904" cy="2103120"/>
           </a:xfrm>
           <a:prstGeom prst="rect">
             <a:avLst/>
@@ -39101,11 +39179,15 @@
           <a:bodyPr wrap="square" lIns="0" tIns="0" rIns="0" bIns="0" rtlCol="0" anchor="t"/>
           <a:lstStyle/>
           <a:p>
-            <a:pPr algn="ctr" indent="0" marL="0">
-              <a:buNone/>
-            </a:pPr>
-            <a:r>
-              <a:rPr lang="en-US" sz="1000" b="1" dirty="0">
+            <a:pPr marL="213360" indent="-213360">
+              <a:spcAft>
+                <a:spcPts val="720"/>
+              </a:spcAft>
+              <a:buSzPct val="100000"/>
+              <a:buChar char="•"/>
+            </a:pPr>
+            <a:r>
+              <a:rPr lang="en-US" sz="1200" dirty="0">
                 <a:solidFill>
                   <a:srgbClr val="1A1A2E"/>
                 </a:solidFill>
@@ -39113,63 +39195,45 @@
                 <a:ea typeface="Century Gothic" pitchFamily="34" charset="-122"/>
                 <a:cs typeface="Century Gothic" pitchFamily="34" charset="-120"/>
               </a:rPr>
-              <a:t>Elegir a la persona</a:t>
-            </a:r>
-            <a:endParaRPr lang="en-US" sz="1000" dirty="0"/>
-          </a:p>
-        </p:txBody>
-      </p:sp>
-      <p:sp>
-        <p:nvSpPr>
-          <p:cNvPr id="11" name="Text 7"/>
-          <p:cNvSpPr txBox="1"/>
-          <p:nvPr/>
-        </p:nvSpPr>
-        <p:spPr>
-          <a:xfrm>
-            <a:off x="594360" y="2697480"/>
-            <a:ext cx="2121408" cy="274320"/>
-          </a:xfrm>
-          <a:prstGeom prst="rect">
-            <a:avLst/>
-          </a:prstGeom>
-          <a:noFill/>
-          <a:ln/>
-        </p:spPr>
-        <p:txBody>
-          <a:bodyPr wrap="square" lIns="0" tIns="0" rIns="0" bIns="0" rtlCol="0" anchor="t"/>
-          <a:lstStyle/>
-          <a:p>
-            <a:pPr algn="ctr" indent="0" marL="0">
-              <a:buNone/>
-            </a:pPr>
-            <a:r>
-              <a:rPr lang="en-US" sz="900" dirty="0">
-                <a:solidFill>
-                  <a:srgbClr val="FF8C47"/>
-                </a:solidFill>
-                <a:latin typeface="Century Gothic" pitchFamily="34" charset="0"/>
-                <a:ea typeface="Century Gothic" pitchFamily="34" charset="-122"/>
-                <a:cs typeface="Century Gothic" pitchFamily="34" charset="-120"/>
-              </a:rPr>
-              <a:t>Día 1</a:t>
-            </a:r>
-            <a:endParaRPr lang="en-US" sz="900" dirty="0"/>
-          </a:p>
-        </p:txBody>
-      </p:sp>
-      <p:sp>
-        <p:nvSpPr>
-          <p:cNvPr id="12" name="Shape 8"/>
+              <a:t>Una conducta concreta, no un rasgo.</a:t>
+            </a:r>
+            <a:endParaRPr lang="en-US" sz="1200" dirty="0"/>
+          </a:p>
+          <a:p>
+            <a:pPr marL="213360" indent="-213360">
+              <a:spcAft>
+                <a:spcPts val="720"/>
+              </a:spcAft>
+              <a:buSzPct val="100000"/>
+              <a:buChar char="•"/>
+            </a:pPr>
+            <a:r>
+              <a:rPr lang="en-US" sz="1200" dirty="0">
+                <a:solidFill>
+                  <a:srgbClr val="1A1A2E"/>
+                </a:solidFill>
+                <a:latin typeface="Century Gothic" pitchFamily="34" charset="0"/>
+                <a:ea typeface="Century Gothic" pitchFamily="34" charset="-122"/>
+                <a:cs typeface="Century Gothic" pitchFamily="34" charset="-120"/>
+              </a:rPr>
+              <a:t>Ejemplo: responder “todavía te falta piso” sin decir qué falta.</a:t>
+            </a:r>
+            <a:endParaRPr lang="en-US" sz="1200" dirty="0"/>
+          </a:p>
+        </p:txBody>
+      </p:sp>
+      <p:sp>
+        <p:nvSpPr>
+          <p:cNvPr id="11" name="Shape 7"/>
           <p:cNvSpPr/>
           <p:nvPr/>
         </p:nvSpPr>
         <p:spPr>
           <a:xfrm>
-            <a:off x="3685032" y="1783080"/>
-            <a:ext cx="365760" cy="365760"/>
-          </a:xfrm>
-          <a:prstGeom prst="ellipse">
+            <a:off x="4337304" y="1645920"/>
+            <a:ext cx="3514344" cy="109728"/>
+          </a:xfrm>
+          <a:prstGeom prst="rect">
             <a:avLst/>
           </a:prstGeom>
           <a:solidFill>
@@ -39180,14 +39244,176 @@
       </p:sp>
       <p:sp>
         <p:nvSpPr>
+          <p:cNvPr id="12" name="Text 8"/>
+          <p:cNvSpPr txBox="1"/>
+          <p:nvPr/>
+        </p:nvSpPr>
+        <p:spPr>
+          <a:xfrm>
+            <a:off x="4337304" y="1874520"/>
+            <a:ext cx="3514344" cy="777240"/>
+          </a:xfrm>
+          <a:prstGeom prst="rect">
+            <a:avLst/>
+          </a:prstGeom>
+          <a:noFill/>
+          <a:ln/>
+        </p:spPr>
+        <p:txBody>
+          <a:bodyPr wrap="square" lIns="0" tIns="0" rIns="0" bIns="0" rtlCol="0" anchor="ctr"/>
+          <a:lstStyle/>
+          <a:p>
+            <a:pPr indent="0" marL="0">
+              <a:buNone/>
+            </a:pPr>
+            <a:r>
+              <a:rPr lang="en-US" sz="3400" b="1" dirty="0">
+                <a:solidFill>
+                  <a:srgbClr val="1A1A2E"/>
+                </a:solidFill>
+                <a:latin typeface="Century Gothic" pitchFamily="34" charset="0"/>
+                <a:ea typeface="Century Gothic" pitchFamily="34" charset="-122"/>
+                <a:cs typeface="Century Gothic" pitchFamily="34" charset="-120"/>
+              </a:rPr>
+              <a:t>EMPEZAR</a:t>
+            </a:r>
+            <a:endParaRPr lang="en-US" sz="3400" dirty="0"/>
+          </a:p>
+        </p:txBody>
+      </p:sp>
+      <p:sp>
+        <p:nvSpPr>
           <p:cNvPr id="13" name="Text 9"/>
           <p:cNvSpPr txBox="1"/>
           <p:nvPr/>
         </p:nvSpPr>
         <p:spPr>
           <a:xfrm>
-            <a:off x="3685032" y="1783080"/>
-            <a:ext cx="365760" cy="365760"/>
+            <a:off x="4337304" y="2651760"/>
+            <a:ext cx="3514344" cy="457200"/>
+          </a:xfrm>
+          <a:prstGeom prst="rect">
+            <a:avLst/>
+          </a:prstGeom>
+          <a:noFill/>
+          <a:ln/>
+        </p:spPr>
+        <p:txBody>
+          <a:bodyPr wrap="square" lIns="0" tIns="0" rIns="0" bIns="0" rtlCol="0" anchor="t"/>
+          <a:lstStyle/>
+          <a:p>
+            <a:pPr indent="0" marL="0">
+              <a:buNone/>
+            </a:pPr>
+            <a:r>
+              <a:rPr lang="en-US" sz="1400" b="1" dirty="0">
+                <a:solidFill>
+                  <a:srgbClr val="FA4642"/>
+                </a:solidFill>
+                <a:latin typeface="Century Gothic" pitchFamily="34" charset="0"/>
+                <a:ea typeface="Century Gothic" pitchFamily="34" charset="-122"/>
+                <a:cs typeface="Century Gothic" pitchFamily="34" charset="-120"/>
+              </a:rPr>
+              <a:t>Algo que empezaré a hacer</a:t>
+            </a:r>
+            <a:endParaRPr lang="en-US" sz="1400" dirty="0"/>
+          </a:p>
+        </p:txBody>
+      </p:sp>
+      <p:sp>
+        <p:nvSpPr>
+          <p:cNvPr id="14" name="Text 10"/>
+          <p:cNvSpPr txBox="1"/>
+          <p:nvPr/>
+        </p:nvSpPr>
+        <p:spPr>
+          <a:xfrm>
+            <a:off x="4337304" y="3200400"/>
+            <a:ext cx="3422904" cy="2103120"/>
+          </a:xfrm>
+          <a:prstGeom prst="rect">
+            <a:avLst/>
+          </a:prstGeom>
+          <a:noFill/>
+          <a:ln/>
+        </p:spPr>
+        <p:txBody>
+          <a:bodyPr wrap="square" lIns="0" tIns="0" rIns="0" bIns="0" rtlCol="0" anchor="t"/>
+          <a:lstStyle/>
+          <a:p>
+            <a:pPr marL="213360" indent="-213360">
+              <a:spcAft>
+                <a:spcPts val="720"/>
+              </a:spcAft>
+              <a:buSzPct val="100000"/>
+              <a:buChar char="•"/>
+            </a:pPr>
+            <a:r>
+              <a:rPr lang="en-US" sz="1200" dirty="0">
+                <a:solidFill>
+                  <a:srgbClr val="1A1A2E"/>
+                </a:solidFill>
+                <a:latin typeface="Century Gothic" pitchFamily="34" charset="0"/>
+                <a:ea typeface="Century Gothic" pitchFamily="34" charset="-122"/>
+                <a:cs typeface="Century Gothic" pitchFamily="34" charset="-120"/>
+              </a:rPr>
+              <a:t>Observable por mi equipo.</a:t>
+            </a:r>
+            <a:endParaRPr lang="en-US" sz="1200" dirty="0"/>
+          </a:p>
+          <a:p>
+            <a:pPr marL="213360" indent="-213360">
+              <a:spcAft>
+                <a:spcPts val="720"/>
+              </a:spcAft>
+              <a:buSzPct val="100000"/>
+              <a:buChar char="•"/>
+            </a:pPr>
+            <a:r>
+              <a:rPr lang="en-US" sz="1200" dirty="0">
+                <a:solidFill>
+                  <a:srgbClr val="1A1A2E"/>
+                </a:solidFill>
+                <a:latin typeface="Century Gothic" pitchFamily="34" charset="0"/>
+                <a:ea typeface="Century Gothic" pitchFamily="34" charset="-122"/>
+                <a:cs typeface="Century Gothic" pitchFamily="34" charset="-120"/>
+              </a:rPr>
+              <a:t>Ejemplo: preguntar antes de concluir.</a:t>
+            </a:r>
+            <a:endParaRPr lang="en-US" sz="1200" dirty="0"/>
+          </a:p>
+        </p:txBody>
+      </p:sp>
+      <p:sp>
+        <p:nvSpPr>
+          <p:cNvPr id="15" name="Shape 11"/>
+          <p:cNvSpPr/>
+          <p:nvPr/>
+        </p:nvSpPr>
+        <p:spPr>
+          <a:xfrm>
+            <a:off x="8125968" y="1645920"/>
+            <a:ext cx="3514344" cy="109728"/>
+          </a:xfrm>
+          <a:prstGeom prst="rect">
+            <a:avLst/>
+          </a:prstGeom>
+          <a:solidFill>
+            <a:srgbClr val="AA0582"/>
+          </a:solidFill>
+          <a:ln/>
+        </p:spPr>
+      </p:sp>
+      <p:sp>
+        <p:nvSpPr>
+          <p:cNvPr id="16" name="Text 12"/>
+          <p:cNvSpPr txBox="1"/>
+          <p:nvPr/>
+        </p:nvSpPr>
+        <p:spPr>
+          <a:xfrm>
+            <a:off x="8125968" y="1874520"/>
+            <a:ext cx="3514344" cy="777240"/>
           </a:xfrm>
           <a:prstGeom prst="rect">
             <a:avLst/>
@@ -39199,34 +39425,34 @@
           <a:bodyPr wrap="square" lIns="0" tIns="0" rIns="0" bIns="0" rtlCol="0" anchor="ctr"/>
           <a:lstStyle/>
           <a:p>
-            <a:pPr algn="ctr" indent="0" marL="0">
-              <a:buNone/>
-            </a:pPr>
-            <a:r>
-              <a:rPr lang="en-US" sz="1000" b="1" dirty="0">
-                <a:solidFill>
-                  <a:srgbClr val="FFFFFF"/>
-                </a:solidFill>
-                <a:latin typeface="Century Gothic" pitchFamily="34" charset="0"/>
-                <a:ea typeface="Century Gothic" pitchFamily="34" charset="-122"/>
-                <a:cs typeface="Century Gothic" pitchFamily="34" charset="-120"/>
-              </a:rPr>
-              <a:t>2</a:t>
-            </a:r>
-            <a:endParaRPr lang="en-US" sz="1000" dirty="0"/>
-          </a:p>
-        </p:txBody>
-      </p:sp>
-      <p:sp>
-        <p:nvSpPr>
-          <p:cNvPr id="14" name="Text 10"/>
-          <p:cNvSpPr txBox="1"/>
-          <p:nvPr/>
-        </p:nvSpPr>
-        <p:spPr>
-          <a:xfrm>
-            <a:off x="2807208" y="2240280"/>
-            <a:ext cx="2121408" cy="457200"/>
+            <a:pPr indent="0" marL="0">
+              <a:buNone/>
+            </a:pPr>
+            <a:r>
+              <a:rPr lang="en-US" sz="3400" b="1" dirty="0">
+                <a:solidFill>
+                  <a:srgbClr val="1A1A2E"/>
+                </a:solidFill>
+                <a:latin typeface="Century Gothic" pitchFamily="34" charset="0"/>
+                <a:ea typeface="Century Gothic" pitchFamily="34" charset="-122"/>
+                <a:cs typeface="Century Gothic" pitchFamily="34" charset="-120"/>
+              </a:rPr>
+              <a:t>MANTENER</a:t>
+            </a:r>
+            <a:endParaRPr lang="en-US" sz="3400" dirty="0"/>
+          </a:p>
+        </p:txBody>
+      </p:sp>
+      <p:sp>
+        <p:nvSpPr>
+          <p:cNvPr id="17" name="Text 13"/>
+          <p:cNvSpPr txBox="1"/>
+          <p:nvPr/>
+        </p:nvSpPr>
+        <p:spPr>
+          <a:xfrm>
+            <a:off x="8125968" y="2651760"/>
+            <a:ext cx="3514344" cy="457200"/>
           </a:xfrm>
           <a:prstGeom prst="rect">
             <a:avLst/>
@@ -39238,11 +39464,54 @@
           <a:bodyPr wrap="square" lIns="0" tIns="0" rIns="0" bIns="0" rtlCol="0" anchor="t"/>
           <a:lstStyle/>
           <a:p>
-            <a:pPr algn="ctr" indent="0" marL="0">
-              <a:buNone/>
-            </a:pPr>
-            <a:r>
-              <a:rPr lang="en-US" sz="1000" b="1" dirty="0">
+            <a:pPr indent="0" marL="0">
+              <a:buNone/>
+            </a:pPr>
+            <a:r>
+              <a:rPr lang="en-US" sz="1400" b="1" dirty="0">
+                <a:solidFill>
+                  <a:srgbClr val="AA0582"/>
+                </a:solidFill>
+                <a:latin typeface="Century Gothic" pitchFamily="34" charset="0"/>
+                <a:ea typeface="Century Gothic" pitchFamily="34" charset="-122"/>
+                <a:cs typeface="Century Gothic" pitchFamily="34" charset="-120"/>
+              </a:rPr>
+              <a:t>Algo que ya hago bien</a:t>
+            </a:r>
+            <a:endParaRPr lang="en-US" sz="1400" dirty="0"/>
+          </a:p>
+        </p:txBody>
+      </p:sp>
+      <p:sp>
+        <p:nvSpPr>
+          <p:cNvPr id="18" name="Text 14"/>
+          <p:cNvSpPr txBox="1"/>
+          <p:nvPr/>
+        </p:nvSpPr>
+        <p:spPr>
+          <a:xfrm>
+            <a:off x="8125968" y="3200400"/>
+            <a:ext cx="3422904" cy="2103120"/>
+          </a:xfrm>
+          <a:prstGeom prst="rect">
+            <a:avLst/>
+          </a:prstGeom>
+          <a:noFill/>
+          <a:ln/>
+        </p:spPr>
+        <p:txBody>
+          <a:bodyPr wrap="square" lIns="0" tIns="0" rIns="0" bIns="0" rtlCol="0" anchor="t"/>
+          <a:lstStyle/>
+          <a:p>
+            <a:pPr marL="213360" indent="-213360">
+              <a:spcAft>
+                <a:spcPts val="720"/>
+              </a:spcAft>
+              <a:buSzPct val="100000"/>
+              <a:buChar char="•"/>
+            </a:pPr>
+            <a:r>
+              <a:rPr lang="en-US" sz="1200" dirty="0">
                 <a:solidFill>
                   <a:srgbClr val="1A1A2E"/>
                 </a:solidFill>
@@ -39250,81 +39519,43 @@
                 <a:ea typeface="Century Gothic" pitchFamily="34" charset="-122"/>
                 <a:cs typeface="Century Gothic" pitchFamily="34" charset="-120"/>
               </a:rPr>
-              <a:t>LEER: conversación para preguntar</a:t>
-            </a:r>
-            <a:endParaRPr lang="en-US" sz="1000" dirty="0"/>
-          </a:p>
-        </p:txBody>
-      </p:sp>
-      <p:sp>
-        <p:nvSpPr>
-          <p:cNvPr id="15" name="Text 11"/>
-          <p:cNvSpPr txBox="1"/>
-          <p:nvPr/>
-        </p:nvSpPr>
-        <p:spPr>
-          <a:xfrm>
-            <a:off x="2807208" y="2697480"/>
-            <a:ext cx="2121408" cy="274320"/>
-          </a:xfrm>
-          <a:prstGeom prst="rect">
-            <a:avLst/>
-          </a:prstGeom>
-          <a:noFill/>
-          <a:ln/>
-        </p:spPr>
-        <p:txBody>
-          <a:bodyPr wrap="square" lIns="0" tIns="0" rIns="0" bIns="0" rtlCol="0" anchor="t"/>
-          <a:lstStyle/>
-          <a:p>
-            <a:pPr algn="ctr" indent="0" marL="0">
-              <a:buNone/>
-            </a:pPr>
-            <a:r>
-              <a:rPr lang="en-US" sz="900" dirty="0">
-                <a:solidFill>
-                  <a:srgbClr val="FF8C47"/>
-                </a:solidFill>
-                <a:latin typeface="Century Gothic" pitchFamily="34" charset="0"/>
-                <a:ea typeface="Century Gothic" pitchFamily="34" charset="-122"/>
-                <a:cs typeface="Century Gothic" pitchFamily="34" charset="-120"/>
-              </a:rPr>
-              <a:t>Semana 1</a:t>
-            </a:r>
-            <a:endParaRPr lang="en-US" sz="900" dirty="0"/>
-          </a:p>
-        </p:txBody>
-      </p:sp>
-      <p:sp>
-        <p:nvSpPr>
-          <p:cNvPr id="16" name="Shape 12"/>
-          <p:cNvSpPr/>
-          <p:nvPr/>
-        </p:nvSpPr>
-        <p:spPr>
-          <a:xfrm>
-            <a:off x="5897880" y="1783080"/>
-            <a:ext cx="365760" cy="365760"/>
-          </a:xfrm>
-          <a:prstGeom prst="ellipse">
-            <a:avLst/>
-          </a:prstGeom>
-          <a:solidFill>
-            <a:srgbClr val="DB2259"/>
-          </a:solidFill>
-          <a:ln/>
-        </p:spPr>
-      </p:sp>
-      <p:sp>
-        <p:nvSpPr>
-          <p:cNvPr id="17" name="Text 13"/>
-          <p:cNvSpPr txBox="1"/>
-          <p:nvPr/>
-        </p:nvSpPr>
-        <p:spPr>
-          <a:xfrm>
-            <a:off x="5897880" y="1783080"/>
-            <a:ext cx="365760" cy="365760"/>
+              <a:t>Lo que sí funciona y voy a sostener.</a:t>
+            </a:r>
+            <a:endParaRPr lang="en-US" sz="1200" dirty="0"/>
+          </a:p>
+          <a:p>
+            <a:pPr marL="213360" indent="-213360">
+              <a:spcAft>
+                <a:spcPts val="720"/>
+              </a:spcAft>
+              <a:buSzPct val="100000"/>
+              <a:buChar char="•"/>
+            </a:pPr>
+            <a:r>
+              <a:rPr lang="en-US" sz="1200" dirty="0">
+                <a:solidFill>
+                  <a:srgbClr val="1A1A2E"/>
+                </a:solidFill>
+                <a:latin typeface="Century Gothic" pitchFamily="34" charset="0"/>
+                <a:ea typeface="Century Gothic" pitchFamily="34" charset="-122"/>
+                <a:cs typeface="Century Gothic" pitchFamily="34" charset="-120"/>
+              </a:rPr>
+              <a:t>Ejemplo: ser claro con el estándar de seguridad.</a:t>
+            </a:r>
+            <a:endParaRPr lang="en-US" sz="1200" dirty="0"/>
+          </a:p>
+        </p:txBody>
+      </p:sp>
+      <p:sp>
+        <p:nvSpPr>
+          <p:cNvPr id="19" name="Text 15"/>
+          <p:cNvSpPr txBox="1"/>
+          <p:nvPr/>
+        </p:nvSpPr>
+        <p:spPr>
+          <a:xfrm>
+            <a:off x="548640" y="5897880"/>
+            <a:ext cx="11064240" cy="411480"/>
           </a:xfrm>
           <a:prstGeom prst="rect">
             <a:avLst/>
@@ -39336,702 +39567,6 @@
           <a:bodyPr wrap="square" lIns="0" tIns="0" rIns="0" bIns="0" rtlCol="0" anchor="ctr"/>
           <a:lstStyle/>
           <a:p>
-            <a:pPr algn="ctr" indent="0" marL="0">
-              <a:buNone/>
-            </a:pPr>
-            <a:r>
-              <a:rPr lang="en-US" sz="1000" b="1" dirty="0">
-                <a:solidFill>
-                  <a:srgbClr val="FFFFFF"/>
-                </a:solidFill>
-                <a:latin typeface="Century Gothic" pitchFamily="34" charset="0"/>
-                <a:ea typeface="Century Gothic" pitchFamily="34" charset="-122"/>
-                <a:cs typeface="Century Gothic" pitchFamily="34" charset="-120"/>
-              </a:rPr>
-              <a:t>3</a:t>
-            </a:r>
-            <a:endParaRPr lang="en-US" sz="1000" dirty="0"/>
-          </a:p>
-        </p:txBody>
-      </p:sp>
-      <p:sp>
-        <p:nvSpPr>
-          <p:cNvPr id="18" name="Text 14"/>
-          <p:cNvSpPr txBox="1"/>
-          <p:nvPr/>
-        </p:nvSpPr>
-        <p:spPr>
-          <a:xfrm>
-            <a:off x="5020056" y="2240280"/>
-            <a:ext cx="2121408" cy="457200"/>
-          </a:xfrm>
-          <a:prstGeom prst="rect">
-            <a:avLst/>
-          </a:prstGeom>
-          <a:noFill/>
-          <a:ln/>
-        </p:spPr>
-        <p:txBody>
-          <a:bodyPr wrap="square" lIns="0" tIns="0" rIns="0" bIns="0" rtlCol="0" anchor="t"/>
-          <a:lstStyle/>
-          <a:p>
-            <a:pPr algn="ctr" indent="0" marL="0">
-              <a:buNone/>
-            </a:pPr>
-            <a:r>
-              <a:rPr lang="en-US" sz="1000" b="1" dirty="0">
-                <a:solidFill>
-                  <a:srgbClr val="1A1A2E"/>
-                </a:solidFill>
-                <a:latin typeface="Century Gothic" pitchFamily="34" charset="0"/>
-                <a:ea typeface="Century Gothic" pitchFamily="34" charset="-122"/>
-                <a:cs typeface="Century Gothic" pitchFamily="34" charset="-120"/>
-              </a:rPr>
-              <a:t>ADAPTAR: una o dos variables</a:t>
-            </a:r>
-            <a:endParaRPr lang="en-US" sz="1000" dirty="0"/>
-          </a:p>
-        </p:txBody>
-      </p:sp>
-      <p:sp>
-        <p:nvSpPr>
-          <p:cNvPr id="19" name="Text 15"/>
-          <p:cNvSpPr txBox="1"/>
-          <p:nvPr/>
-        </p:nvSpPr>
-        <p:spPr>
-          <a:xfrm>
-            <a:off x="5020056" y="2697480"/>
-            <a:ext cx="2121408" cy="274320"/>
-          </a:xfrm>
-          <a:prstGeom prst="rect">
-            <a:avLst/>
-          </a:prstGeom>
-          <a:noFill/>
-          <a:ln/>
-        </p:spPr>
-        <p:txBody>
-          <a:bodyPr wrap="square" lIns="0" tIns="0" rIns="0" bIns="0" rtlCol="0" anchor="t"/>
-          <a:lstStyle/>
-          <a:p>
-            <a:pPr algn="ctr" indent="0" marL="0">
-              <a:buNone/>
-            </a:pPr>
-            <a:r>
-              <a:rPr lang="en-US" sz="900" dirty="0">
-                <a:solidFill>
-                  <a:srgbClr val="FF8C47"/>
-                </a:solidFill>
-                <a:latin typeface="Century Gothic" pitchFamily="34" charset="0"/>
-                <a:ea typeface="Century Gothic" pitchFamily="34" charset="-122"/>
-                <a:cs typeface="Century Gothic" pitchFamily="34" charset="-120"/>
-              </a:rPr>
-              <a:t>Semanas 2–3</a:t>
-            </a:r>
-            <a:endParaRPr lang="en-US" sz="900" dirty="0"/>
-          </a:p>
-        </p:txBody>
-      </p:sp>
-      <p:sp>
-        <p:nvSpPr>
-          <p:cNvPr id="20" name="Shape 16"/>
-          <p:cNvSpPr/>
-          <p:nvPr/>
-        </p:nvSpPr>
-        <p:spPr>
-          <a:xfrm>
-            <a:off x="8110728" y="1783080"/>
-            <a:ext cx="365760" cy="365760"/>
-          </a:xfrm>
-          <a:prstGeom prst="ellipse">
-            <a:avLst/>
-          </a:prstGeom>
-          <a:solidFill>
-            <a:srgbClr val="C8136C"/>
-          </a:solidFill>
-          <a:ln/>
-        </p:spPr>
-      </p:sp>
-      <p:sp>
-        <p:nvSpPr>
-          <p:cNvPr id="21" name="Text 17"/>
-          <p:cNvSpPr txBox="1"/>
-          <p:nvPr/>
-        </p:nvSpPr>
-        <p:spPr>
-          <a:xfrm>
-            <a:off x="8110728" y="1783080"/>
-            <a:ext cx="365760" cy="365760"/>
-          </a:xfrm>
-          <a:prstGeom prst="rect">
-            <a:avLst/>
-          </a:prstGeom>
-          <a:noFill/>
-          <a:ln/>
-        </p:spPr>
-        <p:txBody>
-          <a:bodyPr wrap="square" lIns="0" tIns="0" rIns="0" bIns="0" rtlCol="0" anchor="ctr"/>
-          <a:lstStyle/>
-          <a:p>
-            <a:pPr algn="ctr" indent="0" marL="0">
-              <a:buNone/>
-            </a:pPr>
-            <a:r>
-              <a:rPr lang="en-US" sz="1000" b="1" dirty="0">
-                <a:solidFill>
-                  <a:srgbClr val="FFFFFF"/>
-                </a:solidFill>
-                <a:latin typeface="Century Gothic" pitchFamily="34" charset="0"/>
-                <a:ea typeface="Century Gothic" pitchFamily="34" charset="-122"/>
-                <a:cs typeface="Century Gothic" pitchFamily="34" charset="-120"/>
-              </a:rPr>
-              <a:t>4</a:t>
-            </a:r>
-            <a:endParaRPr lang="en-US" sz="1000" dirty="0"/>
-          </a:p>
-        </p:txBody>
-      </p:sp>
-      <p:sp>
-        <p:nvSpPr>
-          <p:cNvPr id="22" name="Text 18"/>
-          <p:cNvSpPr txBox="1"/>
-          <p:nvPr/>
-        </p:nvSpPr>
-        <p:spPr>
-          <a:xfrm>
-            <a:off x="7232904" y="2240280"/>
-            <a:ext cx="2121408" cy="457200"/>
-          </a:xfrm>
-          <a:prstGeom prst="rect">
-            <a:avLst/>
-          </a:prstGeom>
-          <a:noFill/>
-          <a:ln/>
-        </p:spPr>
-        <p:txBody>
-          <a:bodyPr wrap="square" lIns="0" tIns="0" rIns="0" bIns="0" rtlCol="0" anchor="t"/>
-          <a:lstStyle/>
-          <a:p>
-            <a:pPr algn="ctr" indent="0" marL="0">
-              <a:buNone/>
-            </a:pPr>
-            <a:r>
-              <a:rPr lang="en-US" sz="1000" b="1" dirty="0">
-                <a:solidFill>
-                  <a:srgbClr val="1A1A2E"/>
-                </a:solidFill>
-                <a:latin typeface="Century Gothic" pitchFamily="34" charset="0"/>
-                <a:ea typeface="Century Gothic" pitchFamily="34" charset="-122"/>
-                <a:cs typeface="Century Gothic" pitchFamily="34" charset="-120"/>
-              </a:rPr>
-              <a:t>ALINEAR: resultado y estándar</a:t>
-            </a:r>
-            <a:endParaRPr lang="en-US" sz="1000" dirty="0"/>
-          </a:p>
-        </p:txBody>
-      </p:sp>
-      <p:sp>
-        <p:nvSpPr>
-          <p:cNvPr id="23" name="Text 19"/>
-          <p:cNvSpPr txBox="1"/>
-          <p:nvPr/>
-        </p:nvSpPr>
-        <p:spPr>
-          <a:xfrm>
-            <a:off x="7232904" y="2697480"/>
-            <a:ext cx="2121408" cy="274320"/>
-          </a:xfrm>
-          <a:prstGeom prst="rect">
-            <a:avLst/>
-          </a:prstGeom>
-          <a:noFill/>
-          <a:ln/>
-        </p:spPr>
-        <p:txBody>
-          <a:bodyPr wrap="square" lIns="0" tIns="0" rIns="0" bIns="0" rtlCol="0" anchor="t"/>
-          <a:lstStyle/>
-          <a:p>
-            <a:pPr algn="ctr" indent="0" marL="0">
-              <a:buNone/>
-            </a:pPr>
-            <a:r>
-              <a:rPr lang="en-US" sz="900" dirty="0">
-                <a:solidFill>
-                  <a:srgbClr val="FF8C47"/>
-                </a:solidFill>
-                <a:latin typeface="Century Gothic" pitchFamily="34" charset="0"/>
-                <a:ea typeface="Century Gothic" pitchFamily="34" charset="-122"/>
-                <a:cs typeface="Century Gothic" pitchFamily="34" charset="-120"/>
-              </a:rPr>
-              <a:t>Semana 4</a:t>
-            </a:r>
-            <a:endParaRPr lang="en-US" sz="900" dirty="0"/>
-          </a:p>
-        </p:txBody>
-      </p:sp>
-      <p:sp>
-        <p:nvSpPr>
-          <p:cNvPr id="24" name="Shape 20"/>
-          <p:cNvSpPr/>
-          <p:nvPr/>
-        </p:nvSpPr>
-        <p:spPr>
-          <a:xfrm>
-            <a:off x="10323576" y="1783080"/>
-            <a:ext cx="365760" cy="365760"/>
-          </a:xfrm>
-          <a:prstGeom prst="ellipse">
-            <a:avLst/>
-          </a:prstGeom>
-          <a:solidFill>
-            <a:srgbClr val="5B2A86"/>
-          </a:solidFill>
-          <a:ln/>
-        </p:spPr>
-      </p:sp>
-      <p:sp>
-        <p:nvSpPr>
-          <p:cNvPr id="25" name="Text 21"/>
-          <p:cNvSpPr txBox="1"/>
-          <p:nvPr/>
-        </p:nvSpPr>
-        <p:spPr>
-          <a:xfrm>
-            <a:off x="10323576" y="1783080"/>
-            <a:ext cx="365760" cy="365760"/>
-          </a:xfrm>
-          <a:prstGeom prst="rect">
-            <a:avLst/>
-          </a:prstGeom>
-          <a:noFill/>
-          <a:ln/>
-        </p:spPr>
-        <p:txBody>
-          <a:bodyPr wrap="square" lIns="0" tIns="0" rIns="0" bIns="0" rtlCol="0" anchor="ctr"/>
-          <a:lstStyle/>
-          <a:p>
-            <a:pPr algn="ctr" indent="0" marL="0">
-              <a:buNone/>
-            </a:pPr>
-            <a:r>
-              <a:rPr lang="en-US" sz="1000" b="1" dirty="0">
-                <a:solidFill>
-                  <a:srgbClr val="FFFFFF"/>
-                </a:solidFill>
-                <a:latin typeface="Century Gothic" pitchFamily="34" charset="0"/>
-                <a:ea typeface="Century Gothic" pitchFamily="34" charset="-122"/>
-                <a:cs typeface="Century Gothic" pitchFamily="34" charset="-120"/>
-              </a:rPr>
-              <a:t>5</a:t>
-            </a:r>
-            <a:endParaRPr lang="en-US" sz="1000" dirty="0"/>
-          </a:p>
-        </p:txBody>
-      </p:sp>
-      <p:sp>
-        <p:nvSpPr>
-          <p:cNvPr id="26" name="Text 22"/>
-          <p:cNvSpPr txBox="1"/>
-          <p:nvPr/>
-        </p:nvSpPr>
-        <p:spPr>
-          <a:xfrm>
-            <a:off x="9445752" y="2240280"/>
-            <a:ext cx="2121408" cy="457200"/>
-          </a:xfrm>
-          <a:prstGeom prst="rect">
-            <a:avLst/>
-          </a:prstGeom>
-          <a:noFill/>
-          <a:ln/>
-        </p:spPr>
-        <p:txBody>
-          <a:bodyPr wrap="square" lIns="0" tIns="0" rIns="0" bIns="0" rtlCol="0" anchor="t"/>
-          <a:lstStyle/>
-          <a:p>
-            <a:pPr algn="ctr" indent="0" marL="0">
-              <a:buNone/>
-            </a:pPr>
-            <a:r>
-              <a:rPr lang="en-US" sz="1000" b="1" dirty="0">
-                <a:solidFill>
-                  <a:srgbClr val="1A1A2E"/>
-                </a:solidFill>
-                <a:latin typeface="Century Gothic" pitchFamily="34" charset="0"/>
-                <a:ea typeface="Century Gothic" pitchFamily="34" charset="-122"/>
-                <a:cs typeface="Century Gothic" pitchFamily="34" charset="-120"/>
-              </a:rPr>
-              <a:t>Compartir aprendizajes</a:t>
-            </a:r>
-            <a:endParaRPr lang="en-US" sz="1000" dirty="0"/>
-          </a:p>
-        </p:txBody>
-      </p:sp>
-      <p:sp>
-        <p:nvSpPr>
-          <p:cNvPr id="27" name="Text 23"/>
-          <p:cNvSpPr txBox="1"/>
-          <p:nvPr/>
-        </p:nvSpPr>
-        <p:spPr>
-          <a:xfrm>
-            <a:off x="9445752" y="2697480"/>
-            <a:ext cx="2121408" cy="274320"/>
-          </a:xfrm>
-          <a:prstGeom prst="rect">
-            <a:avLst/>
-          </a:prstGeom>
-          <a:noFill/>
-          <a:ln/>
-        </p:spPr>
-        <p:txBody>
-          <a:bodyPr wrap="square" lIns="0" tIns="0" rIns="0" bIns="0" rtlCol="0" anchor="t"/>
-          <a:lstStyle/>
-          <a:p>
-            <a:pPr algn="ctr" indent="0" marL="0">
-              <a:buNone/>
-            </a:pPr>
-            <a:r>
-              <a:rPr lang="en-US" sz="900" dirty="0">
-                <a:solidFill>
-                  <a:srgbClr val="FF8C47"/>
-                </a:solidFill>
-                <a:latin typeface="Century Gothic" pitchFamily="34" charset="0"/>
-                <a:ea typeface="Century Gothic" pitchFamily="34" charset="-122"/>
-                <a:cs typeface="Century Gothic" pitchFamily="34" charset="-120"/>
-              </a:rPr>
-              <a:t>Día 35–45</a:t>
-            </a:r>
-            <a:endParaRPr lang="en-US" sz="900" dirty="0"/>
-          </a:p>
-        </p:txBody>
-      </p:sp>
-      <p:sp>
-        <p:nvSpPr>
-          <p:cNvPr id="28" name="Shape 24"/>
-          <p:cNvSpPr/>
-          <p:nvPr/>
-        </p:nvSpPr>
-        <p:spPr>
-          <a:xfrm>
-            <a:off x="548640" y="3749040"/>
-            <a:ext cx="2103120" cy="1371600"/>
-          </a:xfrm>
-          <a:prstGeom prst="roundRect">
-            <a:avLst>
-              <a:gd name="adj" fmla="val 4000"/>
-            </a:avLst>
-          </a:prstGeom>
-          <a:solidFill>
-            <a:srgbClr val="F4F5F9"/>
-          </a:solidFill>
-          <a:ln/>
-        </p:spPr>
-      </p:sp>
-      <p:sp>
-        <p:nvSpPr>
-          <p:cNvPr id="29" name="Text 25"/>
-          <p:cNvSpPr txBox="1"/>
-          <p:nvPr/>
-        </p:nvSpPr>
-        <p:spPr>
-          <a:xfrm>
-            <a:off x="685800" y="3886200"/>
-            <a:ext cx="1828800" cy="731520"/>
-          </a:xfrm>
-          <a:prstGeom prst="rect">
-            <a:avLst/>
-          </a:prstGeom>
-          <a:noFill/>
-          <a:ln/>
-        </p:spPr>
-        <p:txBody>
-          <a:bodyPr wrap="square" lIns="0" tIns="0" rIns="0" bIns="0" rtlCol="0" anchor="t"/>
-          <a:lstStyle/>
-          <a:p>
-            <a:pPr indent="0" marL="0">
-              <a:buNone/>
-            </a:pPr>
-            <a:r>
-              <a:rPr lang="en-US" sz="1400" b="1" dirty="0">
-                <a:solidFill>
-                  <a:srgbClr val="1A1A2E"/>
-                </a:solidFill>
-                <a:latin typeface="Century Gothic" pitchFamily="34" charset="0"/>
-                <a:ea typeface="Century Gothic" pitchFamily="34" charset="-122"/>
-                <a:cs typeface="Century Gothic" pitchFamily="34" charset="-120"/>
-              </a:rPr>
-              <a:t>Lo que supuse</a:t>
-            </a:r>
-            <a:endParaRPr lang="en-US" sz="1400" dirty="0"/>
-          </a:p>
-        </p:txBody>
-      </p:sp>
-      <p:sp>
-        <p:nvSpPr>
-          <p:cNvPr id="30" name="Shape 26"/>
-          <p:cNvSpPr/>
-          <p:nvPr/>
-        </p:nvSpPr>
-        <p:spPr>
-          <a:xfrm>
-            <a:off x="2779776" y="3749040"/>
-            <a:ext cx="2103120" cy="1371600"/>
-          </a:xfrm>
-          <a:prstGeom prst="roundRect">
-            <a:avLst>
-              <a:gd name="adj" fmla="val 4000"/>
-            </a:avLst>
-          </a:prstGeom>
-          <a:solidFill>
-            <a:srgbClr val="F4F5F9"/>
-          </a:solidFill>
-          <a:ln/>
-        </p:spPr>
-      </p:sp>
-      <p:sp>
-        <p:nvSpPr>
-          <p:cNvPr id="31" name="Text 27"/>
-          <p:cNvSpPr txBox="1"/>
-          <p:nvPr/>
-        </p:nvSpPr>
-        <p:spPr>
-          <a:xfrm>
-            <a:off x="2916936" y="3886200"/>
-            <a:ext cx="1828800" cy="731520"/>
-          </a:xfrm>
-          <a:prstGeom prst="rect">
-            <a:avLst/>
-          </a:prstGeom>
-          <a:noFill/>
-          <a:ln/>
-        </p:spPr>
-        <p:txBody>
-          <a:bodyPr wrap="square" lIns="0" tIns="0" rIns="0" bIns="0" rtlCol="0" anchor="t"/>
-          <a:lstStyle/>
-          <a:p>
-            <a:pPr indent="0" marL="0">
-              <a:buNone/>
-            </a:pPr>
-            <a:r>
-              <a:rPr lang="en-US" sz="1400" b="1" dirty="0">
-                <a:solidFill>
-                  <a:srgbClr val="1A1A2E"/>
-                </a:solidFill>
-                <a:latin typeface="Century Gothic" pitchFamily="34" charset="0"/>
-                <a:ea typeface="Century Gothic" pitchFamily="34" charset="-122"/>
-                <a:cs typeface="Century Gothic" pitchFamily="34" charset="-120"/>
-              </a:rPr>
-              <a:t>Lo que pregunté</a:t>
-            </a:r>
-            <a:endParaRPr lang="en-US" sz="1400" dirty="0"/>
-          </a:p>
-        </p:txBody>
-      </p:sp>
-      <p:sp>
-        <p:nvSpPr>
-          <p:cNvPr id="32" name="Shape 28"/>
-          <p:cNvSpPr/>
-          <p:nvPr/>
-        </p:nvSpPr>
-        <p:spPr>
-          <a:xfrm>
-            <a:off x="5010912" y="3749040"/>
-            <a:ext cx="2103120" cy="1371600"/>
-          </a:xfrm>
-          <a:prstGeom prst="roundRect">
-            <a:avLst>
-              <a:gd name="adj" fmla="val 4000"/>
-            </a:avLst>
-          </a:prstGeom>
-          <a:solidFill>
-            <a:srgbClr val="F4F5F9"/>
-          </a:solidFill>
-          <a:ln/>
-        </p:spPr>
-      </p:sp>
-      <p:sp>
-        <p:nvSpPr>
-          <p:cNvPr id="33" name="Text 29"/>
-          <p:cNvSpPr txBox="1"/>
-          <p:nvPr/>
-        </p:nvSpPr>
-        <p:spPr>
-          <a:xfrm>
-            <a:off x="5148072" y="3886200"/>
-            <a:ext cx="1828800" cy="731520"/>
-          </a:xfrm>
-          <a:prstGeom prst="rect">
-            <a:avLst/>
-          </a:prstGeom>
-          <a:noFill/>
-          <a:ln/>
-        </p:spPr>
-        <p:txBody>
-          <a:bodyPr wrap="square" lIns="0" tIns="0" rIns="0" bIns="0" rtlCol="0" anchor="t"/>
-          <a:lstStyle/>
-          <a:p>
-            <a:pPr indent="0" marL="0">
-              <a:buNone/>
-            </a:pPr>
-            <a:r>
-              <a:rPr lang="en-US" sz="1400" b="1" dirty="0">
-                <a:solidFill>
-                  <a:srgbClr val="1A1A2E"/>
-                </a:solidFill>
-                <a:latin typeface="Century Gothic" pitchFamily="34" charset="0"/>
-                <a:ea typeface="Century Gothic" pitchFamily="34" charset="-122"/>
-                <a:cs typeface="Century Gothic" pitchFamily="34" charset="-120"/>
-              </a:rPr>
-              <a:t>Lo que aprendí</a:t>
-            </a:r>
-            <a:endParaRPr lang="en-US" sz="1400" dirty="0"/>
-          </a:p>
-        </p:txBody>
-      </p:sp>
-      <p:sp>
-        <p:nvSpPr>
-          <p:cNvPr id="34" name="Shape 30"/>
-          <p:cNvSpPr/>
-          <p:nvPr/>
-        </p:nvSpPr>
-        <p:spPr>
-          <a:xfrm>
-            <a:off x="7242048" y="3749040"/>
-            <a:ext cx="2103120" cy="1371600"/>
-          </a:xfrm>
-          <a:prstGeom prst="roundRect">
-            <a:avLst>
-              <a:gd name="adj" fmla="val 4000"/>
-            </a:avLst>
-          </a:prstGeom>
-          <a:solidFill>
-            <a:srgbClr val="F4F5F9"/>
-          </a:solidFill>
-          <a:ln/>
-        </p:spPr>
-      </p:sp>
-      <p:sp>
-        <p:nvSpPr>
-          <p:cNvPr id="35" name="Text 31"/>
-          <p:cNvSpPr txBox="1"/>
-          <p:nvPr/>
-        </p:nvSpPr>
-        <p:spPr>
-          <a:xfrm>
-            <a:off x="7379208" y="3886200"/>
-            <a:ext cx="1828800" cy="731520"/>
-          </a:xfrm>
-          <a:prstGeom prst="rect">
-            <a:avLst/>
-          </a:prstGeom>
-          <a:noFill/>
-          <a:ln/>
-        </p:spPr>
-        <p:txBody>
-          <a:bodyPr wrap="square" lIns="0" tIns="0" rIns="0" bIns="0" rtlCol="0" anchor="t"/>
-          <a:lstStyle/>
-          <a:p>
-            <a:pPr indent="0" marL="0">
-              <a:buNone/>
-            </a:pPr>
-            <a:r>
-              <a:rPr lang="en-US" sz="1400" b="1" dirty="0">
-                <a:solidFill>
-                  <a:srgbClr val="1A1A2E"/>
-                </a:solidFill>
-                <a:latin typeface="Century Gothic" pitchFamily="34" charset="0"/>
-                <a:ea typeface="Century Gothic" pitchFamily="34" charset="-122"/>
-                <a:cs typeface="Century Gothic" pitchFamily="34" charset="-120"/>
-              </a:rPr>
-              <a:t>Lo que cambié</a:t>
-            </a:r>
-            <a:endParaRPr lang="en-US" sz="1400" dirty="0"/>
-          </a:p>
-        </p:txBody>
-      </p:sp>
-      <p:sp>
-        <p:nvSpPr>
-          <p:cNvPr id="36" name="Shape 32"/>
-          <p:cNvSpPr/>
-          <p:nvPr/>
-        </p:nvSpPr>
-        <p:spPr>
-          <a:xfrm>
-            <a:off x="9473184" y="3749040"/>
-            <a:ext cx="2103120" cy="1371600"/>
-          </a:xfrm>
-          <a:prstGeom prst="roundRect">
-            <a:avLst>
-              <a:gd name="adj" fmla="val 4000"/>
-            </a:avLst>
-          </a:prstGeom>
-          <a:solidFill>
-            <a:srgbClr val="F4F5F9"/>
-          </a:solidFill>
-          <a:ln/>
-        </p:spPr>
-      </p:sp>
-      <p:sp>
-        <p:nvSpPr>
-          <p:cNvPr id="37" name="Text 33"/>
-          <p:cNvSpPr txBox="1"/>
-          <p:nvPr/>
-        </p:nvSpPr>
-        <p:spPr>
-          <a:xfrm>
-            <a:off x="9610344" y="3886200"/>
-            <a:ext cx="1828800" cy="731520"/>
-          </a:xfrm>
-          <a:prstGeom prst="rect">
-            <a:avLst/>
-          </a:prstGeom>
-          <a:noFill/>
-          <a:ln/>
-        </p:spPr>
-        <p:txBody>
-          <a:bodyPr wrap="square" lIns="0" tIns="0" rIns="0" bIns="0" rtlCol="0" anchor="t"/>
-          <a:lstStyle/>
-          <a:p>
-            <a:pPr indent="0" marL="0">
-              <a:buNone/>
-            </a:pPr>
-            <a:r>
-              <a:rPr lang="en-US" sz="1400" b="1" dirty="0">
-                <a:solidFill>
-                  <a:srgbClr val="1A1A2E"/>
-                </a:solidFill>
-                <a:latin typeface="Century Gothic" pitchFamily="34" charset="0"/>
-                <a:ea typeface="Century Gothic" pitchFamily="34" charset="-122"/>
-                <a:cs typeface="Century Gothic" pitchFamily="34" charset="-120"/>
-              </a:rPr>
-              <a:t>Lo que pasó</a:t>
-            </a:r>
-            <a:endParaRPr lang="en-US" sz="1400" dirty="0"/>
-          </a:p>
-        </p:txBody>
-      </p:sp>
-      <p:sp>
-        <p:nvSpPr>
-          <p:cNvPr id="38" name="Text 34"/>
-          <p:cNvSpPr txBox="1"/>
-          <p:nvPr/>
-        </p:nvSpPr>
-        <p:spPr>
-          <a:xfrm>
-            <a:off x="548640" y="5349240"/>
-            <a:ext cx="10972800" cy="411480"/>
-          </a:xfrm>
-          <a:prstGeom prst="rect">
-            <a:avLst/>
-          </a:prstGeom>
-          <a:noFill/>
-          <a:ln/>
-        </p:spPr>
-        <p:txBody>
-          <a:bodyPr wrap="square" lIns="0" tIns="0" rIns="0" bIns="0" rtlCol="0" anchor="t"/>
-          <a:lstStyle/>
-          <a:p>
             <a:pPr indent="0" marL="0">
               <a:buNone/>
             </a:pPr>
@@ -40044,7 +39579,7 @@
                 <a:ea typeface="Century Gothic" pitchFamily="34" charset="-122"/>
                 <a:cs typeface="Century Gothic" pitchFamily="34" charset="-120"/>
               </a:rPr>
-              <a:t>Bitácora personal: cinco minutos por semana. Nadie la revisa.</a:t>
+              <a:t>Una persona, una conversación: en los próximos 7 días tendré una conversación distinta con ___ sobre ___.</a:t>
             </a:r>
             <a:endParaRPr lang="en-US" sz="1300" dirty="0"/>
           </a:p>
@@ -40115,15 +39650,54 @@
                 <a:ea typeface="Century Gothic" pitchFamily="34" charset="-122"/>
                 <a:cs typeface="Century Gothic" pitchFamily="34" charset="-120"/>
               </a:rPr>
-              <a:t>12 · LA OTRA PREGUNTA</a:t>
+              <a:t>12 · ANTES DE CERRAR</a:t>
             </a:r>
             <a:endParaRPr lang="en-US" sz="1000" dirty="0"/>
+          </a:p>
+        </p:txBody>
+      </p:sp>
+      <p:sp>
+        <p:nvSpPr>
+          <p:cNvPr id="3" name="Text 1"/>
+          <p:cNvSpPr txBox="1"/>
+          <p:nvPr/>
+        </p:nvSpPr>
+        <p:spPr>
+          <a:xfrm>
+            <a:off x="548640" y="566928"/>
+            <a:ext cx="11109960" cy="685800"/>
+          </a:xfrm>
+          <a:prstGeom prst="rect">
+            <a:avLst/>
+          </a:prstGeom>
+          <a:noFill/>
+          <a:ln/>
+        </p:spPr>
+        <p:txBody>
+          <a:bodyPr wrap="square" lIns="0" tIns="0" rIns="0" bIns="0" rtlCol="0" anchor="ctr"/>
+          <a:lstStyle/>
+          <a:p>
+            <a:pPr indent="0" marL="0">
+              <a:buNone/>
+            </a:pPr>
+            <a:r>
+              <a:rPr lang="en-US" sz="2400" b="1" dirty="0">
+                <a:solidFill>
+                  <a:srgbClr val="1A1A2E"/>
+                </a:solidFill>
+                <a:latin typeface="Century Gothic" pitchFamily="34" charset="0"/>
+                <a:ea typeface="Century Gothic" pitchFamily="34" charset="-122"/>
+                <a:cs typeface="Century Gothic" pitchFamily="34" charset="-120"/>
+              </a:rPr>
+              <a:t>Dos minutos en silencio para la encuesta</a:t>
+            </a:r>
+            <a:endParaRPr lang="en-US" sz="2400" dirty="0"/>
           </a:p>
         </p:txBody>
       </p:sp>
       <p:pic>
         <p:nvPicPr>
-          <p:cNvPr id="3" name="Image 0" descr="/home/user/Training-and-Development-PROYECTS/workshop-liderazgo-intergeneracional/src/assets/gradient_band.png">    </p:cNvPr>
+          <p:cNvPr id="4" name="Image 0" descr="/home/user/Training-and-Development-PROYECTS/workshop-liderazgo-intergeneracional/src/assets/am_logo.png">    </p:cNvPr>
           <p:cNvPicPr>
             <a:picLocks noChangeAspect="1"/>
           </p:cNvPicPr>
@@ -40131,110 +39705,6 @@
         </p:nvPicPr>
         <p:blipFill>
           <a:blip r:embed="rId1"/>
-          <a:srcRect l="0" r="0" t="0" b="0"/>
-          <a:stretch/>
-        </p:blipFill>
-        <p:spPr>
-          <a:xfrm>
-            <a:off x="548640" y="1417320"/>
-            <a:ext cx="1005840" cy="54864"/>
-          </a:xfrm>
-          <a:prstGeom prst="rect">
-            <a:avLst/>
-          </a:prstGeom>
-        </p:spPr>
-      </p:pic>
-      <p:sp>
-        <p:nvSpPr>
-          <p:cNvPr id="4" name="Text 1"/>
-          <p:cNvSpPr txBox="1"/>
-          <p:nvPr/>
-        </p:nvSpPr>
-        <p:spPr>
-          <a:xfrm>
-            <a:off x="548640" y="1645920"/>
-            <a:ext cx="10241280" cy="2651760"/>
-          </a:xfrm>
-          <a:prstGeom prst="rect">
-            <a:avLst/>
-          </a:prstGeom>
-          <a:noFill/>
-          <a:ln/>
-        </p:spPr>
-        <p:txBody>
-          <a:bodyPr wrap="square" lIns="0" tIns="0" rIns="0" bIns="0" rtlCol="0" anchor="t"/>
-          <a:lstStyle/>
-          <a:p>
-            <a:pPr indent="0" marL="0">
-              <a:lnSpc>
-                <a:spcPct val="105000"/>
-              </a:lnSpc>
-              <a:buNone/>
-            </a:pPr>
-            <a:r>
-              <a:rPr lang="en-US" sz="3000" b="1" dirty="0">
-                <a:solidFill>
-                  <a:srgbClr val="1A1A2E"/>
-                </a:solidFill>
-                <a:latin typeface="Century Gothic" pitchFamily="34" charset="0"/>
-                <a:ea typeface="Century Gothic" pitchFamily="34" charset="-122"/>
-                <a:cs typeface="Century Gothic" pitchFamily="34" charset="-120"/>
-              </a:rPr>
-              <a:t>¿Qué está ocurriendo en el entorno, qué necesita esta persona y cómo adapto mi liderazgo sin bajar el estándar?</a:t>
-            </a:r>
-            <a:endParaRPr lang="en-US" sz="3000" dirty="0"/>
-          </a:p>
-        </p:txBody>
-      </p:sp>
-      <p:sp>
-        <p:nvSpPr>
-          <p:cNvPr id="5" name="Text 2"/>
-          <p:cNvSpPr txBox="1"/>
-          <p:nvPr/>
-        </p:nvSpPr>
-        <p:spPr>
-          <a:xfrm>
-            <a:off x="548640" y="4206240"/>
-            <a:ext cx="9601200" cy="1097280"/>
-          </a:xfrm>
-          <a:prstGeom prst="rect">
-            <a:avLst/>
-          </a:prstGeom>
-          <a:noFill/>
-          <a:ln/>
-        </p:spPr>
-        <p:txBody>
-          <a:bodyPr wrap="square" lIns="0" tIns="0" rIns="0" bIns="0" rtlCol="0" anchor="t"/>
-          <a:lstStyle/>
-          <a:p>
-            <a:pPr indent="0" marL="0">
-              <a:buNone/>
-            </a:pPr>
-            <a:r>
-              <a:rPr lang="en-US" sz="1500" dirty="0">
-                <a:solidFill>
-                  <a:srgbClr val="5A5A6E"/>
-                </a:solidFill>
-                <a:latin typeface="Century Gothic" pitchFamily="34" charset="0"/>
-                <a:ea typeface="Century Gothic" pitchFamily="34" charset="-122"/>
-                <a:cs typeface="Century Gothic" pitchFamily="34" charset="-120"/>
-              </a:rPr>
-              <a:t>La pregunta que proponemos llevar de vuelta a la planta, en lugar de “¿qué les pasa a estas nuevas generaciones?”.</a:t>
-            </a:r>
-            <a:endParaRPr lang="en-US" sz="1500" dirty="0"/>
-          </a:p>
-        </p:txBody>
-      </p:sp>
-      <p:pic>
-        <p:nvPicPr>
-          <p:cNvPr id="6" name="Image 1" descr="/home/user/Training-and-Development-PROYECTS/workshop-liderazgo-intergeneracional/src/assets/am_logo.png">    </p:cNvPr>
-          <p:cNvPicPr>
-            <a:picLocks noChangeAspect="1"/>
-          </p:cNvPicPr>
-          <p:nvPr/>
-        </p:nvPicPr>
-        <p:blipFill>
-          <a:blip r:embed="rId2"/>
           <a:stretch>
             <a:fillRect/>
           </a:stretch>
@@ -40251,7 +39721,7 @@
       </p:pic>
       <p:sp>
         <p:nvSpPr>
-          <p:cNvPr id="7" name="Text 3"/>
+          <p:cNvPr id="5" name="Text 2"/>
           <p:cNvSpPr txBox="1"/>
           <p:nvPr/>
         </p:nvSpPr>
@@ -40285,6 +39755,390 @@
               <a:t>52</a:t>
             </a:r>
             <a:endParaRPr lang="en-US" sz="750" dirty="0"/>
+          </a:p>
+        </p:txBody>
+      </p:sp>
+      <p:sp>
+        <p:nvSpPr>
+          <p:cNvPr id="7" name="Shape 3"/>
+          <p:cNvSpPr/>
+          <p:nvPr/>
+        </p:nvSpPr>
+        <p:spPr>
+          <a:xfrm>
+            <a:off x="548640" y="1691640"/>
+            <a:ext cx="2926080" cy="2926080"/>
+          </a:xfrm>
+          <a:prstGeom prst="roundRect">
+            <a:avLst>
+              <a:gd name="adj" fmla="val 2500"/>
+            </a:avLst>
+          </a:prstGeom>
+          <a:solidFill>
+            <a:srgbClr val="FFFFFF"/>
+          </a:solidFill>
+          <a:ln w="25400">
+            <a:solidFill>
+              <a:srgbClr val="1A1A2E"/>
+            </a:solidFill>
+            <a:prstDash val="solid"/>
+          </a:ln>
+        </p:spPr>
+      </p:sp>
+      <p:sp>
+        <p:nvSpPr>
+          <p:cNvPr id="8" name="Text 4"/>
+          <p:cNvSpPr txBox="1"/>
+          <p:nvPr/>
+        </p:nvSpPr>
+        <p:spPr>
+          <a:xfrm>
+            <a:off x="731520" y="2651760"/>
+            <a:ext cx="2560320" cy="914400"/>
+          </a:xfrm>
+          <a:prstGeom prst="rect">
+            <a:avLst/>
+          </a:prstGeom>
+          <a:noFill/>
+          <a:ln/>
+        </p:spPr>
+        <p:txBody>
+          <a:bodyPr wrap="square" lIns="0" tIns="0" rIns="0" bIns="0" rtlCol="0" anchor="ctr"/>
+          <a:lstStyle/>
+          <a:p>
+            <a:pPr algn="ctr" indent="0" marL="0">
+              <a:buNone/>
+            </a:pPr>
+            <a:r>
+              <a:rPr lang="en-US" sz="1100" dirty="0">
+                <a:solidFill>
+                  <a:srgbClr val="5A5A6E"/>
+                </a:solidFill>
+                <a:latin typeface="Century Gothic" pitchFamily="34" charset="0"/>
+                <a:ea typeface="Century Gothic" pitchFamily="34" charset="-122"/>
+                <a:cs typeface="Century Gothic" pitchFamily="34" charset="-120"/>
+              </a:rPr>
+              <a:t>Código QR de la encuesta institucional</a:t>
+            </a:r>
+            <a:endParaRPr lang="en-US" sz="1100" dirty="0"/>
+          </a:p>
+        </p:txBody>
+      </p:sp>
+      <p:sp>
+        <p:nvSpPr>
+          <p:cNvPr id="9" name="Shape 5"/>
+          <p:cNvSpPr/>
+          <p:nvPr/>
+        </p:nvSpPr>
+        <p:spPr>
+          <a:xfrm>
+            <a:off x="548640" y="4800600"/>
+            <a:ext cx="2926080" cy="237744"/>
+          </a:xfrm>
+          <a:prstGeom prst="rect">
+            <a:avLst/>
+          </a:prstGeom>
+          <a:solidFill>
+            <a:srgbClr val="FFF4D6"/>
+          </a:solidFill>
+          <a:ln/>
+        </p:spPr>
+      </p:sp>
+      <p:sp>
+        <p:nvSpPr>
+          <p:cNvPr id="10" name="Text 6"/>
+          <p:cNvSpPr txBox="1"/>
+          <p:nvPr/>
+        </p:nvSpPr>
+        <p:spPr>
+          <a:xfrm>
+            <a:off x="640080" y="4800600"/>
+            <a:ext cx="2743200" cy="237744"/>
+          </a:xfrm>
+          <a:prstGeom prst="rect">
+            <a:avLst/>
+          </a:prstGeom>
+          <a:noFill/>
+          <a:ln/>
+        </p:spPr>
+        <p:txBody>
+          <a:bodyPr wrap="square" lIns="0" tIns="0" rIns="0" bIns="0" rtlCol="0" anchor="ctr"/>
+          <a:lstStyle/>
+          <a:p>
+            <a:pPr indent="0" marL="0">
+              <a:buNone/>
+            </a:pPr>
+            <a:r>
+              <a:rPr lang="en-US" sz="750" b="1" spc="100" kern="0" dirty="0">
+                <a:solidFill>
+                  <a:srgbClr val="8A5A00"/>
+                </a:solidFill>
+                <a:latin typeface="Century Gothic" pitchFamily="34" charset="0"/>
+                <a:ea typeface="Century Gothic" pitchFamily="34" charset="-122"/>
+                <a:cs typeface="Century Gothic" pitchFamily="34" charset="-120"/>
+              </a:rPr>
+              <a:t>POR CONFIRMAR  </a:t>
+            </a:r>
+            <a:pPr indent="0" marL="0">
+              <a:buNone/>
+            </a:pPr>
+            <a:r>
+              <a:rPr lang="en-US" sz="750" dirty="0">
+                <a:solidFill>
+                  <a:srgbClr val="8A5A00"/>
+                </a:solidFill>
+                <a:latin typeface="Century Gothic" pitchFamily="34" charset="0"/>
+                <a:ea typeface="Century Gothic" pitchFamily="34" charset="-122"/>
+                <a:cs typeface="Century Gothic" pitchFamily="34" charset="-120"/>
+              </a:rPr>
+              <a:t>Insertar QR en T–3</a:t>
+            </a:r>
+            <a:endParaRPr lang="en-US" sz="750" dirty="0"/>
+          </a:p>
+        </p:txBody>
+      </p:sp>
+      <p:sp>
+        <p:nvSpPr>
+          <p:cNvPr id="11" name="Text 7"/>
+          <p:cNvSpPr txBox="1"/>
+          <p:nvPr/>
+        </p:nvSpPr>
+        <p:spPr>
+          <a:xfrm>
+            <a:off x="4023360" y="1737360"/>
+            <a:ext cx="7315200" cy="548640"/>
+          </a:xfrm>
+          <a:prstGeom prst="rect">
+            <a:avLst/>
+          </a:prstGeom>
+          <a:noFill/>
+          <a:ln/>
+        </p:spPr>
+        <p:txBody>
+          <a:bodyPr wrap="square" lIns="0" tIns="0" rIns="0" bIns="0" rtlCol="0" anchor="t"/>
+          <a:lstStyle/>
+          <a:p>
+            <a:pPr indent="0" marL="0">
+              <a:buNone/>
+            </a:pPr>
+            <a:r>
+              <a:rPr lang="en-US" sz="2200" b="1" dirty="0">
+                <a:solidFill>
+                  <a:srgbClr val="1A1A2E"/>
+                </a:solidFill>
+                <a:latin typeface="Century Gothic" pitchFamily="34" charset="0"/>
+                <a:ea typeface="Century Gothic" pitchFamily="34" charset="-122"/>
+                <a:cs typeface="Century Gothic" pitchFamily="34" charset="-120"/>
+              </a:rPr>
+              <a:t>Anónima. Tres minutos.</a:t>
+            </a:r>
+            <a:endParaRPr lang="en-US" sz="2200" dirty="0"/>
+          </a:p>
+        </p:txBody>
+      </p:sp>
+      <p:sp>
+        <p:nvSpPr>
+          <p:cNvPr id="12" name="Text 8"/>
+          <p:cNvSpPr txBox="1"/>
+          <p:nvPr/>
+        </p:nvSpPr>
+        <p:spPr>
+          <a:xfrm>
+            <a:off x="4023360" y="2468880"/>
+            <a:ext cx="7498080" cy="2011680"/>
+          </a:xfrm>
+          <a:prstGeom prst="rect">
+            <a:avLst/>
+          </a:prstGeom>
+          <a:noFill/>
+          <a:ln/>
+        </p:spPr>
+        <p:txBody>
+          <a:bodyPr wrap="square" lIns="0" tIns="0" rIns="0" bIns="0" rtlCol="0" anchor="t"/>
+          <a:lstStyle/>
+          <a:p>
+            <a:pPr marL="266700" indent="-266700">
+              <a:spcAft>
+                <a:spcPts val="900"/>
+              </a:spcAft>
+              <a:buSzPct val="100000"/>
+              <a:buChar char="•"/>
+            </a:pPr>
+            <a:r>
+              <a:rPr lang="en-US" sz="1500" dirty="0">
+                <a:solidFill>
+                  <a:srgbClr val="1A1A2E"/>
+                </a:solidFill>
+                <a:latin typeface="Century Gothic" pitchFamily="34" charset="0"/>
+                <a:ea typeface="Century Gothic" pitchFamily="34" charset="-122"/>
+                <a:cs typeface="Century Gothic" pitchFamily="34" charset="-120"/>
+              </a:rPr>
+              <a:t>Relevancia para los retos reales de su equipo.</a:t>
+            </a:r>
+            <a:endParaRPr lang="en-US" sz="1500" dirty="0"/>
+          </a:p>
+          <a:p>
+            <a:pPr marL="266700" indent="-266700">
+              <a:spcAft>
+                <a:spcPts val="900"/>
+              </a:spcAft>
+              <a:buSzPct val="100000"/>
+              <a:buChar char="•"/>
+            </a:pPr>
+            <a:r>
+              <a:rPr lang="en-US" sz="1500" dirty="0">
+                <a:solidFill>
+                  <a:srgbClr val="1A1A2E"/>
+                </a:solidFill>
+                <a:latin typeface="Century Gothic" pitchFamily="34" charset="0"/>
+                <a:ea typeface="Century Gothic" pitchFamily="34" charset="-122"/>
+                <a:cs typeface="Century Gothic" pitchFamily="34" charset="-120"/>
+              </a:rPr>
+              <a:t>Si el taller respetó su experiencia.</a:t>
+            </a:r>
+            <a:endParaRPr lang="en-US" sz="1500" dirty="0"/>
+          </a:p>
+          <a:p>
+            <a:pPr marL="266700" indent="-266700">
+              <a:spcAft>
+                <a:spcPts val="900"/>
+              </a:spcAft>
+              <a:buSzPct val="100000"/>
+              <a:buChar char="•"/>
+            </a:pPr>
+            <a:r>
+              <a:rPr lang="en-US" sz="1500" dirty="0">
+                <a:solidFill>
+                  <a:srgbClr val="1A1A2E"/>
+                </a:solidFill>
+                <a:latin typeface="Century Gothic" pitchFamily="34" charset="0"/>
+                <a:ea typeface="Century Gothic" pitchFamily="34" charset="-122"/>
+                <a:cs typeface="Century Gothic" pitchFamily="34" charset="-120"/>
+              </a:rPr>
+              <a:t>Si al releer su pre-work respondería lo mismo.</a:t>
+            </a:r>
+            <a:endParaRPr lang="en-US" sz="1500" dirty="0"/>
+          </a:p>
+          <a:p>
+            <a:pPr marL="266700" indent="-266700">
+              <a:spcAft>
+                <a:spcPts val="900"/>
+              </a:spcAft>
+              <a:buSzPct val="100000"/>
+              <a:buChar char="•"/>
+            </a:pPr>
+            <a:r>
+              <a:rPr lang="en-US" sz="1500" dirty="0">
+                <a:solidFill>
+                  <a:srgbClr val="1A1A2E"/>
+                </a:solidFill>
+                <a:latin typeface="Century Gothic" pitchFamily="34" charset="0"/>
+                <a:ea typeface="Century Gothic" pitchFamily="34" charset="-122"/>
+                <a:cs typeface="Century Gothic" pitchFamily="34" charset="-120"/>
+              </a:rPr>
+              <a:t>Qué cambiaría para la siguiente cohorte.</a:t>
+            </a:r>
+            <a:endParaRPr lang="en-US" sz="1500" dirty="0"/>
+          </a:p>
+        </p:txBody>
+      </p:sp>
+      <p:sp>
+        <p:nvSpPr>
+          <p:cNvPr id="13" name="Shape 9"/>
+          <p:cNvSpPr/>
+          <p:nvPr/>
+        </p:nvSpPr>
+        <p:spPr>
+          <a:xfrm>
+            <a:off x="4023360" y="4572000"/>
+            <a:ext cx="7616952" cy="1463040"/>
+          </a:xfrm>
+          <a:prstGeom prst="roundRect">
+            <a:avLst>
+              <a:gd name="adj" fmla="val 5000"/>
+            </a:avLst>
+          </a:prstGeom>
+          <a:solidFill>
+            <a:srgbClr val="F4F5F9"/>
+          </a:solidFill>
+          <a:ln/>
+        </p:spPr>
+      </p:sp>
+      <p:sp>
+        <p:nvSpPr>
+          <p:cNvPr id="14" name="Text 10"/>
+          <p:cNvSpPr txBox="1"/>
+          <p:nvPr/>
+        </p:nvSpPr>
+        <p:spPr>
+          <a:xfrm>
+            <a:off x="4297680" y="4754880"/>
+            <a:ext cx="7068312" cy="274320"/>
+          </a:xfrm>
+          <a:prstGeom prst="rect">
+            <a:avLst/>
+          </a:prstGeom>
+          <a:noFill/>
+          <a:ln/>
+        </p:spPr>
+        <p:txBody>
+          <a:bodyPr wrap="square" lIns="0" tIns="0" rIns="0" bIns="0" rtlCol="0" anchor="t"/>
+          <a:lstStyle/>
+          <a:p>
+            <a:pPr indent="0" marL="0">
+              <a:buNone/>
+            </a:pPr>
+            <a:r>
+              <a:rPr lang="en-US" sz="1000" b="1" spc="200" kern="0" dirty="0">
+                <a:solidFill>
+                  <a:srgbClr val="FA4642"/>
+                </a:solidFill>
+                <a:latin typeface="Century Gothic" pitchFamily="34" charset="0"/>
+                <a:ea typeface="Century Gothic" pitchFamily="34" charset="-122"/>
+                <a:cs typeface="Century Gothic" pitchFamily="34" charset="-120"/>
+              </a:rPr>
+              <a:t>EN SU SOBRE</a:t>
+            </a:r>
+            <a:endParaRPr lang="en-US" sz="1000" dirty="0"/>
+          </a:p>
+        </p:txBody>
+      </p:sp>
+      <p:sp>
+        <p:nvSpPr>
+          <p:cNvPr id="15" name="Text 11"/>
+          <p:cNvSpPr txBox="1"/>
+          <p:nvPr/>
+        </p:nvSpPr>
+        <p:spPr>
+          <a:xfrm>
+            <a:off x="4297680" y="5093208"/>
+            <a:ext cx="7132320" cy="640080"/>
+          </a:xfrm>
+          <a:prstGeom prst="rect">
+            <a:avLst/>
+          </a:prstGeom>
+          <a:noFill/>
+          <a:ln/>
+        </p:spPr>
+        <p:txBody>
+          <a:bodyPr wrap="square" lIns="0" tIns="0" rIns="0" bIns="0" rtlCol="0" anchor="t"/>
+          <a:lstStyle/>
+          <a:p>
+            <a:pPr indent="0" marL="0">
+              <a:buNone/>
+            </a:pPr>
+            <a:r>
+              <a:rPr lang="en-US" sz="1250" dirty="0">
+                <a:solidFill>
+                  <a:srgbClr val="1A1A2E"/>
+                </a:solidFill>
+                <a:latin typeface="Century Gothic" pitchFamily="34" charset="0"/>
+                <a:ea typeface="Century Gothic" pitchFamily="34" charset="-122"/>
+                <a:cs typeface="Century Gothic" pitchFamily="34" charset="-120"/>
+              </a:rPr>
+              <a:t>La tarjeta del Experimento de Liderazgo a 30 días: una persona que les cueste leer; leer, adaptar, alinear.</a:t>
+            </a:r>
+            <a:endParaRPr lang="en-US" sz="1250" dirty="0"/>
           </a:p>
         </p:txBody>
       </p:sp>
@@ -40297,20 +40151,13 @@
 </file>
 
 <file path=ppt/slides/slide53.xml><?xml version="1.0" encoding="utf-8"?>
-<p:sld xmlns:a="http://schemas.openxmlformats.org/drawingml/2006/main" xmlns:r="http://schemas.openxmlformats.org/officeDocument/2006/relationships" xmlns:p="http://schemas.openxmlformats.org/presentationml/2006/main">
+<p:sld xmlns:a="http://schemas.openxmlformats.org/drawingml/2006/main" xmlns:r="http://schemas.openxmlformats.org/officeDocument/2006/relationships" xmlns:p="http://schemas.openxmlformats.org/presentationml/2006/main" show="0">
   <p:cSld name="Slide 53">
     <p:bg>
       <p:bgPr>
-        <a:blipFill dpi="0" rotWithShape="1">
-          <a:blip r:embed="rId1">
-            <a:lum/>
-          </a:blip>
-          <a:srcRect/>
-          <a:stretch>
-            <a:fillRect/>
-          </a:stretch>
-        </a:blipFill>
-        <a:effectLst/>
+        <a:solidFill>
+          <a:srgbClr val="FFFFFF"/>
+        </a:solidFill>
       </p:bgPr>
     </p:bg>
     <p:spTree>
@@ -40354,13 +40201,13 @@
             <a:r>
               <a:rPr lang="en-US" sz="1000" b="1" spc="200" kern="0" dirty="0">
                 <a:solidFill>
-                  <a:srgbClr val="FF8C47"/>
-                </a:solidFill>
-                <a:latin typeface="Century Gothic" pitchFamily="34" charset="0"/>
-                <a:ea typeface="Century Gothic" pitchFamily="34" charset="-122"/>
-                <a:cs typeface="Century Gothic" pitchFamily="34" charset="-120"/>
-              </a:rPr>
-              <a:t>12 · CIERRE</a:t>
+                  <a:srgbClr val="FA4642"/>
+                </a:solidFill>
+                <a:latin typeface="Century Gothic" pitchFamily="34" charset="0"/>
+                <a:ea typeface="Century Gothic" pitchFamily="34" charset="-122"/>
+                <a:cs typeface="Century Gothic" pitchFamily="34" charset="-120"/>
+              </a:rPr>
+              <a:t>12 · EXPERIMENTO DE LIDERAZGO A 30 DÍAS</a:t>
             </a:r>
             <a:endParaRPr lang="en-US" sz="1000" dirty="0"/>
           </a:p>
@@ -40374,148 +40221,47 @@
         </p:nvSpPr>
         <p:spPr>
           <a:xfrm>
-            <a:off x="548640" y="1737360"/>
-            <a:ext cx="10972800" cy="1280160"/>
-          </a:xfrm>
-          <a:prstGeom prst="rect">
-            <a:avLst/>
-          </a:prstGeom>
-          <a:noFill/>
-          <a:ln/>
-        </p:spPr>
-        <p:txBody>
-          <a:bodyPr wrap="square" lIns="0" tIns="0" rIns="0" bIns="0" rtlCol="0" anchor="b"/>
-          <a:lstStyle/>
-          <a:p>
-            <a:pPr indent="0" marL="0">
-              <a:buNone/>
-            </a:pPr>
-            <a:r>
-              <a:rPr lang="en-US" sz="3800" b="1" dirty="0">
-                <a:solidFill>
-                  <a:srgbClr val="FFFFFF"/>
-                </a:solidFill>
-                <a:latin typeface="Century Gothic" pitchFamily="34" charset="0"/>
-                <a:ea typeface="Century Gothic" pitchFamily="34" charset="-122"/>
-                <a:cs typeface="Century Gothic" pitchFamily="34" charset="-120"/>
-              </a:rPr>
-              <a:t>Personas distintas no necesitan estándares distintos.</a:t>
-            </a:r>
-            <a:endParaRPr lang="en-US" sz="3800" dirty="0"/>
-          </a:p>
-        </p:txBody>
-      </p:sp>
-      <p:sp>
-        <p:nvSpPr>
-          <p:cNvPr id="4" name="Text 2"/>
-          <p:cNvSpPr txBox="1"/>
-          <p:nvPr/>
-        </p:nvSpPr>
-        <p:spPr>
-          <a:xfrm>
-            <a:off x="548640" y="3063240"/>
-            <a:ext cx="10972800" cy="1280160"/>
-          </a:xfrm>
-          <a:prstGeom prst="rect">
-            <a:avLst/>
-          </a:prstGeom>
-          <a:noFill/>
-          <a:ln/>
-        </p:spPr>
-        <p:txBody>
-          <a:bodyPr wrap="square" lIns="0" tIns="0" rIns="0" bIns="0" rtlCol="0" anchor="t"/>
-          <a:lstStyle/>
-          <a:p>
-            <a:pPr indent="0" marL="0">
-              <a:buNone/>
-            </a:pPr>
-            <a:r>
-              <a:rPr lang="en-US" sz="3800" b="1" dirty="0">
-                <a:solidFill>
-                  <a:srgbClr val="FF8C47"/>
-                </a:solidFill>
-                <a:latin typeface="Century Gothic" pitchFamily="34" charset="0"/>
-                <a:ea typeface="Century Gothic" pitchFamily="34" charset="-122"/>
-                <a:cs typeface="Century Gothic" pitchFamily="34" charset="-120"/>
-              </a:rPr>
-              <a:t>Pueden necesitar un liderazgo distinto.</a:t>
-            </a:r>
-            <a:endParaRPr lang="en-US" sz="3800" dirty="0"/>
+            <a:off x="548640" y="566928"/>
+            <a:ext cx="11109960" cy="685800"/>
+          </a:xfrm>
+          <a:prstGeom prst="rect">
+            <a:avLst/>
+          </a:prstGeom>
+          <a:noFill/>
+          <a:ln/>
+        </p:spPr>
+        <p:txBody>
+          <a:bodyPr wrap="square" lIns="0" tIns="0" rIns="0" bIns="0" rtlCol="0" anchor="ctr"/>
+          <a:lstStyle/>
+          <a:p>
+            <a:pPr indent="0" marL="0">
+              <a:buNone/>
+            </a:pPr>
+            <a:r>
+              <a:rPr lang="en-US" sz="2400" b="1" dirty="0">
+                <a:solidFill>
+                  <a:srgbClr val="1A1A2E"/>
+                </a:solidFill>
+                <a:latin typeface="Century Gothic" pitchFamily="34" charset="0"/>
+                <a:ea typeface="Century Gothic" pitchFamily="34" charset="-122"/>
+                <a:cs typeface="Century Gothic" pitchFamily="34" charset="-120"/>
+              </a:rPr>
+              <a:t>Una persona que me cuesta leer. Treinta días</a:t>
+            </a:r>
+            <a:endParaRPr lang="en-US" sz="2400" dirty="0"/>
           </a:p>
         </p:txBody>
       </p:sp>
       <p:pic>
         <p:nvPicPr>
-          <p:cNvPr id="5" name="Image 0" descr="/home/user/Training-and-Development-PROYECTS/workshop-liderazgo-intergeneracional/src/assets/gradient_band.png">    </p:cNvPr>
+          <p:cNvPr id="4" name="Image 0" descr="/home/user/Training-and-Development-PROYECTS/workshop-liderazgo-intergeneracional/src/assets/am_logo.png">    </p:cNvPr>
           <p:cNvPicPr>
             <a:picLocks noChangeAspect="1"/>
           </p:cNvPicPr>
           <p:nvPr/>
         </p:nvPicPr>
         <p:blipFill>
-          <a:blip r:embed="rId2"/>
-          <a:srcRect l="0" r="0" t="0" b="0"/>
-          <a:stretch/>
-        </p:blipFill>
-        <p:spPr>
-          <a:xfrm>
-            <a:off x="548640" y="4572000"/>
-            <a:ext cx="2743200" cy="64008"/>
-          </a:xfrm>
-          <a:prstGeom prst="rect">
-            <a:avLst/>
-          </a:prstGeom>
-        </p:spPr>
-      </p:pic>
-      <p:sp>
-        <p:nvSpPr>
-          <p:cNvPr id="6" name="Text 3"/>
-          <p:cNvSpPr txBox="1"/>
-          <p:nvPr/>
-        </p:nvSpPr>
-        <p:spPr>
-          <a:xfrm>
-            <a:off x="548640" y="4800600"/>
-            <a:ext cx="10058400" cy="914400"/>
-          </a:xfrm>
-          <a:prstGeom prst="rect">
-            <a:avLst/>
-          </a:prstGeom>
-          <a:noFill/>
-          <a:ln/>
-        </p:spPr>
-        <p:txBody>
-          <a:bodyPr wrap="square" lIns="0" tIns="0" rIns="0" bIns="0" rtlCol="0" anchor="t"/>
-          <a:lstStyle/>
-          <a:p>
-            <a:pPr indent="0" marL="0">
-              <a:buNone/>
-            </a:pPr>
-            <a:r>
-              <a:rPr lang="en-US" sz="1500" dirty="0">
-                <a:solidFill>
-                  <a:srgbClr val="D6D8EA"/>
-                </a:solidFill>
-                <a:latin typeface="Century Gothic" pitchFamily="34" charset="0"/>
-                <a:ea typeface="Century Gothic" pitchFamily="34" charset="-122"/>
-                <a:cs typeface="Century Gothic" pitchFamily="34" charset="-120"/>
-              </a:rPr>
-              <a:t>En una siderúrgica, la seguridad no se adapta. El liderazgo sí.</a:t>
-            </a:r>
-            <a:endParaRPr lang="en-US" sz="1500" dirty="0"/>
-          </a:p>
-        </p:txBody>
-      </p:sp>
-      <p:pic>
-        <p:nvPicPr>
-          <p:cNvPr id="7" name="Image 1" descr="/home/user/Training-and-Development-PROYECTS/workshop-liderazgo-intergeneracional/src/assets/am_logo_white.png">    </p:cNvPr>
-          <p:cNvPicPr>
-            <a:picLocks noChangeAspect="1"/>
-          </p:cNvPicPr>
-          <p:nvPr/>
-        </p:nvPicPr>
-        <p:blipFill>
-          <a:blip r:embed="rId3"/>
+          <a:blip r:embed="rId1"/>
           <a:stretch>
             <a:fillRect/>
           </a:stretch>
@@ -40532,7 +40278,7 @@
       </p:pic>
       <p:sp>
         <p:nvSpPr>
-          <p:cNvPr id="8" name="Text 4"/>
+          <p:cNvPr id="5" name="Text 2"/>
           <p:cNvSpPr txBox="1"/>
           <p:nvPr/>
         </p:nvSpPr>
@@ -40557,7 +40303,7 @@
             <a:r>
               <a:rPr lang="en-US" sz="750" dirty="0">
                 <a:solidFill>
-                  <a:srgbClr val="B8BACB"/>
+                  <a:srgbClr val="8A8CA0"/>
                 </a:solidFill>
                 <a:latin typeface="Calibri" pitchFamily="34" charset="0"/>
                 <a:ea typeface="Calibri" pitchFamily="34" charset="-122"/>
@@ -40566,6 +40312,1058 @@
               <a:t>53</a:t>
             </a:r>
             <a:endParaRPr lang="en-US" sz="750" dirty="0"/>
+          </a:p>
+        </p:txBody>
+      </p:sp>
+      <p:sp>
+        <p:nvSpPr>
+          <p:cNvPr id="7" name="Shape 3"/>
+          <p:cNvSpPr/>
+          <p:nvPr/>
+        </p:nvSpPr>
+        <p:spPr>
+          <a:xfrm>
+            <a:off x="1655064" y="1965960"/>
+            <a:ext cx="8851392" cy="0"/>
+          </a:xfrm>
+          <a:prstGeom prst="line">
+            <a:avLst/>
+          </a:prstGeom>
+          <a:noFill/>
+          <a:ln w="12700">
+            <a:solidFill>
+              <a:srgbClr val="D6D8EA"/>
+            </a:solidFill>
+            <a:prstDash val="solid"/>
+          </a:ln>
+        </p:spPr>
+      </p:sp>
+      <p:sp>
+        <p:nvSpPr>
+          <p:cNvPr id="8" name="Shape 4"/>
+          <p:cNvSpPr/>
+          <p:nvPr/>
+        </p:nvSpPr>
+        <p:spPr>
+          <a:xfrm>
+            <a:off x="1472184" y="1783080"/>
+            <a:ext cx="365760" cy="365760"/>
+          </a:xfrm>
+          <a:prstGeom prst="ellipse">
+            <a:avLst/>
+          </a:prstGeom>
+          <a:solidFill>
+            <a:srgbClr val="FF8C47"/>
+          </a:solidFill>
+          <a:ln/>
+        </p:spPr>
+      </p:sp>
+      <p:sp>
+        <p:nvSpPr>
+          <p:cNvPr id="9" name="Text 5"/>
+          <p:cNvSpPr txBox="1"/>
+          <p:nvPr/>
+        </p:nvSpPr>
+        <p:spPr>
+          <a:xfrm>
+            <a:off x="1472184" y="1783080"/>
+            <a:ext cx="365760" cy="365760"/>
+          </a:xfrm>
+          <a:prstGeom prst="rect">
+            <a:avLst/>
+          </a:prstGeom>
+          <a:noFill/>
+          <a:ln/>
+        </p:spPr>
+        <p:txBody>
+          <a:bodyPr wrap="square" lIns="0" tIns="0" rIns="0" bIns="0" rtlCol="0" anchor="ctr"/>
+          <a:lstStyle/>
+          <a:p>
+            <a:pPr algn="ctr" indent="0" marL="0">
+              <a:buNone/>
+            </a:pPr>
+            <a:r>
+              <a:rPr lang="en-US" sz="1000" b="1" dirty="0">
+                <a:solidFill>
+                  <a:srgbClr val="FFFFFF"/>
+                </a:solidFill>
+                <a:latin typeface="Century Gothic" pitchFamily="34" charset="0"/>
+                <a:ea typeface="Century Gothic" pitchFamily="34" charset="-122"/>
+                <a:cs typeface="Century Gothic" pitchFamily="34" charset="-120"/>
+              </a:rPr>
+              <a:t>1</a:t>
+            </a:r>
+            <a:endParaRPr lang="en-US" sz="1000" dirty="0"/>
+          </a:p>
+        </p:txBody>
+      </p:sp>
+      <p:sp>
+        <p:nvSpPr>
+          <p:cNvPr id="10" name="Text 6"/>
+          <p:cNvSpPr txBox="1"/>
+          <p:nvPr/>
+        </p:nvSpPr>
+        <p:spPr>
+          <a:xfrm>
+            <a:off x="594360" y="2240280"/>
+            <a:ext cx="2121408" cy="457200"/>
+          </a:xfrm>
+          <a:prstGeom prst="rect">
+            <a:avLst/>
+          </a:prstGeom>
+          <a:noFill/>
+          <a:ln/>
+        </p:spPr>
+        <p:txBody>
+          <a:bodyPr wrap="square" lIns="0" tIns="0" rIns="0" bIns="0" rtlCol="0" anchor="t"/>
+          <a:lstStyle/>
+          <a:p>
+            <a:pPr algn="ctr" indent="0" marL="0">
+              <a:buNone/>
+            </a:pPr>
+            <a:r>
+              <a:rPr lang="en-US" sz="1000" b="1" dirty="0">
+                <a:solidFill>
+                  <a:srgbClr val="1A1A2E"/>
+                </a:solidFill>
+                <a:latin typeface="Century Gothic" pitchFamily="34" charset="0"/>
+                <a:ea typeface="Century Gothic" pitchFamily="34" charset="-122"/>
+                <a:cs typeface="Century Gothic" pitchFamily="34" charset="-120"/>
+              </a:rPr>
+              <a:t>Elegir a la persona</a:t>
+            </a:r>
+            <a:endParaRPr lang="en-US" sz="1000" dirty="0"/>
+          </a:p>
+        </p:txBody>
+      </p:sp>
+      <p:sp>
+        <p:nvSpPr>
+          <p:cNvPr id="11" name="Text 7"/>
+          <p:cNvSpPr txBox="1"/>
+          <p:nvPr/>
+        </p:nvSpPr>
+        <p:spPr>
+          <a:xfrm>
+            <a:off x="594360" y="2697480"/>
+            <a:ext cx="2121408" cy="274320"/>
+          </a:xfrm>
+          <a:prstGeom prst="rect">
+            <a:avLst/>
+          </a:prstGeom>
+          <a:noFill/>
+          <a:ln/>
+        </p:spPr>
+        <p:txBody>
+          <a:bodyPr wrap="square" lIns="0" tIns="0" rIns="0" bIns="0" rtlCol="0" anchor="t"/>
+          <a:lstStyle/>
+          <a:p>
+            <a:pPr algn="ctr" indent="0" marL="0">
+              <a:buNone/>
+            </a:pPr>
+            <a:r>
+              <a:rPr lang="en-US" sz="900" dirty="0">
+                <a:solidFill>
+                  <a:srgbClr val="FF8C47"/>
+                </a:solidFill>
+                <a:latin typeface="Century Gothic" pitchFamily="34" charset="0"/>
+                <a:ea typeface="Century Gothic" pitchFamily="34" charset="-122"/>
+                <a:cs typeface="Century Gothic" pitchFamily="34" charset="-120"/>
+              </a:rPr>
+              <a:t>Día 1</a:t>
+            </a:r>
+            <a:endParaRPr lang="en-US" sz="900" dirty="0"/>
+          </a:p>
+        </p:txBody>
+      </p:sp>
+      <p:sp>
+        <p:nvSpPr>
+          <p:cNvPr id="12" name="Shape 8"/>
+          <p:cNvSpPr/>
+          <p:nvPr/>
+        </p:nvSpPr>
+        <p:spPr>
+          <a:xfrm>
+            <a:off x="3685032" y="1783080"/>
+            <a:ext cx="365760" cy="365760"/>
+          </a:xfrm>
+          <a:prstGeom prst="ellipse">
+            <a:avLst/>
+          </a:prstGeom>
+          <a:solidFill>
+            <a:srgbClr val="FA4642"/>
+          </a:solidFill>
+          <a:ln/>
+        </p:spPr>
+      </p:sp>
+      <p:sp>
+        <p:nvSpPr>
+          <p:cNvPr id="13" name="Text 9"/>
+          <p:cNvSpPr txBox="1"/>
+          <p:nvPr/>
+        </p:nvSpPr>
+        <p:spPr>
+          <a:xfrm>
+            <a:off x="3685032" y="1783080"/>
+            <a:ext cx="365760" cy="365760"/>
+          </a:xfrm>
+          <a:prstGeom prst="rect">
+            <a:avLst/>
+          </a:prstGeom>
+          <a:noFill/>
+          <a:ln/>
+        </p:spPr>
+        <p:txBody>
+          <a:bodyPr wrap="square" lIns="0" tIns="0" rIns="0" bIns="0" rtlCol="0" anchor="ctr"/>
+          <a:lstStyle/>
+          <a:p>
+            <a:pPr algn="ctr" indent="0" marL="0">
+              <a:buNone/>
+            </a:pPr>
+            <a:r>
+              <a:rPr lang="en-US" sz="1000" b="1" dirty="0">
+                <a:solidFill>
+                  <a:srgbClr val="FFFFFF"/>
+                </a:solidFill>
+                <a:latin typeface="Century Gothic" pitchFamily="34" charset="0"/>
+                <a:ea typeface="Century Gothic" pitchFamily="34" charset="-122"/>
+                <a:cs typeface="Century Gothic" pitchFamily="34" charset="-120"/>
+              </a:rPr>
+              <a:t>2</a:t>
+            </a:r>
+            <a:endParaRPr lang="en-US" sz="1000" dirty="0"/>
+          </a:p>
+        </p:txBody>
+      </p:sp>
+      <p:sp>
+        <p:nvSpPr>
+          <p:cNvPr id="14" name="Text 10"/>
+          <p:cNvSpPr txBox="1"/>
+          <p:nvPr/>
+        </p:nvSpPr>
+        <p:spPr>
+          <a:xfrm>
+            <a:off x="2807208" y="2240280"/>
+            <a:ext cx="2121408" cy="457200"/>
+          </a:xfrm>
+          <a:prstGeom prst="rect">
+            <a:avLst/>
+          </a:prstGeom>
+          <a:noFill/>
+          <a:ln/>
+        </p:spPr>
+        <p:txBody>
+          <a:bodyPr wrap="square" lIns="0" tIns="0" rIns="0" bIns="0" rtlCol="0" anchor="t"/>
+          <a:lstStyle/>
+          <a:p>
+            <a:pPr algn="ctr" indent="0" marL="0">
+              <a:buNone/>
+            </a:pPr>
+            <a:r>
+              <a:rPr lang="en-US" sz="1000" b="1" dirty="0">
+                <a:solidFill>
+                  <a:srgbClr val="1A1A2E"/>
+                </a:solidFill>
+                <a:latin typeface="Century Gothic" pitchFamily="34" charset="0"/>
+                <a:ea typeface="Century Gothic" pitchFamily="34" charset="-122"/>
+                <a:cs typeface="Century Gothic" pitchFamily="34" charset="-120"/>
+              </a:rPr>
+              <a:t>LEER: conversación para preguntar</a:t>
+            </a:r>
+            <a:endParaRPr lang="en-US" sz="1000" dirty="0"/>
+          </a:p>
+        </p:txBody>
+      </p:sp>
+      <p:sp>
+        <p:nvSpPr>
+          <p:cNvPr id="15" name="Text 11"/>
+          <p:cNvSpPr txBox="1"/>
+          <p:nvPr/>
+        </p:nvSpPr>
+        <p:spPr>
+          <a:xfrm>
+            <a:off x="2807208" y="2697480"/>
+            <a:ext cx="2121408" cy="274320"/>
+          </a:xfrm>
+          <a:prstGeom prst="rect">
+            <a:avLst/>
+          </a:prstGeom>
+          <a:noFill/>
+          <a:ln/>
+        </p:spPr>
+        <p:txBody>
+          <a:bodyPr wrap="square" lIns="0" tIns="0" rIns="0" bIns="0" rtlCol="0" anchor="t"/>
+          <a:lstStyle/>
+          <a:p>
+            <a:pPr algn="ctr" indent="0" marL="0">
+              <a:buNone/>
+            </a:pPr>
+            <a:r>
+              <a:rPr lang="en-US" sz="900" dirty="0">
+                <a:solidFill>
+                  <a:srgbClr val="FF8C47"/>
+                </a:solidFill>
+                <a:latin typeface="Century Gothic" pitchFamily="34" charset="0"/>
+                <a:ea typeface="Century Gothic" pitchFamily="34" charset="-122"/>
+                <a:cs typeface="Century Gothic" pitchFamily="34" charset="-120"/>
+              </a:rPr>
+              <a:t>Semana 1</a:t>
+            </a:r>
+            <a:endParaRPr lang="en-US" sz="900" dirty="0"/>
+          </a:p>
+        </p:txBody>
+      </p:sp>
+      <p:sp>
+        <p:nvSpPr>
+          <p:cNvPr id="16" name="Shape 12"/>
+          <p:cNvSpPr/>
+          <p:nvPr/>
+        </p:nvSpPr>
+        <p:spPr>
+          <a:xfrm>
+            <a:off x="5897880" y="1783080"/>
+            <a:ext cx="365760" cy="365760"/>
+          </a:xfrm>
+          <a:prstGeom prst="ellipse">
+            <a:avLst/>
+          </a:prstGeom>
+          <a:solidFill>
+            <a:srgbClr val="DB2259"/>
+          </a:solidFill>
+          <a:ln/>
+        </p:spPr>
+      </p:sp>
+      <p:sp>
+        <p:nvSpPr>
+          <p:cNvPr id="17" name="Text 13"/>
+          <p:cNvSpPr txBox="1"/>
+          <p:nvPr/>
+        </p:nvSpPr>
+        <p:spPr>
+          <a:xfrm>
+            <a:off x="5897880" y="1783080"/>
+            <a:ext cx="365760" cy="365760"/>
+          </a:xfrm>
+          <a:prstGeom prst="rect">
+            <a:avLst/>
+          </a:prstGeom>
+          <a:noFill/>
+          <a:ln/>
+        </p:spPr>
+        <p:txBody>
+          <a:bodyPr wrap="square" lIns="0" tIns="0" rIns="0" bIns="0" rtlCol="0" anchor="ctr"/>
+          <a:lstStyle/>
+          <a:p>
+            <a:pPr algn="ctr" indent="0" marL="0">
+              <a:buNone/>
+            </a:pPr>
+            <a:r>
+              <a:rPr lang="en-US" sz="1000" b="1" dirty="0">
+                <a:solidFill>
+                  <a:srgbClr val="FFFFFF"/>
+                </a:solidFill>
+                <a:latin typeface="Century Gothic" pitchFamily="34" charset="0"/>
+                <a:ea typeface="Century Gothic" pitchFamily="34" charset="-122"/>
+                <a:cs typeface="Century Gothic" pitchFamily="34" charset="-120"/>
+              </a:rPr>
+              <a:t>3</a:t>
+            </a:r>
+            <a:endParaRPr lang="en-US" sz="1000" dirty="0"/>
+          </a:p>
+        </p:txBody>
+      </p:sp>
+      <p:sp>
+        <p:nvSpPr>
+          <p:cNvPr id="18" name="Text 14"/>
+          <p:cNvSpPr txBox="1"/>
+          <p:nvPr/>
+        </p:nvSpPr>
+        <p:spPr>
+          <a:xfrm>
+            <a:off x="5020056" y="2240280"/>
+            <a:ext cx="2121408" cy="457200"/>
+          </a:xfrm>
+          <a:prstGeom prst="rect">
+            <a:avLst/>
+          </a:prstGeom>
+          <a:noFill/>
+          <a:ln/>
+        </p:spPr>
+        <p:txBody>
+          <a:bodyPr wrap="square" lIns="0" tIns="0" rIns="0" bIns="0" rtlCol="0" anchor="t"/>
+          <a:lstStyle/>
+          <a:p>
+            <a:pPr algn="ctr" indent="0" marL="0">
+              <a:buNone/>
+            </a:pPr>
+            <a:r>
+              <a:rPr lang="en-US" sz="1000" b="1" dirty="0">
+                <a:solidFill>
+                  <a:srgbClr val="1A1A2E"/>
+                </a:solidFill>
+                <a:latin typeface="Century Gothic" pitchFamily="34" charset="0"/>
+                <a:ea typeface="Century Gothic" pitchFamily="34" charset="-122"/>
+                <a:cs typeface="Century Gothic" pitchFamily="34" charset="-120"/>
+              </a:rPr>
+              <a:t>ADAPTAR: una o dos variables</a:t>
+            </a:r>
+            <a:endParaRPr lang="en-US" sz="1000" dirty="0"/>
+          </a:p>
+        </p:txBody>
+      </p:sp>
+      <p:sp>
+        <p:nvSpPr>
+          <p:cNvPr id="19" name="Text 15"/>
+          <p:cNvSpPr txBox="1"/>
+          <p:nvPr/>
+        </p:nvSpPr>
+        <p:spPr>
+          <a:xfrm>
+            <a:off x="5020056" y="2697480"/>
+            <a:ext cx="2121408" cy="274320"/>
+          </a:xfrm>
+          <a:prstGeom prst="rect">
+            <a:avLst/>
+          </a:prstGeom>
+          <a:noFill/>
+          <a:ln/>
+        </p:spPr>
+        <p:txBody>
+          <a:bodyPr wrap="square" lIns="0" tIns="0" rIns="0" bIns="0" rtlCol="0" anchor="t"/>
+          <a:lstStyle/>
+          <a:p>
+            <a:pPr algn="ctr" indent="0" marL="0">
+              <a:buNone/>
+            </a:pPr>
+            <a:r>
+              <a:rPr lang="en-US" sz="900" dirty="0">
+                <a:solidFill>
+                  <a:srgbClr val="FF8C47"/>
+                </a:solidFill>
+                <a:latin typeface="Century Gothic" pitchFamily="34" charset="0"/>
+                <a:ea typeface="Century Gothic" pitchFamily="34" charset="-122"/>
+                <a:cs typeface="Century Gothic" pitchFamily="34" charset="-120"/>
+              </a:rPr>
+              <a:t>Semanas 2–3</a:t>
+            </a:r>
+            <a:endParaRPr lang="en-US" sz="900" dirty="0"/>
+          </a:p>
+        </p:txBody>
+      </p:sp>
+      <p:sp>
+        <p:nvSpPr>
+          <p:cNvPr id="20" name="Shape 16"/>
+          <p:cNvSpPr/>
+          <p:nvPr/>
+        </p:nvSpPr>
+        <p:spPr>
+          <a:xfrm>
+            <a:off x="8110728" y="1783080"/>
+            <a:ext cx="365760" cy="365760"/>
+          </a:xfrm>
+          <a:prstGeom prst="ellipse">
+            <a:avLst/>
+          </a:prstGeom>
+          <a:solidFill>
+            <a:srgbClr val="C8136C"/>
+          </a:solidFill>
+          <a:ln/>
+        </p:spPr>
+      </p:sp>
+      <p:sp>
+        <p:nvSpPr>
+          <p:cNvPr id="21" name="Text 17"/>
+          <p:cNvSpPr txBox="1"/>
+          <p:nvPr/>
+        </p:nvSpPr>
+        <p:spPr>
+          <a:xfrm>
+            <a:off x="8110728" y="1783080"/>
+            <a:ext cx="365760" cy="365760"/>
+          </a:xfrm>
+          <a:prstGeom prst="rect">
+            <a:avLst/>
+          </a:prstGeom>
+          <a:noFill/>
+          <a:ln/>
+        </p:spPr>
+        <p:txBody>
+          <a:bodyPr wrap="square" lIns="0" tIns="0" rIns="0" bIns="0" rtlCol="0" anchor="ctr"/>
+          <a:lstStyle/>
+          <a:p>
+            <a:pPr algn="ctr" indent="0" marL="0">
+              <a:buNone/>
+            </a:pPr>
+            <a:r>
+              <a:rPr lang="en-US" sz="1000" b="1" dirty="0">
+                <a:solidFill>
+                  <a:srgbClr val="FFFFFF"/>
+                </a:solidFill>
+                <a:latin typeface="Century Gothic" pitchFamily="34" charset="0"/>
+                <a:ea typeface="Century Gothic" pitchFamily="34" charset="-122"/>
+                <a:cs typeface="Century Gothic" pitchFamily="34" charset="-120"/>
+              </a:rPr>
+              <a:t>4</a:t>
+            </a:r>
+            <a:endParaRPr lang="en-US" sz="1000" dirty="0"/>
+          </a:p>
+        </p:txBody>
+      </p:sp>
+      <p:sp>
+        <p:nvSpPr>
+          <p:cNvPr id="22" name="Text 18"/>
+          <p:cNvSpPr txBox="1"/>
+          <p:nvPr/>
+        </p:nvSpPr>
+        <p:spPr>
+          <a:xfrm>
+            <a:off x="7232904" y="2240280"/>
+            <a:ext cx="2121408" cy="457200"/>
+          </a:xfrm>
+          <a:prstGeom prst="rect">
+            <a:avLst/>
+          </a:prstGeom>
+          <a:noFill/>
+          <a:ln/>
+        </p:spPr>
+        <p:txBody>
+          <a:bodyPr wrap="square" lIns="0" tIns="0" rIns="0" bIns="0" rtlCol="0" anchor="t"/>
+          <a:lstStyle/>
+          <a:p>
+            <a:pPr algn="ctr" indent="0" marL="0">
+              <a:buNone/>
+            </a:pPr>
+            <a:r>
+              <a:rPr lang="en-US" sz="1000" b="1" dirty="0">
+                <a:solidFill>
+                  <a:srgbClr val="1A1A2E"/>
+                </a:solidFill>
+                <a:latin typeface="Century Gothic" pitchFamily="34" charset="0"/>
+                <a:ea typeface="Century Gothic" pitchFamily="34" charset="-122"/>
+                <a:cs typeface="Century Gothic" pitchFamily="34" charset="-120"/>
+              </a:rPr>
+              <a:t>ALINEAR: resultado y estándar</a:t>
+            </a:r>
+            <a:endParaRPr lang="en-US" sz="1000" dirty="0"/>
+          </a:p>
+        </p:txBody>
+      </p:sp>
+      <p:sp>
+        <p:nvSpPr>
+          <p:cNvPr id="23" name="Text 19"/>
+          <p:cNvSpPr txBox="1"/>
+          <p:nvPr/>
+        </p:nvSpPr>
+        <p:spPr>
+          <a:xfrm>
+            <a:off x="7232904" y="2697480"/>
+            <a:ext cx="2121408" cy="274320"/>
+          </a:xfrm>
+          <a:prstGeom prst="rect">
+            <a:avLst/>
+          </a:prstGeom>
+          <a:noFill/>
+          <a:ln/>
+        </p:spPr>
+        <p:txBody>
+          <a:bodyPr wrap="square" lIns="0" tIns="0" rIns="0" bIns="0" rtlCol="0" anchor="t"/>
+          <a:lstStyle/>
+          <a:p>
+            <a:pPr algn="ctr" indent="0" marL="0">
+              <a:buNone/>
+            </a:pPr>
+            <a:r>
+              <a:rPr lang="en-US" sz="900" dirty="0">
+                <a:solidFill>
+                  <a:srgbClr val="FF8C47"/>
+                </a:solidFill>
+                <a:latin typeface="Century Gothic" pitchFamily="34" charset="0"/>
+                <a:ea typeface="Century Gothic" pitchFamily="34" charset="-122"/>
+                <a:cs typeface="Century Gothic" pitchFamily="34" charset="-120"/>
+              </a:rPr>
+              <a:t>Semana 4</a:t>
+            </a:r>
+            <a:endParaRPr lang="en-US" sz="900" dirty="0"/>
+          </a:p>
+        </p:txBody>
+      </p:sp>
+      <p:sp>
+        <p:nvSpPr>
+          <p:cNvPr id="24" name="Shape 20"/>
+          <p:cNvSpPr/>
+          <p:nvPr/>
+        </p:nvSpPr>
+        <p:spPr>
+          <a:xfrm>
+            <a:off x="10323576" y="1783080"/>
+            <a:ext cx="365760" cy="365760"/>
+          </a:xfrm>
+          <a:prstGeom prst="ellipse">
+            <a:avLst/>
+          </a:prstGeom>
+          <a:solidFill>
+            <a:srgbClr val="5B2A86"/>
+          </a:solidFill>
+          <a:ln/>
+        </p:spPr>
+      </p:sp>
+      <p:sp>
+        <p:nvSpPr>
+          <p:cNvPr id="25" name="Text 21"/>
+          <p:cNvSpPr txBox="1"/>
+          <p:nvPr/>
+        </p:nvSpPr>
+        <p:spPr>
+          <a:xfrm>
+            <a:off x="10323576" y="1783080"/>
+            <a:ext cx="365760" cy="365760"/>
+          </a:xfrm>
+          <a:prstGeom prst="rect">
+            <a:avLst/>
+          </a:prstGeom>
+          <a:noFill/>
+          <a:ln/>
+        </p:spPr>
+        <p:txBody>
+          <a:bodyPr wrap="square" lIns="0" tIns="0" rIns="0" bIns="0" rtlCol="0" anchor="ctr"/>
+          <a:lstStyle/>
+          <a:p>
+            <a:pPr algn="ctr" indent="0" marL="0">
+              <a:buNone/>
+            </a:pPr>
+            <a:r>
+              <a:rPr lang="en-US" sz="1000" b="1" dirty="0">
+                <a:solidFill>
+                  <a:srgbClr val="FFFFFF"/>
+                </a:solidFill>
+                <a:latin typeface="Century Gothic" pitchFamily="34" charset="0"/>
+                <a:ea typeface="Century Gothic" pitchFamily="34" charset="-122"/>
+                <a:cs typeface="Century Gothic" pitchFamily="34" charset="-120"/>
+              </a:rPr>
+              <a:t>5</a:t>
+            </a:r>
+            <a:endParaRPr lang="en-US" sz="1000" dirty="0"/>
+          </a:p>
+        </p:txBody>
+      </p:sp>
+      <p:sp>
+        <p:nvSpPr>
+          <p:cNvPr id="26" name="Text 22"/>
+          <p:cNvSpPr txBox="1"/>
+          <p:nvPr/>
+        </p:nvSpPr>
+        <p:spPr>
+          <a:xfrm>
+            <a:off x="9445752" y="2240280"/>
+            <a:ext cx="2121408" cy="457200"/>
+          </a:xfrm>
+          <a:prstGeom prst="rect">
+            <a:avLst/>
+          </a:prstGeom>
+          <a:noFill/>
+          <a:ln/>
+        </p:spPr>
+        <p:txBody>
+          <a:bodyPr wrap="square" lIns="0" tIns="0" rIns="0" bIns="0" rtlCol="0" anchor="t"/>
+          <a:lstStyle/>
+          <a:p>
+            <a:pPr algn="ctr" indent="0" marL="0">
+              <a:buNone/>
+            </a:pPr>
+            <a:r>
+              <a:rPr lang="en-US" sz="1000" b="1" dirty="0">
+                <a:solidFill>
+                  <a:srgbClr val="1A1A2E"/>
+                </a:solidFill>
+                <a:latin typeface="Century Gothic" pitchFamily="34" charset="0"/>
+                <a:ea typeface="Century Gothic" pitchFamily="34" charset="-122"/>
+                <a:cs typeface="Century Gothic" pitchFamily="34" charset="-120"/>
+              </a:rPr>
+              <a:t>Compartir aprendizajes</a:t>
+            </a:r>
+            <a:endParaRPr lang="en-US" sz="1000" dirty="0"/>
+          </a:p>
+        </p:txBody>
+      </p:sp>
+      <p:sp>
+        <p:nvSpPr>
+          <p:cNvPr id="27" name="Text 23"/>
+          <p:cNvSpPr txBox="1"/>
+          <p:nvPr/>
+        </p:nvSpPr>
+        <p:spPr>
+          <a:xfrm>
+            <a:off x="9445752" y="2697480"/>
+            <a:ext cx="2121408" cy="274320"/>
+          </a:xfrm>
+          <a:prstGeom prst="rect">
+            <a:avLst/>
+          </a:prstGeom>
+          <a:noFill/>
+          <a:ln/>
+        </p:spPr>
+        <p:txBody>
+          <a:bodyPr wrap="square" lIns="0" tIns="0" rIns="0" bIns="0" rtlCol="0" anchor="t"/>
+          <a:lstStyle/>
+          <a:p>
+            <a:pPr algn="ctr" indent="0" marL="0">
+              <a:buNone/>
+            </a:pPr>
+            <a:r>
+              <a:rPr lang="en-US" sz="900" dirty="0">
+                <a:solidFill>
+                  <a:srgbClr val="FF8C47"/>
+                </a:solidFill>
+                <a:latin typeface="Century Gothic" pitchFamily="34" charset="0"/>
+                <a:ea typeface="Century Gothic" pitchFamily="34" charset="-122"/>
+                <a:cs typeface="Century Gothic" pitchFamily="34" charset="-120"/>
+              </a:rPr>
+              <a:t>Día 35–45</a:t>
+            </a:r>
+            <a:endParaRPr lang="en-US" sz="900" dirty="0"/>
+          </a:p>
+        </p:txBody>
+      </p:sp>
+      <p:sp>
+        <p:nvSpPr>
+          <p:cNvPr id="28" name="Shape 24"/>
+          <p:cNvSpPr/>
+          <p:nvPr/>
+        </p:nvSpPr>
+        <p:spPr>
+          <a:xfrm>
+            <a:off x="548640" y="3749040"/>
+            <a:ext cx="2103120" cy="1371600"/>
+          </a:xfrm>
+          <a:prstGeom prst="roundRect">
+            <a:avLst>
+              <a:gd name="adj" fmla="val 4000"/>
+            </a:avLst>
+          </a:prstGeom>
+          <a:solidFill>
+            <a:srgbClr val="F4F5F9"/>
+          </a:solidFill>
+          <a:ln/>
+        </p:spPr>
+      </p:sp>
+      <p:sp>
+        <p:nvSpPr>
+          <p:cNvPr id="29" name="Text 25"/>
+          <p:cNvSpPr txBox="1"/>
+          <p:nvPr/>
+        </p:nvSpPr>
+        <p:spPr>
+          <a:xfrm>
+            <a:off x="685800" y="3886200"/>
+            <a:ext cx="1828800" cy="731520"/>
+          </a:xfrm>
+          <a:prstGeom prst="rect">
+            <a:avLst/>
+          </a:prstGeom>
+          <a:noFill/>
+          <a:ln/>
+        </p:spPr>
+        <p:txBody>
+          <a:bodyPr wrap="square" lIns="0" tIns="0" rIns="0" bIns="0" rtlCol="0" anchor="t"/>
+          <a:lstStyle/>
+          <a:p>
+            <a:pPr indent="0" marL="0">
+              <a:buNone/>
+            </a:pPr>
+            <a:r>
+              <a:rPr lang="en-US" sz="1400" b="1" dirty="0">
+                <a:solidFill>
+                  <a:srgbClr val="1A1A2E"/>
+                </a:solidFill>
+                <a:latin typeface="Century Gothic" pitchFamily="34" charset="0"/>
+                <a:ea typeface="Century Gothic" pitchFamily="34" charset="-122"/>
+                <a:cs typeface="Century Gothic" pitchFamily="34" charset="-120"/>
+              </a:rPr>
+              <a:t>Lo que supuse</a:t>
+            </a:r>
+            <a:endParaRPr lang="en-US" sz="1400" dirty="0"/>
+          </a:p>
+        </p:txBody>
+      </p:sp>
+      <p:sp>
+        <p:nvSpPr>
+          <p:cNvPr id="30" name="Shape 26"/>
+          <p:cNvSpPr/>
+          <p:nvPr/>
+        </p:nvSpPr>
+        <p:spPr>
+          <a:xfrm>
+            <a:off x="2779776" y="3749040"/>
+            <a:ext cx="2103120" cy="1371600"/>
+          </a:xfrm>
+          <a:prstGeom prst="roundRect">
+            <a:avLst>
+              <a:gd name="adj" fmla="val 4000"/>
+            </a:avLst>
+          </a:prstGeom>
+          <a:solidFill>
+            <a:srgbClr val="F4F5F9"/>
+          </a:solidFill>
+          <a:ln/>
+        </p:spPr>
+      </p:sp>
+      <p:sp>
+        <p:nvSpPr>
+          <p:cNvPr id="31" name="Text 27"/>
+          <p:cNvSpPr txBox="1"/>
+          <p:nvPr/>
+        </p:nvSpPr>
+        <p:spPr>
+          <a:xfrm>
+            <a:off x="2916936" y="3886200"/>
+            <a:ext cx="1828800" cy="731520"/>
+          </a:xfrm>
+          <a:prstGeom prst="rect">
+            <a:avLst/>
+          </a:prstGeom>
+          <a:noFill/>
+          <a:ln/>
+        </p:spPr>
+        <p:txBody>
+          <a:bodyPr wrap="square" lIns="0" tIns="0" rIns="0" bIns="0" rtlCol="0" anchor="t"/>
+          <a:lstStyle/>
+          <a:p>
+            <a:pPr indent="0" marL="0">
+              <a:buNone/>
+            </a:pPr>
+            <a:r>
+              <a:rPr lang="en-US" sz="1400" b="1" dirty="0">
+                <a:solidFill>
+                  <a:srgbClr val="1A1A2E"/>
+                </a:solidFill>
+                <a:latin typeface="Century Gothic" pitchFamily="34" charset="0"/>
+                <a:ea typeface="Century Gothic" pitchFamily="34" charset="-122"/>
+                <a:cs typeface="Century Gothic" pitchFamily="34" charset="-120"/>
+              </a:rPr>
+              <a:t>Lo que pregunté</a:t>
+            </a:r>
+            <a:endParaRPr lang="en-US" sz="1400" dirty="0"/>
+          </a:p>
+        </p:txBody>
+      </p:sp>
+      <p:sp>
+        <p:nvSpPr>
+          <p:cNvPr id="32" name="Shape 28"/>
+          <p:cNvSpPr/>
+          <p:nvPr/>
+        </p:nvSpPr>
+        <p:spPr>
+          <a:xfrm>
+            <a:off x="5010912" y="3749040"/>
+            <a:ext cx="2103120" cy="1371600"/>
+          </a:xfrm>
+          <a:prstGeom prst="roundRect">
+            <a:avLst>
+              <a:gd name="adj" fmla="val 4000"/>
+            </a:avLst>
+          </a:prstGeom>
+          <a:solidFill>
+            <a:srgbClr val="F4F5F9"/>
+          </a:solidFill>
+          <a:ln/>
+        </p:spPr>
+      </p:sp>
+      <p:sp>
+        <p:nvSpPr>
+          <p:cNvPr id="33" name="Text 29"/>
+          <p:cNvSpPr txBox="1"/>
+          <p:nvPr/>
+        </p:nvSpPr>
+        <p:spPr>
+          <a:xfrm>
+            <a:off x="5148072" y="3886200"/>
+            <a:ext cx="1828800" cy="731520"/>
+          </a:xfrm>
+          <a:prstGeom prst="rect">
+            <a:avLst/>
+          </a:prstGeom>
+          <a:noFill/>
+          <a:ln/>
+        </p:spPr>
+        <p:txBody>
+          <a:bodyPr wrap="square" lIns="0" tIns="0" rIns="0" bIns="0" rtlCol="0" anchor="t"/>
+          <a:lstStyle/>
+          <a:p>
+            <a:pPr indent="0" marL="0">
+              <a:buNone/>
+            </a:pPr>
+            <a:r>
+              <a:rPr lang="en-US" sz="1400" b="1" dirty="0">
+                <a:solidFill>
+                  <a:srgbClr val="1A1A2E"/>
+                </a:solidFill>
+                <a:latin typeface="Century Gothic" pitchFamily="34" charset="0"/>
+                <a:ea typeface="Century Gothic" pitchFamily="34" charset="-122"/>
+                <a:cs typeface="Century Gothic" pitchFamily="34" charset="-120"/>
+              </a:rPr>
+              <a:t>Lo que aprendí</a:t>
+            </a:r>
+            <a:endParaRPr lang="en-US" sz="1400" dirty="0"/>
+          </a:p>
+        </p:txBody>
+      </p:sp>
+      <p:sp>
+        <p:nvSpPr>
+          <p:cNvPr id="34" name="Shape 30"/>
+          <p:cNvSpPr/>
+          <p:nvPr/>
+        </p:nvSpPr>
+        <p:spPr>
+          <a:xfrm>
+            <a:off x="7242048" y="3749040"/>
+            <a:ext cx="2103120" cy="1371600"/>
+          </a:xfrm>
+          <a:prstGeom prst="roundRect">
+            <a:avLst>
+              <a:gd name="adj" fmla="val 4000"/>
+            </a:avLst>
+          </a:prstGeom>
+          <a:solidFill>
+            <a:srgbClr val="F4F5F9"/>
+          </a:solidFill>
+          <a:ln/>
+        </p:spPr>
+      </p:sp>
+      <p:sp>
+        <p:nvSpPr>
+          <p:cNvPr id="35" name="Text 31"/>
+          <p:cNvSpPr txBox="1"/>
+          <p:nvPr/>
+        </p:nvSpPr>
+        <p:spPr>
+          <a:xfrm>
+            <a:off x="7379208" y="3886200"/>
+            <a:ext cx="1828800" cy="731520"/>
+          </a:xfrm>
+          <a:prstGeom prst="rect">
+            <a:avLst/>
+          </a:prstGeom>
+          <a:noFill/>
+          <a:ln/>
+        </p:spPr>
+        <p:txBody>
+          <a:bodyPr wrap="square" lIns="0" tIns="0" rIns="0" bIns="0" rtlCol="0" anchor="t"/>
+          <a:lstStyle/>
+          <a:p>
+            <a:pPr indent="0" marL="0">
+              <a:buNone/>
+            </a:pPr>
+            <a:r>
+              <a:rPr lang="en-US" sz="1400" b="1" dirty="0">
+                <a:solidFill>
+                  <a:srgbClr val="1A1A2E"/>
+                </a:solidFill>
+                <a:latin typeface="Century Gothic" pitchFamily="34" charset="0"/>
+                <a:ea typeface="Century Gothic" pitchFamily="34" charset="-122"/>
+                <a:cs typeface="Century Gothic" pitchFamily="34" charset="-120"/>
+              </a:rPr>
+              <a:t>Lo que cambié</a:t>
+            </a:r>
+            <a:endParaRPr lang="en-US" sz="1400" dirty="0"/>
+          </a:p>
+        </p:txBody>
+      </p:sp>
+      <p:sp>
+        <p:nvSpPr>
+          <p:cNvPr id="36" name="Shape 32"/>
+          <p:cNvSpPr/>
+          <p:nvPr/>
+        </p:nvSpPr>
+        <p:spPr>
+          <a:xfrm>
+            <a:off x="9473184" y="3749040"/>
+            <a:ext cx="2103120" cy="1371600"/>
+          </a:xfrm>
+          <a:prstGeom prst="roundRect">
+            <a:avLst>
+              <a:gd name="adj" fmla="val 4000"/>
+            </a:avLst>
+          </a:prstGeom>
+          <a:solidFill>
+            <a:srgbClr val="F4F5F9"/>
+          </a:solidFill>
+          <a:ln/>
+        </p:spPr>
+      </p:sp>
+      <p:sp>
+        <p:nvSpPr>
+          <p:cNvPr id="37" name="Text 33"/>
+          <p:cNvSpPr txBox="1"/>
+          <p:nvPr/>
+        </p:nvSpPr>
+        <p:spPr>
+          <a:xfrm>
+            <a:off x="9610344" y="3886200"/>
+            <a:ext cx="1828800" cy="731520"/>
+          </a:xfrm>
+          <a:prstGeom prst="rect">
+            <a:avLst/>
+          </a:prstGeom>
+          <a:noFill/>
+          <a:ln/>
+        </p:spPr>
+        <p:txBody>
+          <a:bodyPr wrap="square" lIns="0" tIns="0" rIns="0" bIns="0" rtlCol="0" anchor="t"/>
+          <a:lstStyle/>
+          <a:p>
+            <a:pPr indent="0" marL="0">
+              <a:buNone/>
+            </a:pPr>
+            <a:r>
+              <a:rPr lang="en-US" sz="1400" b="1" dirty="0">
+                <a:solidFill>
+                  <a:srgbClr val="1A1A2E"/>
+                </a:solidFill>
+                <a:latin typeface="Century Gothic" pitchFamily="34" charset="0"/>
+                <a:ea typeface="Century Gothic" pitchFamily="34" charset="-122"/>
+                <a:cs typeface="Century Gothic" pitchFamily="34" charset="-120"/>
+              </a:rPr>
+              <a:t>Lo que pasó</a:t>
+            </a:r>
+            <a:endParaRPr lang="en-US" sz="1400" dirty="0"/>
+          </a:p>
+        </p:txBody>
+      </p:sp>
+      <p:sp>
+        <p:nvSpPr>
+          <p:cNvPr id="38" name="Text 34"/>
+          <p:cNvSpPr txBox="1"/>
+          <p:nvPr/>
+        </p:nvSpPr>
+        <p:spPr>
+          <a:xfrm>
+            <a:off x="548640" y="5349240"/>
+            <a:ext cx="10972800" cy="411480"/>
+          </a:xfrm>
+          <a:prstGeom prst="rect">
+            <a:avLst/>
+          </a:prstGeom>
+          <a:noFill/>
+          <a:ln/>
+        </p:spPr>
+        <p:txBody>
+          <a:bodyPr wrap="square" lIns="0" tIns="0" rIns="0" bIns="0" rtlCol="0" anchor="t"/>
+          <a:lstStyle/>
+          <a:p>
+            <a:pPr indent="0" marL="0">
+              <a:buNone/>
+            </a:pPr>
+            <a:r>
+              <a:rPr lang="en-US" sz="1300" b="1" dirty="0">
+                <a:solidFill>
+                  <a:srgbClr val="FA4642"/>
+                </a:solidFill>
+                <a:latin typeface="Century Gothic" pitchFamily="34" charset="0"/>
+                <a:ea typeface="Century Gothic" pitchFamily="34" charset="-122"/>
+                <a:cs typeface="Century Gothic" pitchFamily="34" charset="-120"/>
+              </a:rPr>
+              <a:t>Bitácora personal: cinco minutos por semana. Nadie la revisa.</a:t>
+            </a:r>
+            <a:endParaRPr lang="en-US" sz="1300" dirty="0"/>
           </a:p>
         </p:txBody>
       </p:sp>
@@ -40634,6 +41432,525 @@
                 <a:ea typeface="Century Gothic" pitchFamily="34" charset="-122"/>
                 <a:cs typeface="Century Gothic" pitchFamily="34" charset="-120"/>
               </a:rPr>
+              <a:t>12 · LA OTRA PREGUNTA</a:t>
+            </a:r>
+            <a:endParaRPr lang="en-US" sz="1000" dirty="0"/>
+          </a:p>
+        </p:txBody>
+      </p:sp>
+      <p:pic>
+        <p:nvPicPr>
+          <p:cNvPr id="3" name="Image 0" descr="/home/user/Training-and-Development-PROYECTS/workshop-liderazgo-intergeneracional/src/assets/gradient_band.png">    </p:cNvPr>
+          <p:cNvPicPr>
+            <a:picLocks noChangeAspect="1"/>
+          </p:cNvPicPr>
+          <p:nvPr/>
+        </p:nvPicPr>
+        <p:blipFill>
+          <a:blip r:embed="rId1"/>
+          <a:srcRect l="0" r="0" t="0" b="0"/>
+          <a:stretch/>
+        </p:blipFill>
+        <p:spPr>
+          <a:xfrm>
+            <a:off x="548640" y="1417320"/>
+            <a:ext cx="1005840" cy="54864"/>
+          </a:xfrm>
+          <a:prstGeom prst="rect">
+            <a:avLst/>
+          </a:prstGeom>
+        </p:spPr>
+      </p:pic>
+      <p:sp>
+        <p:nvSpPr>
+          <p:cNvPr id="4" name="Text 1"/>
+          <p:cNvSpPr txBox="1"/>
+          <p:nvPr/>
+        </p:nvSpPr>
+        <p:spPr>
+          <a:xfrm>
+            <a:off x="548640" y="1645920"/>
+            <a:ext cx="10241280" cy="2651760"/>
+          </a:xfrm>
+          <a:prstGeom prst="rect">
+            <a:avLst/>
+          </a:prstGeom>
+          <a:noFill/>
+          <a:ln/>
+        </p:spPr>
+        <p:txBody>
+          <a:bodyPr wrap="square" lIns="0" tIns="0" rIns="0" bIns="0" rtlCol="0" anchor="t"/>
+          <a:lstStyle/>
+          <a:p>
+            <a:pPr indent="0" marL="0">
+              <a:lnSpc>
+                <a:spcPct val="105000"/>
+              </a:lnSpc>
+              <a:buNone/>
+            </a:pPr>
+            <a:r>
+              <a:rPr lang="en-US" sz="3000" b="1" dirty="0">
+                <a:solidFill>
+                  <a:srgbClr val="1A1A2E"/>
+                </a:solidFill>
+                <a:latin typeface="Century Gothic" pitchFamily="34" charset="0"/>
+                <a:ea typeface="Century Gothic" pitchFamily="34" charset="-122"/>
+                <a:cs typeface="Century Gothic" pitchFamily="34" charset="-120"/>
+              </a:rPr>
+              <a:t>¿Qué está ocurriendo en el entorno, qué necesita esta persona y cómo adapto mi liderazgo sin bajar el estándar?</a:t>
+            </a:r>
+            <a:endParaRPr lang="en-US" sz="3000" dirty="0"/>
+          </a:p>
+        </p:txBody>
+      </p:sp>
+      <p:sp>
+        <p:nvSpPr>
+          <p:cNvPr id="5" name="Text 2"/>
+          <p:cNvSpPr txBox="1"/>
+          <p:nvPr/>
+        </p:nvSpPr>
+        <p:spPr>
+          <a:xfrm>
+            <a:off x="548640" y="4206240"/>
+            <a:ext cx="9601200" cy="1097280"/>
+          </a:xfrm>
+          <a:prstGeom prst="rect">
+            <a:avLst/>
+          </a:prstGeom>
+          <a:noFill/>
+          <a:ln/>
+        </p:spPr>
+        <p:txBody>
+          <a:bodyPr wrap="square" lIns="0" tIns="0" rIns="0" bIns="0" rtlCol="0" anchor="t"/>
+          <a:lstStyle/>
+          <a:p>
+            <a:pPr indent="0" marL="0">
+              <a:buNone/>
+            </a:pPr>
+            <a:r>
+              <a:rPr lang="en-US" sz="1500" dirty="0">
+                <a:solidFill>
+                  <a:srgbClr val="5A5A6E"/>
+                </a:solidFill>
+                <a:latin typeface="Century Gothic" pitchFamily="34" charset="0"/>
+                <a:ea typeface="Century Gothic" pitchFamily="34" charset="-122"/>
+                <a:cs typeface="Century Gothic" pitchFamily="34" charset="-120"/>
+              </a:rPr>
+              <a:t>La pregunta que proponemos llevar de vuelta a la planta, en lugar de “¿qué les pasa a estas nuevas generaciones?”.</a:t>
+            </a:r>
+            <a:endParaRPr lang="en-US" sz="1500" dirty="0"/>
+          </a:p>
+        </p:txBody>
+      </p:sp>
+      <p:pic>
+        <p:nvPicPr>
+          <p:cNvPr id="6" name="Image 1" descr="/home/user/Training-and-Development-PROYECTS/workshop-liderazgo-intergeneracional/src/assets/am_logo.png">    </p:cNvPr>
+          <p:cNvPicPr>
+            <a:picLocks noChangeAspect="1"/>
+          </p:cNvPicPr>
+          <p:nvPr/>
+        </p:nvPicPr>
+        <p:blipFill>
+          <a:blip r:embed="rId2"/>
+          <a:stretch>
+            <a:fillRect/>
+          </a:stretch>
+        </p:blipFill>
+        <p:spPr>
+          <a:xfrm>
+            <a:off x="10561320" y="6382512"/>
+            <a:ext cx="566928" cy="234140"/>
+          </a:xfrm>
+          <a:prstGeom prst="rect">
+            <a:avLst/>
+          </a:prstGeom>
+        </p:spPr>
+      </p:pic>
+      <p:sp>
+        <p:nvSpPr>
+          <p:cNvPr id="7" name="Text 3"/>
+          <p:cNvSpPr txBox="1"/>
+          <p:nvPr/>
+        </p:nvSpPr>
+        <p:spPr>
+          <a:xfrm>
+            <a:off x="11247120" y="6446520"/>
+            <a:ext cx="411480" cy="182880"/>
+          </a:xfrm>
+          <a:prstGeom prst="rect">
+            <a:avLst/>
+          </a:prstGeom>
+          <a:noFill/>
+          <a:ln/>
+        </p:spPr>
+        <p:txBody>
+          <a:bodyPr wrap="square" lIns="0" tIns="0" rIns="0" bIns="0" rtlCol="0" anchor="t"/>
+          <a:lstStyle/>
+          <a:p>
+            <a:pPr algn="r" indent="0" marL="0">
+              <a:buNone/>
+            </a:pPr>
+            <a:r>
+              <a:rPr lang="en-US" sz="750" dirty="0">
+                <a:solidFill>
+                  <a:srgbClr val="8A8CA0"/>
+                </a:solidFill>
+                <a:latin typeface="Calibri" pitchFamily="34" charset="0"/>
+                <a:ea typeface="Calibri" pitchFamily="34" charset="-122"/>
+                <a:cs typeface="Calibri" pitchFamily="34" charset="-120"/>
+              </a:rPr>
+              <a:t>54</a:t>
+            </a:r>
+            <a:endParaRPr lang="en-US" sz="750" dirty="0"/>
+          </a:p>
+        </p:txBody>
+      </p:sp>
+    </p:spTree>
+  </p:cSld>
+  <p:clrMapOvr>
+    <a:masterClrMapping/>
+  </p:clrMapOvr>
+</p:sld>
+</file>
+
+<file path=ppt/slides/slide55.xml><?xml version="1.0" encoding="utf-8"?>
+<p:sld xmlns:a="http://schemas.openxmlformats.org/drawingml/2006/main" xmlns:r="http://schemas.openxmlformats.org/officeDocument/2006/relationships" xmlns:p="http://schemas.openxmlformats.org/presentationml/2006/main">
+  <p:cSld name="Slide 55">
+    <p:bg>
+      <p:bgPr>
+        <a:blipFill dpi="0" rotWithShape="1">
+          <a:blip r:embed="rId1">
+            <a:lum/>
+          </a:blip>
+          <a:srcRect/>
+          <a:stretch>
+            <a:fillRect/>
+          </a:stretch>
+        </a:blipFill>
+        <a:effectLst/>
+      </p:bgPr>
+    </p:bg>
+    <p:spTree>
+      <p:nvGrpSpPr>
+        <p:cNvPr id="1" name=""/>
+        <p:cNvGrpSpPr/>
+        <p:nvPr/>
+      </p:nvGrpSpPr>
+      <p:grpSpPr>
+        <a:xfrm>
+          <a:off x="0" y="0"/>
+          <a:ext cx="0" cy="0"/>
+          <a:chOff x="0" y="0"/>
+          <a:chExt cx="0" cy="0"/>
+        </a:xfrm>
+      </p:grpSpPr>
+      <p:sp>
+        <p:nvSpPr>
+          <p:cNvPr id="2" name="Text 0"/>
+          <p:cNvSpPr txBox="1"/>
+          <p:nvPr/>
+        </p:nvSpPr>
+        <p:spPr>
+          <a:xfrm>
+            <a:off x="548640" y="292608"/>
+            <a:ext cx="9875520" cy="274320"/>
+          </a:xfrm>
+          <a:prstGeom prst="rect">
+            <a:avLst/>
+          </a:prstGeom>
+          <a:noFill/>
+          <a:ln/>
+        </p:spPr>
+        <p:txBody>
+          <a:bodyPr wrap="square" lIns="0" tIns="0" rIns="0" bIns="0" rtlCol="0" anchor="t"/>
+          <a:lstStyle/>
+          <a:p>
+            <a:pPr indent="0" marL="0">
+              <a:buNone/>
+            </a:pPr>
+            <a:r>
+              <a:rPr lang="en-US" sz="1000" b="1" spc="200" kern="0" dirty="0">
+                <a:solidFill>
+                  <a:srgbClr val="FF8C47"/>
+                </a:solidFill>
+                <a:latin typeface="Century Gothic" pitchFamily="34" charset="0"/>
+                <a:ea typeface="Century Gothic" pitchFamily="34" charset="-122"/>
+                <a:cs typeface="Century Gothic" pitchFamily="34" charset="-120"/>
+              </a:rPr>
+              <a:t>12 · CIERRE</a:t>
+            </a:r>
+            <a:endParaRPr lang="en-US" sz="1000" dirty="0"/>
+          </a:p>
+        </p:txBody>
+      </p:sp>
+      <p:sp>
+        <p:nvSpPr>
+          <p:cNvPr id="3" name="Text 1"/>
+          <p:cNvSpPr txBox="1"/>
+          <p:nvPr/>
+        </p:nvSpPr>
+        <p:spPr>
+          <a:xfrm>
+            <a:off x="548640" y="1737360"/>
+            <a:ext cx="10972800" cy="1280160"/>
+          </a:xfrm>
+          <a:prstGeom prst="rect">
+            <a:avLst/>
+          </a:prstGeom>
+          <a:noFill/>
+          <a:ln/>
+        </p:spPr>
+        <p:txBody>
+          <a:bodyPr wrap="square" lIns="0" tIns="0" rIns="0" bIns="0" rtlCol="0" anchor="b"/>
+          <a:lstStyle/>
+          <a:p>
+            <a:pPr indent="0" marL="0">
+              <a:buNone/>
+            </a:pPr>
+            <a:r>
+              <a:rPr lang="en-US" sz="3800" b="1" dirty="0">
+                <a:solidFill>
+                  <a:srgbClr val="FFFFFF"/>
+                </a:solidFill>
+                <a:latin typeface="Century Gothic" pitchFamily="34" charset="0"/>
+                <a:ea typeface="Century Gothic" pitchFamily="34" charset="-122"/>
+                <a:cs typeface="Century Gothic" pitchFamily="34" charset="-120"/>
+              </a:rPr>
+              <a:t>Personas distintas no necesitan estándares distintos.</a:t>
+            </a:r>
+            <a:endParaRPr lang="en-US" sz="3800" dirty="0"/>
+          </a:p>
+        </p:txBody>
+      </p:sp>
+      <p:sp>
+        <p:nvSpPr>
+          <p:cNvPr id="4" name="Text 2"/>
+          <p:cNvSpPr txBox="1"/>
+          <p:nvPr/>
+        </p:nvSpPr>
+        <p:spPr>
+          <a:xfrm>
+            <a:off x="548640" y="3063240"/>
+            <a:ext cx="10972800" cy="1280160"/>
+          </a:xfrm>
+          <a:prstGeom prst="rect">
+            <a:avLst/>
+          </a:prstGeom>
+          <a:noFill/>
+          <a:ln/>
+        </p:spPr>
+        <p:txBody>
+          <a:bodyPr wrap="square" lIns="0" tIns="0" rIns="0" bIns="0" rtlCol="0" anchor="t"/>
+          <a:lstStyle/>
+          <a:p>
+            <a:pPr indent="0" marL="0">
+              <a:buNone/>
+            </a:pPr>
+            <a:r>
+              <a:rPr lang="en-US" sz="3800" b="1" dirty="0">
+                <a:solidFill>
+                  <a:srgbClr val="FF8C47"/>
+                </a:solidFill>
+                <a:latin typeface="Century Gothic" pitchFamily="34" charset="0"/>
+                <a:ea typeface="Century Gothic" pitchFamily="34" charset="-122"/>
+                <a:cs typeface="Century Gothic" pitchFamily="34" charset="-120"/>
+              </a:rPr>
+              <a:t>Pueden necesitar un liderazgo distinto.</a:t>
+            </a:r>
+            <a:endParaRPr lang="en-US" sz="3800" dirty="0"/>
+          </a:p>
+        </p:txBody>
+      </p:sp>
+      <p:pic>
+        <p:nvPicPr>
+          <p:cNvPr id="5" name="Image 0" descr="/home/user/Training-and-Development-PROYECTS/workshop-liderazgo-intergeneracional/src/assets/gradient_band.png">    </p:cNvPr>
+          <p:cNvPicPr>
+            <a:picLocks noChangeAspect="1"/>
+          </p:cNvPicPr>
+          <p:nvPr/>
+        </p:nvPicPr>
+        <p:blipFill>
+          <a:blip r:embed="rId2"/>
+          <a:srcRect l="0" r="0" t="0" b="0"/>
+          <a:stretch/>
+        </p:blipFill>
+        <p:spPr>
+          <a:xfrm>
+            <a:off x="548640" y="4572000"/>
+            <a:ext cx="2743200" cy="64008"/>
+          </a:xfrm>
+          <a:prstGeom prst="rect">
+            <a:avLst/>
+          </a:prstGeom>
+        </p:spPr>
+      </p:pic>
+      <p:sp>
+        <p:nvSpPr>
+          <p:cNvPr id="6" name="Text 3"/>
+          <p:cNvSpPr txBox="1"/>
+          <p:nvPr/>
+        </p:nvSpPr>
+        <p:spPr>
+          <a:xfrm>
+            <a:off x="548640" y="4800600"/>
+            <a:ext cx="10058400" cy="914400"/>
+          </a:xfrm>
+          <a:prstGeom prst="rect">
+            <a:avLst/>
+          </a:prstGeom>
+          <a:noFill/>
+          <a:ln/>
+        </p:spPr>
+        <p:txBody>
+          <a:bodyPr wrap="square" lIns="0" tIns="0" rIns="0" bIns="0" rtlCol="0" anchor="t"/>
+          <a:lstStyle/>
+          <a:p>
+            <a:pPr indent="0" marL="0">
+              <a:buNone/>
+            </a:pPr>
+            <a:r>
+              <a:rPr lang="en-US" sz="1500" dirty="0">
+                <a:solidFill>
+                  <a:srgbClr val="D6D8EA"/>
+                </a:solidFill>
+                <a:latin typeface="Century Gothic" pitchFamily="34" charset="0"/>
+                <a:ea typeface="Century Gothic" pitchFamily="34" charset="-122"/>
+                <a:cs typeface="Century Gothic" pitchFamily="34" charset="-120"/>
+              </a:rPr>
+              <a:t>En una siderúrgica, la seguridad no se adapta. El liderazgo sí.</a:t>
+            </a:r>
+            <a:endParaRPr lang="en-US" sz="1500" dirty="0"/>
+          </a:p>
+        </p:txBody>
+      </p:sp>
+      <p:pic>
+        <p:nvPicPr>
+          <p:cNvPr id="7" name="Image 1" descr="/home/user/Training-and-Development-PROYECTS/workshop-liderazgo-intergeneracional/src/assets/am_logo_white.png">    </p:cNvPr>
+          <p:cNvPicPr>
+            <a:picLocks noChangeAspect="1"/>
+          </p:cNvPicPr>
+          <p:nvPr/>
+        </p:nvPicPr>
+        <p:blipFill>
+          <a:blip r:embed="rId3"/>
+          <a:stretch>
+            <a:fillRect/>
+          </a:stretch>
+        </p:blipFill>
+        <p:spPr>
+          <a:xfrm>
+            <a:off x="10561320" y="6382512"/>
+            <a:ext cx="566928" cy="234140"/>
+          </a:xfrm>
+          <a:prstGeom prst="rect">
+            <a:avLst/>
+          </a:prstGeom>
+        </p:spPr>
+      </p:pic>
+      <p:sp>
+        <p:nvSpPr>
+          <p:cNvPr id="8" name="Text 4"/>
+          <p:cNvSpPr txBox="1"/>
+          <p:nvPr/>
+        </p:nvSpPr>
+        <p:spPr>
+          <a:xfrm>
+            <a:off x="11247120" y="6446520"/>
+            <a:ext cx="411480" cy="182880"/>
+          </a:xfrm>
+          <a:prstGeom prst="rect">
+            <a:avLst/>
+          </a:prstGeom>
+          <a:noFill/>
+          <a:ln/>
+        </p:spPr>
+        <p:txBody>
+          <a:bodyPr wrap="square" lIns="0" tIns="0" rIns="0" bIns="0" rtlCol="0" anchor="t"/>
+          <a:lstStyle/>
+          <a:p>
+            <a:pPr algn="r" indent="0" marL="0">
+              <a:buNone/>
+            </a:pPr>
+            <a:r>
+              <a:rPr lang="en-US" sz="750" dirty="0">
+                <a:solidFill>
+                  <a:srgbClr val="B8BACB"/>
+                </a:solidFill>
+                <a:latin typeface="Calibri" pitchFamily="34" charset="0"/>
+                <a:ea typeface="Calibri" pitchFamily="34" charset="-122"/>
+                <a:cs typeface="Calibri" pitchFamily="34" charset="-120"/>
+              </a:rPr>
+              <a:t>55</a:t>
+            </a:r>
+            <a:endParaRPr lang="en-US" sz="750" dirty="0"/>
+          </a:p>
+        </p:txBody>
+      </p:sp>
+    </p:spTree>
+  </p:cSld>
+  <p:clrMapOvr>
+    <a:masterClrMapping/>
+  </p:clrMapOvr>
+</p:sld>
+</file>
+
+<file path=ppt/slides/slide56.xml><?xml version="1.0" encoding="utf-8"?>
+<p:sld xmlns:a="http://schemas.openxmlformats.org/drawingml/2006/main" xmlns:r="http://schemas.openxmlformats.org/officeDocument/2006/relationships" xmlns:p="http://schemas.openxmlformats.org/presentationml/2006/main" show="0">
+  <p:cSld name="Slide 56">
+    <p:bg>
+      <p:bgPr>
+        <a:solidFill>
+          <a:srgbClr val="FFFFFF"/>
+        </a:solidFill>
+      </p:bgPr>
+    </p:bg>
+    <p:spTree>
+      <p:nvGrpSpPr>
+        <p:cNvPr id="1" name=""/>
+        <p:cNvGrpSpPr/>
+        <p:nvPr/>
+      </p:nvGrpSpPr>
+      <p:grpSpPr>
+        <a:xfrm>
+          <a:off x="0" y="0"/>
+          <a:ext cx="0" cy="0"/>
+          <a:chOff x="0" y="0"/>
+          <a:chExt cx="0" cy="0"/>
+        </a:xfrm>
+      </p:grpSpPr>
+      <p:sp>
+        <p:nvSpPr>
+          <p:cNvPr id="2" name="Text 0"/>
+          <p:cNvSpPr txBox="1"/>
+          <p:nvPr/>
+        </p:nvSpPr>
+        <p:spPr>
+          <a:xfrm>
+            <a:off x="548640" y="292608"/>
+            <a:ext cx="9875520" cy="274320"/>
+          </a:xfrm>
+          <a:prstGeom prst="rect">
+            <a:avLst/>
+          </a:prstGeom>
+          <a:noFill/>
+          <a:ln/>
+        </p:spPr>
+        <p:txBody>
+          <a:bodyPr wrap="square" lIns="0" tIns="0" rIns="0" bIns="0" rtlCol="0" anchor="t"/>
+          <a:lstStyle/>
+          <a:p>
+            <a:pPr indent="0" marL="0">
+              <a:buNone/>
+            </a:pPr>
+            <a:r>
+              <a:rPr lang="en-US" sz="1000" b="1" spc="200" kern="0" dirty="0">
+                <a:solidFill>
+                  <a:srgbClr val="FA4642"/>
+                </a:solidFill>
+                <a:latin typeface="Century Gothic" pitchFamily="34" charset="0"/>
+                <a:ea typeface="Century Gothic" pitchFamily="34" charset="-122"/>
+                <a:cs typeface="Century Gothic" pitchFamily="34" charset="-120"/>
+              </a:rPr>
               <a:t>ANEXO · FUENTES PRINCIPALES</a:t>
             </a:r>
             <a:endParaRPr lang="en-US" sz="1000" dirty="0"/>
@@ -40736,7 +42053,7 @@
                 <a:ea typeface="Calibri" pitchFamily="34" charset="-122"/>
                 <a:cs typeface="Calibri" pitchFamily="34" charset="-120"/>
               </a:rPr>
-              <a:t>54</a:t>
+              <a:t>56</a:t>
             </a:r>
             <a:endParaRPr lang="en-US" sz="750" dirty="0"/>
           </a:p>
@@ -40744,7 +42061,7 @@
       </p:sp>
       <p:graphicFrame>
         <p:nvGraphicFramePr>
-          <p:cNvPr id="55" name="Table 0"/>
+          <p:cNvPr id="57" name="Table 0"/>
           <p:cNvGraphicFramePr>
             <a:graphicFrameLocks noGrp="1"/>
           </p:cNvGraphicFramePr>

--- a/workshop-liderazgo-intergeneracional/entregables/01_Deck_Liderar_entre_Generaciones_AMMX.pptx
+++ b/workshop-liderazgo-intergeneracional/entregables/01_Deck_Liderar_entre_Generaciones_AMMX.pptx
@@ -565,7 +565,7 @@
               <a:t>CÓMO EXPLICARLA
 PROPÓSITO: Recibir a la sala. La lámina está en pantalla mientras los participantes llegan; no se presenta.
 TIEMPO: Previo al inicio y 0:00–0:02 (palabras de la CHRO).
-GUION DEL FACILITADOR: Sin guion. Los facilitadores saludan en la puerta y dirigen a cada persona a su mesa asignada (la CHRO en una mesa sin reportes directos, D-13). Cada lugar tiene el cuaderno cerrado y el sobre del trabajo previo cerrado.
+GUION DEL FACILITADOR: Sin guion. Los facilitadores saludan en la puerta y dirigen a cada persona a su mesa asignada (la CHRO en una mesa sin reportes directos, D-13). Cada lugar tiene el cuaderno cerrado. Los sobres del trabajo previo los guarda B y los entrega en mano durante el Acto 11 (D-20).
 PUNTOS A CERRAR
 PREGUNTA: —
 RESPUESTA ESPERADA: —
@@ -4312,7 +4312,7 @@
 TRANSICIÓN: B: "Peguen sus hojas en la pared. Galería."
 NOTAS PARA LOS FACILITADORES
 LIDERA: B · A observa y anota qué mesa confundió "adaptar" con "conceder" y qué mesa confundió "firmeza" con "no escuchar" (se usa en el Acto 9).
-CON 4 MESAS: casos A, B, D y E. CON 5: omitir C o F según el perfil de la sala.
+CON 4 MESAS: casos A, B, D y E. CON 5: se agrega el caso C (D-20).
 La CHRO trabaja en su mesa como par; no es la relatora.</a:t>
             </a:r>
             <a:endParaRPr lang="en-US" dirty="0"/>
@@ -41690,7 +41690,7 @@
                 <a:ea typeface="Century Gothic" pitchFamily="34" charset="-122"/>
                 <a:cs typeface="Century Gothic" pitchFamily="34" charset="-120"/>
               </a:rPr>
-              <a:t>Anónima. Tres minutos.</a:t>
+              <a:t>Anónima. Dos minutos.</a:t>
             </a:r>
             <a:endParaRPr lang="en-US" sz="2200" dirty="0"/>
           </a:p>
